--- a/output/presentations/13-production-frontier.pptx
+++ b/output/presentations/13-production-frontier.pptx
@@ -2,22 +2,24 @@
 <file path=ppt/presentation.xml><?xml version="1.0" encoding="utf-8"?>
 <p:presentation xmlns:p="http://schemas.openxmlformats.org/presentationml/2006/main">
   <p:sldMasterIdLst>
-    <p:sldMasterId xmlns:r="http://schemas.openxmlformats.org/officeDocument/2006/relationships" id="2147483648" r:id="R7bdf987daa754bc8"/>
+    <p:sldMasterId xmlns:r="http://schemas.openxmlformats.org/officeDocument/2006/relationships" id="2147483648" r:id="R6fa16efa8ffc4f22"/>
   </p:sldMasterIdLst>
   <p:notesMasterIdLst>
-    <p:notesMasterId xmlns:r="http://schemas.openxmlformats.org/officeDocument/2006/relationships" r:id="R104b318140aa42ff"/>
+    <p:notesMasterId xmlns:r="http://schemas.openxmlformats.org/officeDocument/2006/relationships" r:id="Rab7b5fbfbc4f419d"/>
   </p:notesMasterIdLst>
   <p:sldIdLst>
-    <p:sldId xmlns:r="http://schemas.openxmlformats.org/officeDocument/2006/relationships" id="256" r:id="R87c691f27d394ee7"/>
-    <p:sldId xmlns:r="http://schemas.openxmlformats.org/officeDocument/2006/relationships" id="257" r:id="R382bceed953e4a5e"/>
-    <p:sldId xmlns:r="http://schemas.openxmlformats.org/officeDocument/2006/relationships" id="258" r:id="R990ae0008a874e0e"/>
-    <p:sldId xmlns:r="http://schemas.openxmlformats.org/officeDocument/2006/relationships" id="259" r:id="R702b6dbe53af4810"/>
-    <p:sldId xmlns:r="http://schemas.openxmlformats.org/officeDocument/2006/relationships" id="260" r:id="R85378e4d33cd44ea"/>
-    <p:sldId xmlns:r="http://schemas.openxmlformats.org/officeDocument/2006/relationships" id="261" r:id="R77604c863fc24e01"/>
-    <p:sldId xmlns:r="http://schemas.openxmlformats.org/officeDocument/2006/relationships" id="262" r:id="Re0a2484b3d734a2a"/>
-    <p:sldId xmlns:r="http://schemas.openxmlformats.org/officeDocument/2006/relationships" id="263" r:id="Re3d5cb6fbb4f44e6"/>
-    <p:sldId xmlns:r="http://schemas.openxmlformats.org/officeDocument/2006/relationships" id="264" r:id="Ref32e220dfaf45a1"/>
-    <p:sldId xmlns:r="http://schemas.openxmlformats.org/officeDocument/2006/relationships" id="265" r:id="Rd6c984ae3fad4864"/>
+    <p:sldId xmlns:r="http://schemas.openxmlformats.org/officeDocument/2006/relationships" id="256" r:id="R2776b35763cb4b15"/>
+    <p:sldId xmlns:r="http://schemas.openxmlformats.org/officeDocument/2006/relationships" id="257" r:id="R13fe4312cf2e43fa"/>
+    <p:sldId xmlns:r="http://schemas.openxmlformats.org/officeDocument/2006/relationships" id="258" r:id="R432547fe4fa04e55"/>
+    <p:sldId xmlns:r="http://schemas.openxmlformats.org/officeDocument/2006/relationships" id="259" r:id="Rb11a3c8c78724c40"/>
+    <p:sldId xmlns:r="http://schemas.openxmlformats.org/officeDocument/2006/relationships" id="260" r:id="Rc3ff5c92fd9849b2"/>
+    <p:sldId xmlns:r="http://schemas.openxmlformats.org/officeDocument/2006/relationships" id="261" r:id="R79b00d1e5a9d40d3"/>
+    <p:sldId xmlns:r="http://schemas.openxmlformats.org/officeDocument/2006/relationships" id="262" r:id="R99d645dd13bf48e9"/>
+    <p:sldId xmlns:r="http://schemas.openxmlformats.org/officeDocument/2006/relationships" id="263" r:id="Ra313d2e8f63143de"/>
+    <p:sldId xmlns:r="http://schemas.openxmlformats.org/officeDocument/2006/relationships" id="264" r:id="R2217bb25f19244f4"/>
+    <p:sldId xmlns:r="http://schemas.openxmlformats.org/officeDocument/2006/relationships" id="265" r:id="Re306440836e1421c"/>
+    <p:sldId xmlns:r="http://schemas.openxmlformats.org/officeDocument/2006/relationships" id="266" r:id="R86d66043631b48e8"/>
+    <p:sldId xmlns:r="http://schemas.openxmlformats.org/officeDocument/2006/relationships" id="267" r:id="R560dff12a1a74271"/>
   </p:sldIdLst>
   <p:sldSz cx="12192000" cy="6858000"/>
   <p:notesSz cx="6858000" cy="9144000"/>
@@ -461,12 +463,57 @@
           </a:p>
           <a:p xmlns:a="http://schemas.openxmlformats.org/drawingml/2006/main">
             <a:r>
+              <a:t>Edition: 2026-09-09</a:t>
+            </a:r>
+          </a:p>
+          <a:p xmlns:a="http://schemas.openxmlformats.org/drawingml/2006/main">
+            <a:r>
+              <a:t/>
+            </a:r>
+          </a:p>
+          <a:p xmlns:a="http://schemas.openxmlformats.org/drawingml/2006/main">
+            <a:r>
               <a:t>[Sources]</a:t>
             </a:r>
           </a:p>
           <a:p xmlns:a="http://schemas.openxmlformats.org/drawingml/2006/main">
             <a:r>
-              <a:t>- Supplied source presentation: 13-production-frontier.pdf</a:t>
+              <a:t>- Original source presentation: 13-production-frontier.pdf</a:t>
+            </a:r>
+          </a:p>
+          <a:p xmlns:a="http://schemas.openxmlformats.org/drawingml/2006/main">
+            <a:r>
+              <a:t>- P2: Scientific computing in the age of agentic AI. OpenAI-affiliated exploratory field report, 2026-07-28. https://cdn.openai.com/pdf/scientific-computing-in-the-age-of-agentic-ai-an-exploratory-field-report.pdf Case studies motivate verification and maintenance ownership. They do not estimate a universal productivity effect.</a:t>
+            </a:r>
+          </a:p>
+          <a:p xmlns:a="http://schemas.openxmlformats.org/drawingml/2006/main">
+            <a:r>
+              <a:t>- R3: Research acceleration: The view inside OpenAI. OpenAI observational research post, 2026-09-06. https://openai.com/index/research-acceleration-view-inside-openai/ Activity metrics do not by themselves identify causal gains in research progress.</a:t>
+            </a:r>
+          </a:p>
+          <a:p xmlns:a="http://schemas.openxmlformats.org/drawingml/2006/main">
+            <a:r>
+              <a:t/>
+            </a:r>
+          </a:p>
+          <a:p xmlns:a="http://schemas.openxmlformats.org/drawingml/2006/main">
+            <a:r>
+              <a:t>[Assessed practice]</a:t>
+            </a:r>
+          </a:p>
+          <a:p xmlns:a="http://schemas.openxmlformats.org/drawingml/2006/main">
+            <a:r>
+              <a:t>Submit the capstone bundle: baseline, bounded agent, held-out evaluation, negative tests, and an operating note. Include a reproducible command and a maintenance owner.</a:t>
+            </a:r>
+          </a:p>
+          <a:p xmlns:a="http://schemas.openxmlformats.org/drawingml/2006/main">
+            <a:r>
+              <a:t>Acceptance: The reviewer can rerun the bundle in a fresh environment and trace each conclusion to saved evidence. Follow teaching/CAPSTONE.md for the rubric.</a:t>
+            </a:r>
+          </a:p>
+          <a:p xmlns:a="http://schemas.openxmlformats.org/drawingml/2006/main">
+            <a:r>
+              <a:t>Lab: labs/08_langgraph_approval_security.ipynb</a:t>
             </a:r>
           </a:p>
         </p:txBody>
@@ -536,6 +583,136 @@
           <a:lstStyle xmlns:a="http://schemas.openxmlformats.org/drawingml/2006/main"/>
           <a:p xmlns:a="http://schemas.openxmlformats.org/drawingml/2006/main">
             <a:r>
+              <a:t>Use as retrieval practice. Ask for an answer that defines, compares, traces, and evaluates.</a:t>
+            </a:r>
+          </a:p>
+          <a:p xmlns:a="http://schemas.openxmlformats.org/drawingml/2006/main">
+            <a:r>
+              <a:t/>
+            </a:r>
+          </a:p>
+          <a:p xmlns:a="http://schemas.openxmlformats.org/drawingml/2006/main">
+            <a:r>
+              <a:t>Edition: 2026-09-09</a:t>
+            </a:r>
+          </a:p>
+          <a:p xmlns:a="http://schemas.openxmlformats.org/drawingml/2006/main">
+            <a:r>
+              <a:t/>
+            </a:r>
+          </a:p>
+          <a:p xmlns:a="http://schemas.openxmlformats.org/drawingml/2006/main">
+            <a:r>
+              <a:t>[Sources]</a:t>
+            </a:r>
+          </a:p>
+          <a:p xmlns:a="http://schemas.openxmlformats.org/drawingml/2006/main">
+            <a:r>
+              <a:t>- Original source presentation: 13-production-frontier.pdf</a:t>
+            </a:r>
+          </a:p>
+          <a:p xmlns:a="http://schemas.openxmlformats.org/drawingml/2006/main">
+            <a:r>
+              <a:t>- P2: Scientific computing in the age of agentic AI. OpenAI-affiliated exploratory field report, 2026-07-28. https://cdn.openai.com/pdf/scientific-computing-in-the-age-of-agentic-ai-an-exploratory-field-report.pdf Case studies motivate verification and maintenance ownership. They do not estimate a universal productivity effect.</a:t>
+            </a:r>
+          </a:p>
+          <a:p xmlns:a="http://schemas.openxmlformats.org/drawingml/2006/main">
+            <a:r>
+              <a:t>- R3: Research acceleration: The view inside OpenAI. OpenAI observational research post, 2026-09-06. https://openai.com/index/research-acceleration-view-inside-openai/ Activity metrics do not by themselves identify causal gains in research progress.</a:t>
+            </a:r>
+          </a:p>
+          <a:p xmlns:a="http://schemas.openxmlformats.org/drawingml/2006/main">
+            <a:r>
+              <a:t/>
+            </a:r>
+          </a:p>
+          <a:p xmlns:a="http://schemas.openxmlformats.org/drawingml/2006/main">
+            <a:r>
+              <a:t>[Assessed practice]</a:t>
+            </a:r>
+          </a:p>
+          <a:p xmlns:a="http://schemas.openxmlformats.org/drawingml/2006/main">
+            <a:r>
+              <a:t>Submit the capstone bundle: baseline, bounded agent, held-out evaluation, negative tests, and an operating note. Include a reproducible command and a maintenance owner.</a:t>
+            </a:r>
+          </a:p>
+          <a:p xmlns:a="http://schemas.openxmlformats.org/drawingml/2006/main">
+            <a:r>
+              <a:t>Acceptance: The reviewer can rerun the bundle in a fresh environment and trace each conclusion to saved evidence. Follow teaching/CAPSTONE.md for the rubric.</a:t>
+            </a:r>
+          </a:p>
+          <a:p xmlns:a="http://schemas.openxmlformats.org/drawingml/2006/main">
+            <a:r>
+              <a:t>Lab: labs/08_langgraph_approval_security.ipynb</a:t>
+            </a:r>
+          </a:p>
+        </p:txBody>
+      </p:sp>
+      <p:sp>
+        <p:nvSpPr>
+          <p:cNvPr id="4" name="Slide Number Placeholder 3"/>
+          <p:cNvSpPr>
+            <a:spLocks xmlns:a="http://schemas.openxmlformats.org/drawingml/2006/main" noGrp="1"/>
+          </p:cNvSpPr>
+          <p:nvPr>
+            <p:ph type="sldNum" idx="5"/>
+          </p:nvPr>
+        </p:nvSpPr>
+        <p:spPr/>
+        <p:txBody>
+          <a:bodyPr xmlns:a="http://schemas.openxmlformats.org/drawingml/2006/main"/>
+          <a:lstStyle xmlns:a="http://schemas.openxmlformats.org/drawingml/2006/main"/>
+          <a:p xmlns:a="http://schemas.openxmlformats.org/drawingml/2006/main"/>
+        </p:txBody>
+      </p:sp>
+    </p:spTree>
+  </p:cSld>
+  <p:clrMapOvr>
+    <a:masterClrMapping xmlns:a="http://schemas.openxmlformats.org/drawingml/2006/main"/>
+  </p:clrMapOvr>
+</p:notes>
+</file>
+
+<file path=ppt/notesSlides/notesSlide11.xml><?xml version="1.0" encoding="utf-8"?>
+<p:notes xmlns:p="http://schemas.openxmlformats.org/presentationml/2006/main">
+  <p:cSld>
+    <p:spTree>
+      <p:nvGrpSpPr>
+        <p:cNvPr id="1" name=""/>
+        <p:cNvGrpSpPr/>
+        <p:nvPr/>
+      </p:nvGrpSpPr>
+      <p:grpSpPr>
+        <a:xfrm xmlns:a="http://schemas.openxmlformats.org/drawingml/2006/main"/>
+      </p:grpSpPr>
+      <p:sp>
+        <p:nvSpPr>
+          <p:cNvPr id="2" name="Slide Image Placeholder 1"/>
+          <p:cNvSpPr>
+            <a:spLocks xmlns:a="http://schemas.openxmlformats.org/drawingml/2006/main" noGrp="1"/>
+          </p:cNvSpPr>
+          <p:nvPr>
+            <p:ph type="sldImg" idx="0"/>
+          </p:nvPr>
+        </p:nvSpPr>
+        <p:spPr/>
+      </p:sp>
+      <p:sp>
+        <p:nvSpPr>
+          <p:cNvPr id="3" name="Notes Placeholder 2"/>
+          <p:cNvSpPr>
+            <a:spLocks xmlns:a="http://schemas.openxmlformats.org/drawingml/2006/main" noGrp="1"/>
+          </p:cNvSpPr>
+          <p:nvPr>
+            <p:ph type="body" idx="1"/>
+          </p:nvPr>
+        </p:nvSpPr>
+        <p:spPr/>
+        <p:txBody>
+          <a:bodyPr xmlns:a="http://schemas.openxmlformats.org/drawingml/2006/main"/>
+          <a:lstStyle xmlns:a="http://schemas.openxmlformats.org/drawingml/2006/main"/>
+          <a:p xmlns:a="http://schemas.openxmlformats.org/drawingml/2006/main">
+            <a:r>
               <a:t>Close by restating the four durable ideas and linking forward to the next chapter.</a:t>
             </a:r>
           </a:p>
@@ -546,12 +723,187 @@
           </a:p>
           <a:p xmlns:a="http://schemas.openxmlformats.org/drawingml/2006/main">
             <a:r>
+              <a:t>Edition: 2026-09-09</a:t>
+            </a:r>
+          </a:p>
+          <a:p xmlns:a="http://schemas.openxmlformats.org/drawingml/2006/main">
+            <a:r>
+              <a:t/>
+            </a:r>
+          </a:p>
+          <a:p xmlns:a="http://schemas.openxmlformats.org/drawingml/2006/main">
+            <a:r>
               <a:t>[Sources]</a:t>
             </a:r>
           </a:p>
           <a:p xmlns:a="http://schemas.openxmlformats.org/drawingml/2006/main">
             <a:r>
-              <a:t>- Supplied source presentation: 13-production-frontier.pdf</a:t>
+              <a:t>- Original source presentation: 13-production-frontier.pdf</a:t>
+            </a:r>
+          </a:p>
+          <a:p xmlns:a="http://schemas.openxmlformats.org/drawingml/2006/main">
+            <a:r>
+              <a:t>- P2: Scientific computing in the age of agentic AI. OpenAI-affiliated exploratory field report, 2026-07-28. https://cdn.openai.com/pdf/scientific-computing-in-the-age-of-agentic-ai-an-exploratory-field-report.pdf Case studies motivate verification and maintenance ownership. They do not estimate a universal productivity effect.</a:t>
+            </a:r>
+          </a:p>
+          <a:p xmlns:a="http://schemas.openxmlformats.org/drawingml/2006/main">
+            <a:r>
+              <a:t>- R3: Research acceleration: The view inside OpenAI. OpenAI observational research post, 2026-09-06. https://openai.com/index/research-acceleration-view-inside-openai/ Activity metrics do not by themselves identify causal gains in research progress.</a:t>
+            </a:r>
+          </a:p>
+          <a:p xmlns:a="http://schemas.openxmlformats.org/drawingml/2006/main">
+            <a:r>
+              <a:t/>
+            </a:r>
+          </a:p>
+          <a:p xmlns:a="http://schemas.openxmlformats.org/drawingml/2006/main">
+            <a:r>
+              <a:t>[Assessed practice]</a:t>
+            </a:r>
+          </a:p>
+          <a:p xmlns:a="http://schemas.openxmlformats.org/drawingml/2006/main">
+            <a:r>
+              <a:t>Submit the capstone bundle: baseline, bounded agent, held-out evaluation, negative tests, and an operating note. Include a reproducible command and a maintenance owner.</a:t>
+            </a:r>
+          </a:p>
+          <a:p xmlns:a="http://schemas.openxmlformats.org/drawingml/2006/main">
+            <a:r>
+              <a:t>Acceptance: The reviewer can rerun the bundle in a fresh environment and trace each conclusion to saved evidence. Follow teaching/CAPSTONE.md for the rubric.</a:t>
+            </a:r>
+          </a:p>
+          <a:p xmlns:a="http://schemas.openxmlformats.org/drawingml/2006/main">
+            <a:r>
+              <a:t>Lab: labs/08_langgraph_approval_security.ipynb</a:t>
+            </a:r>
+          </a:p>
+        </p:txBody>
+      </p:sp>
+      <p:sp>
+        <p:nvSpPr>
+          <p:cNvPr id="4" name="Slide Number Placeholder 3"/>
+          <p:cNvSpPr>
+            <a:spLocks xmlns:a="http://schemas.openxmlformats.org/drawingml/2006/main" noGrp="1"/>
+          </p:cNvSpPr>
+          <p:nvPr>
+            <p:ph type="sldNum" idx="5"/>
+          </p:nvPr>
+        </p:nvSpPr>
+        <p:spPr/>
+        <p:txBody>
+          <a:bodyPr xmlns:a="http://schemas.openxmlformats.org/drawingml/2006/main"/>
+          <a:lstStyle xmlns:a="http://schemas.openxmlformats.org/drawingml/2006/main"/>
+          <a:p xmlns:a="http://schemas.openxmlformats.org/drawingml/2006/main"/>
+        </p:txBody>
+      </p:sp>
+    </p:spTree>
+  </p:cSld>
+  <p:clrMapOvr>
+    <a:masterClrMapping xmlns:a="http://schemas.openxmlformats.org/drawingml/2006/main"/>
+  </p:clrMapOvr>
+</p:notes>
+</file>
+
+<file path=ppt/notesSlides/notesSlide12.xml><?xml version="1.0" encoding="utf-8"?>
+<p:notes xmlns:p="http://schemas.openxmlformats.org/presentationml/2006/main">
+  <p:cSld>
+    <p:spTree>
+      <p:nvGrpSpPr>
+        <p:cNvPr id="1" name=""/>
+        <p:cNvGrpSpPr/>
+        <p:nvPr/>
+      </p:nvGrpSpPr>
+      <p:grpSpPr>
+        <a:xfrm xmlns:a="http://schemas.openxmlformats.org/drawingml/2006/main"/>
+      </p:grpSpPr>
+      <p:sp>
+        <p:nvSpPr>
+          <p:cNvPr id="2" name="Slide Image Placeholder 1"/>
+          <p:cNvSpPr>
+            <a:spLocks xmlns:a="http://schemas.openxmlformats.org/drawingml/2006/main" noGrp="1"/>
+          </p:cNvSpPr>
+          <p:nvPr>
+            <p:ph type="sldImg" idx="0"/>
+          </p:nvPr>
+        </p:nvSpPr>
+        <p:spPr/>
+      </p:sp>
+      <p:sp>
+        <p:nvSpPr>
+          <p:cNvPr id="3" name="Notes Placeholder 2"/>
+          <p:cNvSpPr>
+            <a:spLocks xmlns:a="http://schemas.openxmlformats.org/drawingml/2006/main" noGrp="1"/>
+          </p:cNvSpPr>
+          <p:nvPr>
+            <p:ph type="body" idx="1"/>
+          </p:nvPr>
+        </p:nvSpPr>
+        <p:spPr/>
+        <p:txBody>
+          <a:bodyPr xmlns:a="http://schemas.openxmlformats.org/drawingml/2006/main"/>
+          <a:lstStyle xmlns:a="http://schemas.openxmlformats.org/drawingml/2006/main"/>
+          <a:p xmlns:a="http://schemas.openxmlformats.org/drawingml/2006/main">
+            <a:r>
+              <a:t>Assess the submitted evidence with the stated acceptance check. Reading links and limitations follow.</a:t>
+            </a:r>
+          </a:p>
+          <a:p xmlns:a="http://schemas.openxmlformats.org/drawingml/2006/main">
+            <a:r>
+              <a:t/>
+            </a:r>
+          </a:p>
+          <a:p xmlns:a="http://schemas.openxmlformats.org/drawingml/2006/main">
+            <a:r>
+              <a:t>Edition: 2026-09-09</a:t>
+            </a:r>
+          </a:p>
+          <a:p xmlns:a="http://schemas.openxmlformats.org/drawingml/2006/main">
+            <a:r>
+              <a:t/>
+            </a:r>
+          </a:p>
+          <a:p xmlns:a="http://schemas.openxmlformats.org/drawingml/2006/main">
+            <a:r>
+              <a:t>[Sources]</a:t>
+            </a:r>
+          </a:p>
+          <a:p xmlns:a="http://schemas.openxmlformats.org/drawingml/2006/main">
+            <a:r>
+              <a:t>- Original source presentation: 13-production-frontier.pdf</a:t>
+            </a:r>
+          </a:p>
+          <a:p xmlns:a="http://schemas.openxmlformats.org/drawingml/2006/main">
+            <a:r>
+              <a:t>- P2: Scientific computing in the age of agentic AI. OpenAI-affiliated exploratory field report, 2026-07-28. https://cdn.openai.com/pdf/scientific-computing-in-the-age-of-agentic-ai-an-exploratory-field-report.pdf Case studies motivate verification and maintenance ownership. They do not estimate a universal productivity effect.</a:t>
+            </a:r>
+          </a:p>
+          <a:p xmlns:a="http://schemas.openxmlformats.org/drawingml/2006/main">
+            <a:r>
+              <a:t>- R3: Research acceleration: The view inside OpenAI. OpenAI observational research post, 2026-09-06. https://openai.com/index/research-acceleration-view-inside-openai/ Activity metrics do not by themselves identify causal gains in research progress.</a:t>
+            </a:r>
+          </a:p>
+          <a:p xmlns:a="http://schemas.openxmlformats.org/drawingml/2006/main">
+            <a:r>
+              <a:t/>
+            </a:r>
+          </a:p>
+          <a:p xmlns:a="http://schemas.openxmlformats.org/drawingml/2006/main">
+            <a:r>
+              <a:t>[Assessed practice]</a:t>
+            </a:r>
+          </a:p>
+          <a:p xmlns:a="http://schemas.openxmlformats.org/drawingml/2006/main">
+            <a:r>
+              <a:t>Submit the capstone bundle: baseline, bounded agent, held-out evaluation, negative tests, and an operating note. Include a reproducible command and a maintenance owner.</a:t>
+            </a:r>
+          </a:p>
+          <a:p xmlns:a="http://schemas.openxmlformats.org/drawingml/2006/main">
+            <a:r>
+              <a:t>Acceptance: The reviewer can rerun the bundle in a fresh environment and trace each conclusion to saved evidence. Follow teaching/CAPSTONE.md for the rubric.</a:t>
+            </a:r>
+          </a:p>
+          <a:p xmlns:a="http://schemas.openxmlformats.org/drawingml/2006/main">
+            <a:r>
+              <a:t>Lab: labs/08_langgraph_approval_security.ipynb</a:t>
             </a:r>
           </a:p>
         </p:txBody>
@@ -631,12 +983,57 @@
           </a:p>
           <a:p xmlns:a="http://schemas.openxmlformats.org/drawingml/2006/main">
             <a:r>
+              <a:t>Edition: 2026-09-09</a:t>
+            </a:r>
+          </a:p>
+          <a:p xmlns:a="http://schemas.openxmlformats.org/drawingml/2006/main">
+            <a:r>
+              <a:t/>
+            </a:r>
+          </a:p>
+          <a:p xmlns:a="http://schemas.openxmlformats.org/drawingml/2006/main">
+            <a:r>
               <a:t>[Sources]</a:t>
             </a:r>
           </a:p>
           <a:p xmlns:a="http://schemas.openxmlformats.org/drawingml/2006/main">
             <a:r>
-              <a:t>- Supplied source presentation: 13-production-frontier.pdf</a:t>
+              <a:t>- Original source presentation: 13-production-frontier.pdf</a:t>
+            </a:r>
+          </a:p>
+          <a:p xmlns:a="http://schemas.openxmlformats.org/drawingml/2006/main">
+            <a:r>
+              <a:t>- P2: Scientific computing in the age of agentic AI. OpenAI-affiliated exploratory field report, 2026-07-28. https://cdn.openai.com/pdf/scientific-computing-in-the-age-of-agentic-ai-an-exploratory-field-report.pdf Case studies motivate verification and maintenance ownership. They do not estimate a universal productivity effect.</a:t>
+            </a:r>
+          </a:p>
+          <a:p xmlns:a="http://schemas.openxmlformats.org/drawingml/2006/main">
+            <a:r>
+              <a:t>- R3: Research acceleration: The view inside OpenAI. OpenAI observational research post, 2026-09-06. https://openai.com/index/research-acceleration-view-inside-openai/ Activity metrics do not by themselves identify causal gains in research progress.</a:t>
+            </a:r>
+          </a:p>
+          <a:p xmlns:a="http://schemas.openxmlformats.org/drawingml/2006/main">
+            <a:r>
+              <a:t/>
+            </a:r>
+          </a:p>
+          <a:p xmlns:a="http://schemas.openxmlformats.org/drawingml/2006/main">
+            <a:r>
+              <a:t>[Assessed practice]</a:t>
+            </a:r>
+          </a:p>
+          <a:p xmlns:a="http://schemas.openxmlformats.org/drawingml/2006/main">
+            <a:r>
+              <a:t>Submit the capstone bundle: baseline, bounded agent, held-out evaluation, negative tests, and an operating note. Include a reproducible command and a maintenance owner.</a:t>
+            </a:r>
+          </a:p>
+          <a:p xmlns:a="http://schemas.openxmlformats.org/drawingml/2006/main">
+            <a:r>
+              <a:t>Acceptance: The reviewer can rerun the bundle in a fresh environment and trace each conclusion to saved evidence. Follow teaching/CAPSTONE.md for the rubric.</a:t>
+            </a:r>
+          </a:p>
+          <a:p xmlns:a="http://schemas.openxmlformats.org/drawingml/2006/main">
+            <a:r>
+              <a:t>Lab: labs/08_langgraph_approval_security.ipynb</a:t>
             </a:r>
           </a:p>
         </p:txBody>
@@ -716,12 +1113,57 @@
           </a:p>
           <a:p xmlns:a="http://schemas.openxmlformats.org/drawingml/2006/main">
             <a:r>
+              <a:t>Edition: 2026-09-09</a:t>
+            </a:r>
+          </a:p>
+          <a:p xmlns:a="http://schemas.openxmlformats.org/drawingml/2006/main">
+            <a:r>
+              <a:t/>
+            </a:r>
+          </a:p>
+          <a:p xmlns:a="http://schemas.openxmlformats.org/drawingml/2006/main">
+            <a:r>
               <a:t>[Sources]</a:t>
             </a:r>
           </a:p>
           <a:p xmlns:a="http://schemas.openxmlformats.org/drawingml/2006/main">
             <a:r>
-              <a:t>- Supplied source presentation: 13-production-frontier.pdf</a:t>
+              <a:t>- Original source presentation: 13-production-frontier.pdf</a:t>
+            </a:r>
+          </a:p>
+          <a:p xmlns:a="http://schemas.openxmlformats.org/drawingml/2006/main">
+            <a:r>
+              <a:t>- P2: Scientific computing in the age of agentic AI. OpenAI-affiliated exploratory field report, 2026-07-28. https://cdn.openai.com/pdf/scientific-computing-in-the-age-of-agentic-ai-an-exploratory-field-report.pdf Case studies motivate verification and maintenance ownership. They do not estimate a universal productivity effect.</a:t>
+            </a:r>
+          </a:p>
+          <a:p xmlns:a="http://schemas.openxmlformats.org/drawingml/2006/main">
+            <a:r>
+              <a:t>- R3: Research acceleration: The view inside OpenAI. OpenAI observational research post, 2026-09-06. https://openai.com/index/research-acceleration-view-inside-openai/ Activity metrics do not by themselves identify causal gains in research progress.</a:t>
+            </a:r>
+          </a:p>
+          <a:p xmlns:a="http://schemas.openxmlformats.org/drawingml/2006/main">
+            <a:r>
+              <a:t/>
+            </a:r>
+          </a:p>
+          <a:p xmlns:a="http://schemas.openxmlformats.org/drawingml/2006/main">
+            <a:r>
+              <a:t>[Assessed practice]</a:t>
+            </a:r>
+          </a:p>
+          <a:p xmlns:a="http://schemas.openxmlformats.org/drawingml/2006/main">
+            <a:r>
+              <a:t>Submit the capstone bundle: baseline, bounded agent, held-out evaluation, negative tests, and an operating note. Include a reproducible command and a maintenance owner.</a:t>
+            </a:r>
+          </a:p>
+          <a:p xmlns:a="http://schemas.openxmlformats.org/drawingml/2006/main">
+            <a:r>
+              <a:t>Acceptance: The reviewer can rerun the bundle in a fresh environment and trace each conclusion to saved evidence. Follow teaching/CAPSTONE.md for the rubric.</a:t>
+            </a:r>
+          </a:p>
+          <a:p xmlns:a="http://schemas.openxmlformats.org/drawingml/2006/main">
+            <a:r>
+              <a:t>Lab: labs/08_langgraph_approval_security.ipynb</a:t>
             </a:r>
           </a:p>
         </p:txBody>
@@ -801,12 +1243,57 @@
           </a:p>
           <a:p xmlns:a="http://schemas.openxmlformats.org/drawingml/2006/main">
             <a:r>
+              <a:t>Edition: 2026-09-09</a:t>
+            </a:r>
+          </a:p>
+          <a:p xmlns:a="http://schemas.openxmlformats.org/drawingml/2006/main">
+            <a:r>
+              <a:t/>
+            </a:r>
+          </a:p>
+          <a:p xmlns:a="http://schemas.openxmlformats.org/drawingml/2006/main">
+            <a:r>
               <a:t>[Sources]</a:t>
             </a:r>
           </a:p>
           <a:p xmlns:a="http://schemas.openxmlformats.org/drawingml/2006/main">
             <a:r>
-              <a:t>- Supplied source presentation: 13-production-frontier.pdf</a:t>
+              <a:t>- Original source presentation: 13-production-frontier.pdf</a:t>
+            </a:r>
+          </a:p>
+          <a:p xmlns:a="http://schemas.openxmlformats.org/drawingml/2006/main">
+            <a:r>
+              <a:t>- P2: Scientific computing in the age of agentic AI. OpenAI-affiliated exploratory field report, 2026-07-28. https://cdn.openai.com/pdf/scientific-computing-in-the-age-of-agentic-ai-an-exploratory-field-report.pdf Case studies motivate verification and maintenance ownership. They do not estimate a universal productivity effect.</a:t>
+            </a:r>
+          </a:p>
+          <a:p xmlns:a="http://schemas.openxmlformats.org/drawingml/2006/main">
+            <a:r>
+              <a:t>- R3: Research acceleration: The view inside OpenAI. OpenAI observational research post, 2026-09-06. https://openai.com/index/research-acceleration-view-inside-openai/ Activity metrics do not by themselves identify causal gains in research progress.</a:t>
+            </a:r>
+          </a:p>
+          <a:p xmlns:a="http://schemas.openxmlformats.org/drawingml/2006/main">
+            <a:r>
+              <a:t/>
+            </a:r>
+          </a:p>
+          <a:p xmlns:a="http://schemas.openxmlformats.org/drawingml/2006/main">
+            <a:r>
+              <a:t>[Assessed practice]</a:t>
+            </a:r>
+          </a:p>
+          <a:p xmlns:a="http://schemas.openxmlformats.org/drawingml/2006/main">
+            <a:r>
+              <a:t>Submit the capstone bundle: baseline, bounded agent, held-out evaluation, negative tests, and an operating note. Include a reproducible command and a maintenance owner.</a:t>
+            </a:r>
+          </a:p>
+          <a:p xmlns:a="http://schemas.openxmlformats.org/drawingml/2006/main">
+            <a:r>
+              <a:t>Acceptance: The reviewer can rerun the bundle in a fresh environment and trace each conclusion to saved evidence. Follow teaching/CAPSTONE.md for the rubric.</a:t>
+            </a:r>
+          </a:p>
+          <a:p xmlns:a="http://schemas.openxmlformats.org/drawingml/2006/main">
+            <a:r>
+              <a:t>Lab: labs/08_langgraph_approval_security.ipynb</a:t>
             </a:r>
           </a:p>
         </p:txBody>
@@ -886,12 +1373,57 @@
           </a:p>
           <a:p xmlns:a="http://schemas.openxmlformats.org/drawingml/2006/main">
             <a:r>
+              <a:t>Edition: 2026-09-09</a:t>
+            </a:r>
+          </a:p>
+          <a:p xmlns:a="http://schemas.openxmlformats.org/drawingml/2006/main">
+            <a:r>
+              <a:t/>
+            </a:r>
+          </a:p>
+          <a:p xmlns:a="http://schemas.openxmlformats.org/drawingml/2006/main">
+            <a:r>
               <a:t>[Sources]</a:t>
             </a:r>
           </a:p>
           <a:p xmlns:a="http://schemas.openxmlformats.org/drawingml/2006/main">
             <a:r>
-              <a:t>- Supplied source presentation: 13-production-frontier.pdf</a:t>
+              <a:t>- Original source presentation: 13-production-frontier.pdf</a:t>
+            </a:r>
+          </a:p>
+          <a:p xmlns:a="http://schemas.openxmlformats.org/drawingml/2006/main">
+            <a:r>
+              <a:t>- P2: Scientific computing in the age of agentic AI. OpenAI-affiliated exploratory field report, 2026-07-28. https://cdn.openai.com/pdf/scientific-computing-in-the-age-of-agentic-ai-an-exploratory-field-report.pdf Case studies motivate verification and maintenance ownership. They do not estimate a universal productivity effect.</a:t>
+            </a:r>
+          </a:p>
+          <a:p xmlns:a="http://schemas.openxmlformats.org/drawingml/2006/main">
+            <a:r>
+              <a:t>- R3: Research acceleration: The view inside OpenAI. OpenAI observational research post, 2026-09-06. https://openai.com/index/research-acceleration-view-inside-openai/ Activity metrics do not by themselves identify causal gains in research progress.</a:t>
+            </a:r>
+          </a:p>
+          <a:p xmlns:a="http://schemas.openxmlformats.org/drawingml/2006/main">
+            <a:r>
+              <a:t/>
+            </a:r>
+          </a:p>
+          <a:p xmlns:a="http://schemas.openxmlformats.org/drawingml/2006/main">
+            <a:r>
+              <a:t>[Assessed practice]</a:t>
+            </a:r>
+          </a:p>
+          <a:p xmlns:a="http://schemas.openxmlformats.org/drawingml/2006/main">
+            <a:r>
+              <a:t>Submit the capstone bundle: baseline, bounded agent, held-out evaluation, negative tests, and an operating note. Include a reproducible command and a maintenance owner.</a:t>
+            </a:r>
+          </a:p>
+          <a:p xmlns:a="http://schemas.openxmlformats.org/drawingml/2006/main">
+            <a:r>
+              <a:t>Acceptance: The reviewer can rerun the bundle in a fresh environment and trace each conclusion to saved evidence. Follow teaching/CAPSTONE.md for the rubric.</a:t>
+            </a:r>
+          </a:p>
+          <a:p xmlns:a="http://schemas.openxmlformats.org/drawingml/2006/main">
+            <a:r>
+              <a:t>Lab: labs/08_langgraph_approval_security.ipynb</a:t>
             </a:r>
           </a:p>
         </p:txBody>
@@ -971,12 +1503,57 @@
           </a:p>
           <a:p xmlns:a="http://schemas.openxmlformats.org/drawingml/2006/main">
             <a:r>
+              <a:t>Edition: 2026-09-09</a:t>
+            </a:r>
+          </a:p>
+          <a:p xmlns:a="http://schemas.openxmlformats.org/drawingml/2006/main">
+            <a:r>
+              <a:t/>
+            </a:r>
+          </a:p>
+          <a:p xmlns:a="http://schemas.openxmlformats.org/drawingml/2006/main">
+            <a:r>
               <a:t>[Sources]</a:t>
             </a:r>
           </a:p>
           <a:p xmlns:a="http://schemas.openxmlformats.org/drawingml/2006/main">
             <a:r>
-              <a:t>- Supplied source presentation: 13-production-frontier.pdf</a:t>
+              <a:t>- Original source presentation: 13-production-frontier.pdf</a:t>
+            </a:r>
+          </a:p>
+          <a:p xmlns:a="http://schemas.openxmlformats.org/drawingml/2006/main">
+            <a:r>
+              <a:t>- P2: Scientific computing in the age of agentic AI. OpenAI-affiliated exploratory field report, 2026-07-28. https://cdn.openai.com/pdf/scientific-computing-in-the-age-of-agentic-ai-an-exploratory-field-report.pdf Case studies motivate verification and maintenance ownership. They do not estimate a universal productivity effect.</a:t>
+            </a:r>
+          </a:p>
+          <a:p xmlns:a="http://schemas.openxmlformats.org/drawingml/2006/main">
+            <a:r>
+              <a:t>- R3: Research acceleration: The view inside OpenAI. OpenAI observational research post, 2026-09-06. https://openai.com/index/research-acceleration-view-inside-openai/ Activity metrics do not by themselves identify causal gains in research progress.</a:t>
+            </a:r>
+          </a:p>
+          <a:p xmlns:a="http://schemas.openxmlformats.org/drawingml/2006/main">
+            <a:r>
+              <a:t/>
+            </a:r>
+          </a:p>
+          <a:p xmlns:a="http://schemas.openxmlformats.org/drawingml/2006/main">
+            <a:r>
+              <a:t>[Assessed practice]</a:t>
+            </a:r>
+          </a:p>
+          <a:p xmlns:a="http://schemas.openxmlformats.org/drawingml/2006/main">
+            <a:r>
+              <a:t>Submit the capstone bundle: baseline, bounded agent, held-out evaluation, negative tests, and an operating note. Include a reproducible command and a maintenance owner.</a:t>
+            </a:r>
+          </a:p>
+          <a:p xmlns:a="http://schemas.openxmlformats.org/drawingml/2006/main">
+            <a:r>
+              <a:t>Acceptance: The reviewer can rerun the bundle in a fresh environment and trace each conclusion to saved evidence. Follow teaching/CAPSTONE.md for the rubric.</a:t>
+            </a:r>
+          </a:p>
+          <a:p xmlns:a="http://schemas.openxmlformats.org/drawingml/2006/main">
+            <a:r>
+              <a:t>Lab: labs/08_langgraph_approval_security.ipynb</a:t>
             </a:r>
           </a:p>
         </p:txBody>
@@ -1056,12 +1633,57 @@
           </a:p>
           <a:p xmlns:a="http://schemas.openxmlformats.org/drawingml/2006/main">
             <a:r>
+              <a:t>Edition: 2026-09-09</a:t>
+            </a:r>
+          </a:p>
+          <a:p xmlns:a="http://schemas.openxmlformats.org/drawingml/2006/main">
+            <a:r>
+              <a:t/>
+            </a:r>
+          </a:p>
+          <a:p xmlns:a="http://schemas.openxmlformats.org/drawingml/2006/main">
+            <a:r>
               <a:t>[Sources]</a:t>
             </a:r>
           </a:p>
           <a:p xmlns:a="http://schemas.openxmlformats.org/drawingml/2006/main">
             <a:r>
-              <a:t>- Supplied source presentation: 13-production-frontier.pdf</a:t>
+              <a:t>- Original source presentation: 13-production-frontier.pdf</a:t>
+            </a:r>
+          </a:p>
+          <a:p xmlns:a="http://schemas.openxmlformats.org/drawingml/2006/main">
+            <a:r>
+              <a:t>- P2: Scientific computing in the age of agentic AI. OpenAI-affiliated exploratory field report, 2026-07-28. https://cdn.openai.com/pdf/scientific-computing-in-the-age-of-agentic-ai-an-exploratory-field-report.pdf Case studies motivate verification and maintenance ownership. They do not estimate a universal productivity effect.</a:t>
+            </a:r>
+          </a:p>
+          <a:p xmlns:a="http://schemas.openxmlformats.org/drawingml/2006/main">
+            <a:r>
+              <a:t>- R3: Research acceleration: The view inside OpenAI. OpenAI observational research post, 2026-09-06. https://openai.com/index/research-acceleration-view-inside-openai/ Activity metrics do not by themselves identify causal gains in research progress.</a:t>
+            </a:r>
+          </a:p>
+          <a:p xmlns:a="http://schemas.openxmlformats.org/drawingml/2006/main">
+            <a:r>
+              <a:t/>
+            </a:r>
+          </a:p>
+          <a:p xmlns:a="http://schemas.openxmlformats.org/drawingml/2006/main">
+            <a:r>
+              <a:t>[Assessed practice]</a:t>
+            </a:r>
+          </a:p>
+          <a:p xmlns:a="http://schemas.openxmlformats.org/drawingml/2006/main">
+            <a:r>
+              <a:t>Submit the capstone bundle: baseline, bounded agent, held-out evaluation, negative tests, and an operating note. Include a reproducible command and a maintenance owner.</a:t>
+            </a:r>
+          </a:p>
+          <a:p xmlns:a="http://schemas.openxmlformats.org/drawingml/2006/main">
+            <a:r>
+              <a:t>Acceptance: The reviewer can rerun the bundle in a fresh environment and trace each conclusion to saved evidence. Follow teaching/CAPSTONE.md for the rubric.</a:t>
+            </a:r>
+          </a:p>
+          <a:p xmlns:a="http://schemas.openxmlformats.org/drawingml/2006/main">
+            <a:r>
+              <a:t>Lab: labs/08_langgraph_approval_security.ipynb</a:t>
             </a:r>
           </a:p>
         </p:txBody>
@@ -1141,12 +1763,57 @@
           </a:p>
           <a:p xmlns:a="http://schemas.openxmlformats.org/drawingml/2006/main">
             <a:r>
+              <a:t>Edition: 2026-09-09</a:t>
+            </a:r>
+          </a:p>
+          <a:p xmlns:a="http://schemas.openxmlformats.org/drawingml/2006/main">
+            <a:r>
+              <a:t/>
+            </a:r>
+          </a:p>
+          <a:p xmlns:a="http://schemas.openxmlformats.org/drawingml/2006/main">
+            <a:r>
               <a:t>[Sources]</a:t>
             </a:r>
           </a:p>
           <a:p xmlns:a="http://schemas.openxmlformats.org/drawingml/2006/main">
             <a:r>
-              <a:t>- Supplied source presentation: 13-production-frontier.pdf</a:t>
+              <a:t>- Original source presentation: 13-production-frontier.pdf</a:t>
+            </a:r>
+          </a:p>
+          <a:p xmlns:a="http://schemas.openxmlformats.org/drawingml/2006/main">
+            <a:r>
+              <a:t>- P2: Scientific computing in the age of agentic AI. OpenAI-affiliated exploratory field report, 2026-07-28. https://cdn.openai.com/pdf/scientific-computing-in-the-age-of-agentic-ai-an-exploratory-field-report.pdf Case studies motivate verification and maintenance ownership. They do not estimate a universal productivity effect.</a:t>
+            </a:r>
+          </a:p>
+          <a:p xmlns:a="http://schemas.openxmlformats.org/drawingml/2006/main">
+            <a:r>
+              <a:t>- R3: Research acceleration: The view inside OpenAI. OpenAI observational research post, 2026-09-06. https://openai.com/index/research-acceleration-view-inside-openai/ Activity metrics do not by themselves identify causal gains in research progress.</a:t>
+            </a:r>
+          </a:p>
+          <a:p xmlns:a="http://schemas.openxmlformats.org/drawingml/2006/main">
+            <a:r>
+              <a:t/>
+            </a:r>
+          </a:p>
+          <a:p xmlns:a="http://schemas.openxmlformats.org/drawingml/2006/main">
+            <a:r>
+              <a:t>[Assessed practice]</a:t>
+            </a:r>
+          </a:p>
+          <a:p xmlns:a="http://schemas.openxmlformats.org/drawingml/2006/main">
+            <a:r>
+              <a:t>Submit the capstone bundle: baseline, bounded agent, held-out evaluation, negative tests, and an operating note. Include a reproducible command and a maintenance owner.</a:t>
+            </a:r>
+          </a:p>
+          <a:p xmlns:a="http://schemas.openxmlformats.org/drawingml/2006/main">
+            <a:r>
+              <a:t>Acceptance: The reviewer can rerun the bundle in a fresh environment and trace each conclusion to saved evidence. Follow teaching/CAPSTONE.md for the rubric.</a:t>
+            </a:r>
+          </a:p>
+          <a:p xmlns:a="http://schemas.openxmlformats.org/drawingml/2006/main">
+            <a:r>
+              <a:t>Lab: labs/08_langgraph_approval_security.ipynb</a:t>
             </a:r>
           </a:p>
         </p:txBody>
@@ -1216,7 +1883,7 @@
           <a:lstStyle xmlns:a="http://schemas.openxmlformats.org/drawingml/2006/main"/>
           <a:p xmlns:a="http://schemas.openxmlformats.org/drawingml/2006/main">
             <a:r>
-              <a:t>Use as retrieval practice. Ask for an answer that defines, compares, traces, and evaluates.</a:t>
+              <a:t>Explain the claim first, then use the numbered points as evidence and design consequences.</a:t>
             </a:r>
           </a:p>
           <a:p xmlns:a="http://schemas.openxmlformats.org/drawingml/2006/main">
@@ -1226,12 +1893,57 @@
           </a:p>
           <a:p xmlns:a="http://schemas.openxmlformats.org/drawingml/2006/main">
             <a:r>
+              <a:t>Edition: 2026-09-09</a:t>
+            </a:r>
+          </a:p>
+          <a:p xmlns:a="http://schemas.openxmlformats.org/drawingml/2006/main">
+            <a:r>
+              <a:t/>
+            </a:r>
+          </a:p>
+          <a:p xmlns:a="http://schemas.openxmlformats.org/drawingml/2006/main">
+            <a:r>
               <a:t>[Sources]</a:t>
             </a:r>
           </a:p>
           <a:p xmlns:a="http://schemas.openxmlformats.org/drawingml/2006/main">
             <a:r>
-              <a:t>- Supplied source presentation: 13-production-frontier.pdf</a:t>
+              <a:t>- Original source presentation: 13-production-frontier.pdf</a:t>
+            </a:r>
+          </a:p>
+          <a:p xmlns:a="http://schemas.openxmlformats.org/drawingml/2006/main">
+            <a:r>
+              <a:t>- P2: Scientific computing in the age of agentic AI. OpenAI-affiliated exploratory field report, 2026-07-28. https://cdn.openai.com/pdf/scientific-computing-in-the-age-of-agentic-ai-an-exploratory-field-report.pdf Case studies motivate verification and maintenance ownership. They do not estimate a universal productivity effect.</a:t>
+            </a:r>
+          </a:p>
+          <a:p xmlns:a="http://schemas.openxmlformats.org/drawingml/2006/main">
+            <a:r>
+              <a:t>- R3: Research acceleration: The view inside OpenAI. OpenAI observational research post, 2026-09-06. https://openai.com/index/research-acceleration-view-inside-openai/ Activity metrics do not by themselves identify causal gains in research progress.</a:t>
+            </a:r>
+          </a:p>
+          <a:p xmlns:a="http://schemas.openxmlformats.org/drawingml/2006/main">
+            <a:r>
+              <a:t/>
+            </a:r>
+          </a:p>
+          <a:p xmlns:a="http://schemas.openxmlformats.org/drawingml/2006/main">
+            <a:r>
+              <a:t>[Assessed practice]</a:t>
+            </a:r>
+          </a:p>
+          <a:p xmlns:a="http://schemas.openxmlformats.org/drawingml/2006/main">
+            <a:r>
+              <a:t>Submit the capstone bundle: baseline, bounded agent, held-out evaluation, negative tests, and an operating note. Include a reproducible command and a maintenance owner.</a:t>
+            </a:r>
+          </a:p>
+          <a:p xmlns:a="http://schemas.openxmlformats.org/drawingml/2006/main">
+            <a:r>
+              <a:t>Acceptance: The reviewer can rerun the bundle in a fresh environment and trace each conclusion to saved evidence. Follow teaching/CAPSTONE.md for the rubric.</a:t>
+            </a:r>
+          </a:p>
+          <a:p xmlns:a="http://schemas.openxmlformats.org/drawingml/2006/main">
+            <a:r>
+              <a:t>Lab: labs/08_langgraph_approval_security.ipynb</a:t>
             </a:r>
           </a:p>
         </p:txBody>
@@ -1299,7 +2011,7 @@
   </p:cSld>
   <p:clrMap bg1="lt1" tx1="dk1" bg2="lt2" tx2="dk2" accent1="accent1" accent2="accent2" accent3="accent3" accent4="accent4" accent5="accent5" accent6="accent6" hlink="hlink" folHlink="folHlink"/>
   <p:sldLayoutIdLst>
-    <p:sldLayoutId xmlns:r="http://schemas.openxmlformats.org/officeDocument/2006/relationships" id="2147483649" r:id="R09689f0d2e1940da"/>
+    <p:sldLayoutId xmlns:r="http://schemas.openxmlformats.org/officeDocument/2006/relationships" id="2147483649" r:id="Rc0a75bf277014a26"/>
   </p:sldLayoutIdLst>
   <p:txStyles>
     <p:titleStyle>
@@ -1850,7 +2562,7 @@
           <p:cNvPr id="8" name="title-accent">
             <a:extLst xmlns:a="http://schemas.openxmlformats.org/drawingml/2006/main">
               <a:ext uri="{FF2B5EF4-FFF2-40B4-BE49-F238E27FC236}">
-                <a16:creationId xmlns:a16="http://schemas.microsoft.com/office/drawing/2014/main" id="{7D1A9DB8-BBEB-4DED-BF65-4B8A6A2D6944}"/>
+                <a16:creationId xmlns:a16="http://schemas.microsoft.com/office/drawing/2014/main" id="{BCA84AAB-08B4-44FB-8F71-08F0ADB7A7B8}"/>
               </a:ext>
             </a:extLst>
           </p:cNvPr>
@@ -1883,7 +2595,7 @@
           <p:cNvPr id="2" name="course-title">
             <a:extLst xmlns:a="http://schemas.openxmlformats.org/drawingml/2006/main">
               <a:ext uri="{FF2B5EF4-FFF2-40B4-BE49-F238E27FC236}">
-                <a16:creationId xmlns:a16="http://schemas.microsoft.com/office/drawing/2014/main" id="{EA4D2FFA-AF12-4961-A5CD-D194D874B42E}"/>
+                <a16:creationId xmlns:a16="http://schemas.microsoft.com/office/drawing/2014/main" id="{1F4DB5EA-A813-42BB-A14E-60023257B2F8}"/>
               </a:ext>
             </a:extLst>
           </p:cNvPr>
@@ -1941,7 +2653,7 @@
           <p:cNvPr id="3" name="chapter-number">
             <a:extLst xmlns:a="http://schemas.openxmlformats.org/drawingml/2006/main">
               <a:ext uri="{FF2B5EF4-FFF2-40B4-BE49-F238E27FC236}">
-                <a16:creationId xmlns:a16="http://schemas.microsoft.com/office/drawing/2014/main" id="{594DB08A-5A36-4B05-97C8-676C55883003}"/>
+                <a16:creationId xmlns:a16="http://schemas.microsoft.com/office/drawing/2014/main" id="{894FA5D0-1563-4B7D-B26A-7B7557090727}"/>
               </a:ext>
             </a:extLst>
           </p:cNvPr>
@@ -1999,7 +2711,7 @@
           <p:cNvPr id="4" name="deck-title">
             <a:extLst xmlns:a="http://schemas.openxmlformats.org/drawingml/2006/main">
               <a:ext uri="{FF2B5EF4-FFF2-40B4-BE49-F238E27FC236}">
-                <a16:creationId xmlns:a16="http://schemas.microsoft.com/office/drawing/2014/main" id="{EF589017-0042-4493-BDE6-3FB16BF9AB0D}"/>
+                <a16:creationId xmlns:a16="http://schemas.microsoft.com/office/drawing/2014/main" id="{DFB656A8-353B-4B49-8761-655A509256DE}"/>
               </a:ext>
             </a:extLst>
           </p:cNvPr>
@@ -2057,7 +2769,7 @@
           <p:cNvPr id="5" name="deck-thesis">
             <a:extLst xmlns:a="http://schemas.openxmlformats.org/drawingml/2006/main">
               <a:ext uri="{FF2B5EF4-FFF2-40B4-BE49-F238E27FC236}">
-                <a16:creationId xmlns:a16="http://schemas.microsoft.com/office/drawing/2014/main" id="{3FF5F9D5-C859-426A-92F8-6C1371A51418}"/>
+                <a16:creationId xmlns:a16="http://schemas.microsoft.com/office/drawing/2014/main" id="{BEF16D1C-A7D9-4A57-AE48-7B9021D2B9DD}"/>
               </a:ext>
             </a:extLst>
           </p:cNvPr>
@@ -2115,7 +2827,7 @@
           <p:cNvPr id="6" name="title-marker">
             <a:extLst xmlns:a="http://schemas.openxmlformats.org/drawingml/2006/main">
               <a:ext uri="{FF2B5EF4-FFF2-40B4-BE49-F238E27FC236}">
-                <a16:creationId xmlns:a16="http://schemas.microsoft.com/office/drawing/2014/main" id="{42A783A5-DF33-4A04-AA2E-4CF558469ADD}"/>
+                <a16:creationId xmlns:a16="http://schemas.microsoft.com/office/drawing/2014/main" id="{8D7F24A4-E4CB-4FEE-9035-15BE136CE843}"/>
               </a:ext>
             </a:extLst>
           </p:cNvPr>
@@ -2148,7 +2860,7 @@
           <p:cNvPr id="7" name="title-marker-text">
             <a:extLst xmlns:a="http://schemas.openxmlformats.org/drawingml/2006/main">
               <a:ext uri="{FF2B5EF4-FFF2-40B4-BE49-F238E27FC236}">
-                <a16:creationId xmlns:a16="http://schemas.microsoft.com/office/drawing/2014/main" id="{C8640797-8D62-491D-9781-4047DE8FEC9B}"/>
+                <a16:creationId xmlns:a16="http://schemas.microsoft.com/office/drawing/2014/main" id="{86F7024F-6DB8-4A90-9BC6-C2CA1F724CBE}"/>
               </a:ext>
             </a:extLst>
           </p:cNvPr>
@@ -2227,7 +2939,7 @@
     </p:spTree>
     <p:extLst>
       <p:ext uri="{BB962C8B-B14F-4D97-AF65-F5344CB8AC3E}">
-        <p14:creationId xmlns:p14="http://schemas.microsoft.com/office/powerpoint/2010/main" val="1013333301"/>
+        <p14:creationId xmlns:p14="http://schemas.microsoft.com/office/powerpoint/2010/main" val="1408689720"/>
       </p:ext>
     </p:extLst>
   </p:cSld>
@@ -2235,6 +2947,996 @@
 </file>
 
 <file path=ppt/slides/slide10.xml><?xml version="1.0" encoding="utf-8"?>
+<p:sld xmlns:p="http://schemas.openxmlformats.org/presentationml/2006/main">
+  <p:cSld>
+    <p:bg>
+      <p:bgPr>
+        <a:solidFill xmlns:a="http://schemas.openxmlformats.org/drawingml/2006/main">
+          <a:srgbClr val="FFFFFF"/>
+        </a:solidFill>
+      </p:bgPr>
+    </p:bg>
+    <p:spTree>
+      <p:nvGrpSpPr>
+        <p:cNvPr id="1" name=""/>
+        <p:cNvGrpSpPr/>
+        <p:nvPr/>
+      </p:nvGrpSpPr>
+      <p:grpSpPr>
+        <a:xfrm xmlns:a="http://schemas.openxmlformats.org/drawingml/2006/main"/>
+      </p:grpSpPr>
+      <p:sp>
+        <p:nvSpPr>
+          <p:cNvPr id="18" name="accent-line">
+            <a:extLst xmlns:a="http://schemas.openxmlformats.org/drawingml/2006/main">
+              <a:ext uri="{FF2B5EF4-FFF2-40B4-BE49-F238E27FC236}">
+                <a16:creationId xmlns:a16="http://schemas.microsoft.com/office/drawing/2014/main" id="{E812F02C-D935-45E7-B74D-C15EA1E4CDEB}"/>
+              </a:ext>
+            </a:extLst>
+          </p:cNvPr>
+          <p:cNvSpPr>
+            <a:spLocks xmlns:a="http://schemas.openxmlformats.org/drawingml/2006/main" noGrp="1"/>
+          </p:cNvSpPr>
+          <p:nvPr/>
+        </p:nvSpPr>
+        <p:spPr>
+          <a:xfrm xmlns:a="http://schemas.openxmlformats.org/drawingml/2006/main">
+            <a:off x="390525" y="304800"/>
+            <a:ext cx="11410950" cy="66675"/>
+          </a:xfrm>
+          <a:prstGeom xmlns:a="http://schemas.openxmlformats.org/drawingml/2006/main" prst="rect">
+            <a:avLst/>
+          </a:prstGeom>
+          <a:solidFill xmlns:a="http://schemas.openxmlformats.org/drawingml/2006/main">
+            <a:srgbClr val="C4A1FF"/>
+          </a:solidFill>
+          <a:ln xmlns:a="http://schemas.openxmlformats.org/drawingml/2006/main" w="0">
+            <a:solidFill>
+              <a:srgbClr val="C4A1FF"/>
+            </a:solidFill>
+            <a:prstDash val="solid"/>
+          </a:ln>
+        </p:spPr>
+      </p:sp>
+      <p:sp>
+        <p:nvSpPr>
+          <p:cNvPr id="2" name="chapter-label">
+            <a:extLst xmlns:a="http://schemas.openxmlformats.org/drawingml/2006/main">
+              <a:ext uri="{FF2B5EF4-FFF2-40B4-BE49-F238E27FC236}">
+                <a16:creationId xmlns:a16="http://schemas.microsoft.com/office/drawing/2014/main" id="{46C27A6B-F98F-4FEE-9562-9396A7C23CC3}"/>
+              </a:ext>
+            </a:extLst>
+          </p:cNvPr>
+          <p:cNvSpPr>
+            <a:spLocks xmlns:a="http://schemas.openxmlformats.org/drawingml/2006/main" noGrp="1"/>
+          </p:cNvSpPr>
+          <p:nvPr/>
+        </p:nvSpPr>
+        <p:spPr>
+          <a:xfrm xmlns:a="http://schemas.openxmlformats.org/drawingml/2006/main">
+            <a:off x="390525" y="466725"/>
+            <a:ext cx="4953000" cy="323850"/>
+          </a:xfrm>
+          <a:prstGeom xmlns:a="http://schemas.openxmlformats.org/drawingml/2006/main" prst="rect">
+            <a:avLst/>
+          </a:prstGeom>
+          <a:noFill xmlns:a="http://schemas.openxmlformats.org/drawingml/2006/main"/>
+          <a:ln xmlns:a="http://schemas.openxmlformats.org/drawingml/2006/main" w="0">
+            <a:noFill/>
+            <a:prstDash val="solid"/>
+          </a:ln>
+        </p:spPr>
+        <p:txBody>
+          <a:bodyPr xmlns:a="http://schemas.openxmlformats.org/drawingml/2006/main" anchor="t">
+            <a:noAutofit/>
+          </a:bodyPr>
+          <a:lstStyle xmlns:a="http://schemas.openxmlformats.org/drawingml/2006/main"/>
+          <a:p xmlns:a="http://schemas.openxmlformats.org/drawingml/2006/main">
+            <a:pPr algn="l">
+              <a:defRPr sz="1275" b="1">
+                <a:solidFill>
+                  <a:srgbClr val="5B5B57"/>
+                </a:solidFill>
+                <a:latin typeface="Helvetica Neue"/>
+                <a:ea typeface="Helvetica Neue"/>
+                <a:cs typeface="Helvetica Neue"/>
+              </a:defRPr>
+            </a:pPr>
+            <a:r>
+              <a:rPr sz="1275" b="1">
+                <a:solidFill>
+                  <a:srgbClr val="5B5B57"/>
+                </a:solidFill>
+                <a:latin typeface="Helvetica Neue"/>
+                <a:ea typeface="Helvetica Neue"/>
+                <a:cs typeface="Helvetica Neue"/>
+              </a:rPr>
+              <a:t>EXAM CHECK  /  13</a:t>
+            </a:r>
+          </a:p>
+        </p:txBody>
+      </p:sp>
+      <p:sp>
+        <p:nvSpPr>
+          <p:cNvPr id="3" name="slide-number">
+            <a:extLst xmlns:a="http://schemas.openxmlformats.org/drawingml/2006/main">
+              <a:ext uri="{FF2B5EF4-FFF2-40B4-BE49-F238E27FC236}">
+                <a16:creationId xmlns:a16="http://schemas.microsoft.com/office/drawing/2014/main" id="{E0F436F4-6888-41D7-8BF3-7ECF06463CB1}"/>
+              </a:ext>
+            </a:extLst>
+          </p:cNvPr>
+          <p:cNvSpPr>
+            <a:spLocks xmlns:a="http://schemas.openxmlformats.org/drawingml/2006/main" noGrp="1"/>
+          </p:cNvSpPr>
+          <p:nvPr/>
+        </p:nvSpPr>
+        <p:spPr>
+          <a:xfrm xmlns:a="http://schemas.openxmlformats.org/drawingml/2006/main">
+            <a:off x="11049000" y="6286500"/>
+            <a:ext cx="742950" cy="266700"/>
+          </a:xfrm>
+          <a:prstGeom xmlns:a="http://schemas.openxmlformats.org/drawingml/2006/main" prst="rect">
+            <a:avLst/>
+          </a:prstGeom>
+          <a:noFill xmlns:a="http://schemas.openxmlformats.org/drawingml/2006/main"/>
+          <a:ln xmlns:a="http://schemas.openxmlformats.org/drawingml/2006/main" w="0">
+            <a:noFill/>
+            <a:prstDash val="solid"/>
+          </a:ln>
+        </p:spPr>
+        <p:txBody>
+          <a:bodyPr xmlns:a="http://schemas.openxmlformats.org/drawingml/2006/main" anchor="t">
+            <a:noAutofit/>
+          </a:bodyPr>
+          <a:lstStyle xmlns:a="http://schemas.openxmlformats.org/drawingml/2006/main"/>
+          <a:p xmlns:a="http://schemas.openxmlformats.org/drawingml/2006/main">
+            <a:pPr algn="r">
+              <a:defRPr sz="1200" b="0">
+                <a:solidFill>
+                  <a:srgbClr val="5B5B57"/>
+                </a:solidFill>
+                <a:latin typeface="Helvetica Neue"/>
+                <a:ea typeface="Helvetica Neue"/>
+                <a:cs typeface="Helvetica Neue"/>
+              </a:defRPr>
+            </a:pPr>
+            <a:r>
+              <a:rPr sz="1200" b="0">
+                <a:solidFill>
+                  <a:srgbClr val="5B5B57"/>
+                </a:solidFill>
+                <a:latin typeface="Helvetica Neue"/>
+                <a:ea typeface="Helvetica Neue"/>
+                <a:cs typeface="Helvetica Neue"/>
+              </a:rPr>
+              <a:t>10</a:t>
+            </a:r>
+          </a:p>
+        </p:txBody>
+      </p:sp>
+      <p:sp>
+        <p:nvSpPr>
+          <p:cNvPr id="4" name="chapter-footer">
+            <a:extLst xmlns:a="http://schemas.openxmlformats.org/drawingml/2006/main">
+              <a:ext uri="{FF2B5EF4-FFF2-40B4-BE49-F238E27FC236}">
+                <a16:creationId xmlns:a16="http://schemas.microsoft.com/office/drawing/2014/main" id="{1C11D8AA-F84D-4B4A-9711-13E004D013EC}"/>
+              </a:ext>
+            </a:extLst>
+          </p:cNvPr>
+          <p:cNvSpPr>
+            <a:spLocks xmlns:a="http://schemas.openxmlformats.org/drawingml/2006/main" noGrp="1"/>
+          </p:cNvSpPr>
+          <p:nvPr/>
+        </p:nvSpPr>
+        <p:spPr>
+          <a:xfrm xmlns:a="http://schemas.openxmlformats.org/drawingml/2006/main">
+            <a:off x="390525" y="6286500"/>
+            <a:ext cx="8191500" cy="266700"/>
+          </a:xfrm>
+          <a:prstGeom xmlns:a="http://schemas.openxmlformats.org/drawingml/2006/main" prst="rect">
+            <a:avLst/>
+          </a:prstGeom>
+          <a:noFill xmlns:a="http://schemas.openxmlformats.org/drawingml/2006/main"/>
+          <a:ln xmlns:a="http://schemas.openxmlformats.org/drawingml/2006/main" w="0">
+            <a:noFill/>
+            <a:prstDash val="solid"/>
+          </a:ln>
+        </p:spPr>
+        <p:txBody>
+          <a:bodyPr xmlns:a="http://schemas.openxmlformats.org/drawingml/2006/main" anchor="t">
+            <a:noAutofit/>
+          </a:bodyPr>
+          <a:lstStyle xmlns:a="http://schemas.openxmlformats.org/drawingml/2006/main"/>
+          <a:p xmlns:a="http://schemas.openxmlformats.org/drawingml/2006/main">
+            <a:pPr algn="l">
+              <a:defRPr sz="1125" b="0">
+                <a:solidFill>
+                  <a:srgbClr val="5B5B57"/>
+                </a:solidFill>
+                <a:latin typeface="Helvetica Neue"/>
+                <a:ea typeface="Helvetica Neue"/>
+                <a:cs typeface="Helvetica Neue"/>
+              </a:defRPr>
+            </a:pPr>
+            <a:r>
+              <a:rPr sz="1125" b="0">
+                <a:solidFill>
+                  <a:srgbClr val="5B5B57"/>
+                </a:solidFill>
+                <a:latin typeface="Helvetica Neue"/>
+                <a:ea typeface="Helvetica Neue"/>
+                <a:cs typeface="Helvetica Neue"/>
+              </a:rPr>
+              <a:t>Production, Economics, and the Frontier</a:t>
+            </a:r>
+          </a:p>
+        </p:txBody>
+      </p:sp>
+      <p:sp>
+        <p:nvSpPr>
+          <p:cNvPr id="5" name="exam-title">
+            <a:extLst xmlns:a="http://schemas.openxmlformats.org/drawingml/2006/main">
+              <a:ext uri="{FF2B5EF4-FFF2-40B4-BE49-F238E27FC236}">
+                <a16:creationId xmlns:a16="http://schemas.microsoft.com/office/drawing/2014/main" id="{00E7E3A4-AE1A-4709-8F3F-104436FFE217}"/>
+              </a:ext>
+            </a:extLst>
+          </p:cNvPr>
+          <p:cNvSpPr>
+            <a:spLocks xmlns:a="http://schemas.openxmlformats.org/drawingml/2006/main" noGrp="1"/>
+          </p:cNvSpPr>
+          <p:nvPr/>
+        </p:nvSpPr>
+        <p:spPr>
+          <a:xfrm xmlns:a="http://schemas.openxmlformats.org/drawingml/2006/main">
+            <a:off x="390525" y="981075"/>
+            <a:ext cx="10668000" cy="781050"/>
+          </a:xfrm>
+          <a:prstGeom xmlns:a="http://schemas.openxmlformats.org/drawingml/2006/main" prst="rect">
+            <a:avLst/>
+          </a:prstGeom>
+          <a:noFill xmlns:a="http://schemas.openxmlformats.org/drawingml/2006/main"/>
+          <a:ln xmlns:a="http://schemas.openxmlformats.org/drawingml/2006/main" w="0">
+            <a:noFill/>
+            <a:prstDash val="solid"/>
+          </a:ln>
+        </p:spPr>
+        <p:txBody>
+          <a:bodyPr xmlns:a="http://schemas.openxmlformats.org/drawingml/2006/main" anchor="t">
+            <a:noAutofit/>
+          </a:bodyPr>
+          <a:lstStyle xmlns:a="http://schemas.openxmlformats.org/drawingml/2006/main"/>
+          <a:p xmlns:a="http://schemas.openxmlformats.org/drawingml/2006/main">
+            <a:pPr algn="l">
+              <a:defRPr sz="3150" b="1">
+                <a:solidFill>
+                  <a:srgbClr val="111111"/>
+                </a:solidFill>
+                <a:latin typeface="Helvetica Neue"/>
+                <a:ea typeface="Helvetica Neue"/>
+                <a:cs typeface="Helvetica Neue"/>
+              </a:defRPr>
+            </a:pPr>
+            <a:r>
+              <a:rPr sz="3150" b="1">
+                <a:solidFill>
+                  <a:srgbClr val="111111"/>
+                </a:solidFill>
+                <a:latin typeface="Helvetica Neue"/>
+                <a:ea typeface="Helvetica Neue"/>
+                <a:cs typeface="Helvetica Neue"/>
+              </a:rPr>
+              <a:t>Can you answer these without notes?</a:t>
+            </a:r>
+          </a:p>
+        </p:txBody>
+      </p:sp>
+      <p:sp>
+        <p:nvSpPr>
+          <p:cNvPr id="6" name="exam-number-1">
+            <a:extLst xmlns:a="http://schemas.openxmlformats.org/drawingml/2006/main">
+              <a:ext uri="{FF2B5EF4-FFF2-40B4-BE49-F238E27FC236}">
+                <a16:creationId xmlns:a16="http://schemas.microsoft.com/office/drawing/2014/main" id="{589E72D1-AB80-48E2-AF5F-E09BFA1DCC95}"/>
+              </a:ext>
+            </a:extLst>
+          </p:cNvPr>
+          <p:cNvSpPr>
+            <a:spLocks xmlns:a="http://schemas.openxmlformats.org/drawingml/2006/main" noGrp="1"/>
+          </p:cNvSpPr>
+          <p:nvPr/>
+        </p:nvSpPr>
+        <p:spPr>
+          <a:xfrm xmlns:a="http://schemas.openxmlformats.org/drawingml/2006/main">
+            <a:off x="390525" y="2238375"/>
+            <a:ext cx="590550" cy="400050"/>
+          </a:xfrm>
+          <a:prstGeom xmlns:a="http://schemas.openxmlformats.org/drawingml/2006/main" prst="rect">
+            <a:avLst/>
+          </a:prstGeom>
+          <a:noFill xmlns:a="http://schemas.openxmlformats.org/drawingml/2006/main"/>
+          <a:ln xmlns:a="http://schemas.openxmlformats.org/drawingml/2006/main" w="0">
+            <a:noFill/>
+            <a:prstDash val="solid"/>
+          </a:ln>
+        </p:spPr>
+        <p:txBody>
+          <a:bodyPr xmlns:a="http://schemas.openxmlformats.org/drawingml/2006/main" anchor="t">
+            <a:noAutofit/>
+          </a:bodyPr>
+          <a:lstStyle xmlns:a="http://schemas.openxmlformats.org/drawingml/2006/main"/>
+          <a:p xmlns:a="http://schemas.openxmlformats.org/drawingml/2006/main">
+            <a:pPr algn="l">
+              <a:defRPr sz="1725" b="1">
+                <a:solidFill>
+                  <a:srgbClr val="C4A1FF"/>
+                </a:solidFill>
+                <a:latin typeface="Helvetica Neue"/>
+                <a:ea typeface="Helvetica Neue"/>
+                <a:cs typeface="Helvetica Neue"/>
+              </a:defRPr>
+            </a:pPr>
+            <a:r>
+              <a:rPr sz="1725" b="1">
+                <a:solidFill>
+                  <a:srgbClr val="C4A1FF"/>
+                </a:solidFill>
+                <a:latin typeface="Helvetica Neue"/>
+                <a:ea typeface="Helvetica Neue"/>
+                <a:cs typeface="Helvetica Neue"/>
+              </a:rPr>
+              <a:t>01</a:t>
+            </a:r>
+          </a:p>
+        </p:txBody>
+      </p:sp>
+      <p:sp>
+        <p:nvSpPr>
+          <p:cNvPr id="7" name="exam-question-1">
+            <a:extLst xmlns:a="http://schemas.openxmlformats.org/drawingml/2006/main">
+              <a:ext uri="{FF2B5EF4-FFF2-40B4-BE49-F238E27FC236}">
+                <a16:creationId xmlns:a16="http://schemas.microsoft.com/office/drawing/2014/main" id="{3C0AB506-1F96-4EA4-9643-4C055BA037E5}"/>
+              </a:ext>
+            </a:extLst>
+          </p:cNvPr>
+          <p:cNvSpPr>
+            <a:spLocks xmlns:a="http://schemas.openxmlformats.org/drawingml/2006/main" noGrp="1"/>
+          </p:cNvSpPr>
+          <p:nvPr/>
+        </p:nvSpPr>
+        <p:spPr>
+          <a:xfrm xmlns:a="http://schemas.openxmlformats.org/drawingml/2006/main">
+            <a:off x="1076325" y="2238375"/>
+            <a:ext cx="4762500" cy="895350"/>
+          </a:xfrm>
+          <a:prstGeom xmlns:a="http://schemas.openxmlformats.org/drawingml/2006/main" prst="rect">
+            <a:avLst/>
+          </a:prstGeom>
+          <a:noFill xmlns:a="http://schemas.openxmlformats.org/drawingml/2006/main"/>
+          <a:ln xmlns:a="http://schemas.openxmlformats.org/drawingml/2006/main" w="0">
+            <a:noFill/>
+            <a:prstDash val="solid"/>
+          </a:ln>
+        </p:spPr>
+        <p:txBody>
+          <a:bodyPr xmlns:a="http://schemas.openxmlformats.org/drawingml/2006/main" anchor="t">
+            <a:normAutofit fontScale="100000"/>
+          </a:bodyPr>
+          <a:lstStyle xmlns:a="http://schemas.openxmlformats.org/drawingml/2006/main"/>
+          <a:p xmlns:a="http://schemas.openxmlformats.org/drawingml/2006/main">
+            <a:pPr algn="l">
+              <a:defRPr sz="1575" b="1">
+                <a:solidFill>
+                  <a:srgbClr val="111111"/>
+                </a:solidFill>
+                <a:latin typeface="Helvetica Neue"/>
+                <a:ea typeface="Helvetica Neue"/>
+                <a:cs typeface="Helvetica Neue"/>
+              </a:defRPr>
+            </a:pPr>
+            <a:r>
+              <a:rPr sz="1575" b="1">
+                <a:solidFill>
+                  <a:srgbClr val="111111"/>
+                </a:solidFill>
+                <a:latin typeface="Helvetica Neue"/>
+                <a:ea typeface="Helvetica Neue"/>
+                <a:cs typeface="Helvetica Neue"/>
+              </a:rPr>
+              <a:t>What distinguishes an agent demo from a production product?</a:t>
+            </a:r>
+          </a:p>
+        </p:txBody>
+      </p:sp>
+      <p:sp>
+        <p:nvSpPr>
+          <p:cNvPr id="8" name="exam-number-2">
+            <a:extLst xmlns:a="http://schemas.openxmlformats.org/drawingml/2006/main">
+              <a:ext uri="{FF2B5EF4-FFF2-40B4-BE49-F238E27FC236}">
+                <a16:creationId xmlns:a16="http://schemas.microsoft.com/office/drawing/2014/main" id="{07F5D51E-38C1-4B4A-BAA5-007BFE5A48C5}"/>
+              </a:ext>
+            </a:extLst>
+          </p:cNvPr>
+          <p:cNvSpPr>
+            <a:spLocks xmlns:a="http://schemas.openxmlformats.org/drawingml/2006/main" noGrp="1"/>
+          </p:cNvSpPr>
+          <p:nvPr/>
+        </p:nvSpPr>
+        <p:spPr>
+          <a:xfrm xmlns:a="http://schemas.openxmlformats.org/drawingml/2006/main">
+            <a:off x="6191250" y="2238375"/>
+            <a:ext cx="590550" cy="400050"/>
+          </a:xfrm>
+          <a:prstGeom xmlns:a="http://schemas.openxmlformats.org/drawingml/2006/main" prst="rect">
+            <a:avLst/>
+          </a:prstGeom>
+          <a:noFill xmlns:a="http://schemas.openxmlformats.org/drawingml/2006/main"/>
+          <a:ln xmlns:a="http://schemas.openxmlformats.org/drawingml/2006/main" w="0">
+            <a:noFill/>
+            <a:prstDash val="solid"/>
+          </a:ln>
+        </p:spPr>
+        <p:txBody>
+          <a:bodyPr xmlns:a="http://schemas.openxmlformats.org/drawingml/2006/main" anchor="t">
+            <a:noAutofit/>
+          </a:bodyPr>
+          <a:lstStyle xmlns:a="http://schemas.openxmlformats.org/drawingml/2006/main"/>
+          <a:p xmlns:a="http://schemas.openxmlformats.org/drawingml/2006/main">
+            <a:pPr algn="l">
+              <a:defRPr sz="1725" b="1">
+                <a:solidFill>
+                  <a:srgbClr val="C4A1FF"/>
+                </a:solidFill>
+                <a:latin typeface="Helvetica Neue"/>
+                <a:ea typeface="Helvetica Neue"/>
+                <a:cs typeface="Helvetica Neue"/>
+              </a:defRPr>
+            </a:pPr>
+            <a:r>
+              <a:rPr sz="1725" b="1">
+                <a:solidFill>
+                  <a:srgbClr val="C4A1FF"/>
+                </a:solidFill>
+                <a:latin typeface="Helvetica Neue"/>
+                <a:ea typeface="Helvetica Neue"/>
+                <a:cs typeface="Helvetica Neue"/>
+              </a:rPr>
+              <a:t>02</a:t>
+            </a:r>
+          </a:p>
+        </p:txBody>
+      </p:sp>
+      <p:sp>
+        <p:nvSpPr>
+          <p:cNvPr id="9" name="exam-question-2">
+            <a:extLst xmlns:a="http://schemas.openxmlformats.org/drawingml/2006/main">
+              <a:ext uri="{FF2B5EF4-FFF2-40B4-BE49-F238E27FC236}">
+                <a16:creationId xmlns:a16="http://schemas.microsoft.com/office/drawing/2014/main" id="{C6E395F3-0DB8-464F-9F71-6E25A3A64AEC}"/>
+              </a:ext>
+            </a:extLst>
+          </p:cNvPr>
+          <p:cNvSpPr>
+            <a:spLocks xmlns:a="http://schemas.openxmlformats.org/drawingml/2006/main" noGrp="1"/>
+          </p:cNvSpPr>
+          <p:nvPr/>
+        </p:nvSpPr>
+        <p:spPr>
+          <a:xfrm xmlns:a="http://schemas.openxmlformats.org/drawingml/2006/main">
+            <a:off x="6877050" y="2238375"/>
+            <a:ext cx="4762500" cy="895350"/>
+          </a:xfrm>
+          <a:prstGeom xmlns:a="http://schemas.openxmlformats.org/drawingml/2006/main" prst="rect">
+            <a:avLst/>
+          </a:prstGeom>
+          <a:noFill xmlns:a="http://schemas.openxmlformats.org/drawingml/2006/main"/>
+          <a:ln xmlns:a="http://schemas.openxmlformats.org/drawingml/2006/main" w="0">
+            <a:noFill/>
+            <a:prstDash val="solid"/>
+          </a:ln>
+        </p:spPr>
+        <p:txBody>
+          <a:bodyPr xmlns:a="http://schemas.openxmlformats.org/drawingml/2006/main" anchor="t">
+            <a:normAutofit fontScale="100000"/>
+          </a:bodyPr>
+          <a:lstStyle xmlns:a="http://schemas.openxmlformats.org/drawingml/2006/main"/>
+          <a:p xmlns:a="http://schemas.openxmlformats.org/drawingml/2006/main">
+            <a:pPr algn="l">
+              <a:defRPr sz="1575" b="1">
+                <a:solidFill>
+                  <a:srgbClr val="111111"/>
+                </a:solidFill>
+                <a:latin typeface="Helvetica Neue"/>
+                <a:ea typeface="Helvetica Neue"/>
+                <a:cs typeface="Helvetica Neue"/>
+              </a:defRPr>
+            </a:pPr>
+            <a:r>
+              <a:rPr sz="1575" b="1">
+                <a:solidFill>
+                  <a:srgbClr val="111111"/>
+                </a:solidFill>
+                <a:latin typeface="Helvetica Neue"/>
+                <a:ea typeface="Helvetica Neue"/>
+                <a:cs typeface="Helvetica Neue"/>
+              </a:rPr>
+              <a:t>Give four methods for reducing cost and four for reducing latency.</a:t>
+            </a:r>
+          </a:p>
+        </p:txBody>
+      </p:sp>
+      <p:sp>
+        <p:nvSpPr>
+          <p:cNvPr id="10" name="exam-number-3">
+            <a:extLst xmlns:a="http://schemas.openxmlformats.org/drawingml/2006/main">
+              <a:ext uri="{FF2B5EF4-FFF2-40B4-BE49-F238E27FC236}">
+                <a16:creationId xmlns:a16="http://schemas.microsoft.com/office/drawing/2014/main" id="{83C40B6A-4A4E-401C-9F73-7269F416ECFA}"/>
+              </a:ext>
+            </a:extLst>
+          </p:cNvPr>
+          <p:cNvSpPr>
+            <a:spLocks xmlns:a="http://schemas.openxmlformats.org/drawingml/2006/main" noGrp="1"/>
+          </p:cNvSpPr>
+          <p:nvPr/>
+        </p:nvSpPr>
+        <p:spPr>
+          <a:xfrm xmlns:a="http://schemas.openxmlformats.org/drawingml/2006/main">
+            <a:off x="390525" y="3495675"/>
+            <a:ext cx="590550" cy="400050"/>
+          </a:xfrm>
+          <a:prstGeom xmlns:a="http://schemas.openxmlformats.org/drawingml/2006/main" prst="rect">
+            <a:avLst/>
+          </a:prstGeom>
+          <a:noFill xmlns:a="http://schemas.openxmlformats.org/drawingml/2006/main"/>
+          <a:ln xmlns:a="http://schemas.openxmlformats.org/drawingml/2006/main" w="0">
+            <a:noFill/>
+            <a:prstDash val="solid"/>
+          </a:ln>
+        </p:spPr>
+        <p:txBody>
+          <a:bodyPr xmlns:a="http://schemas.openxmlformats.org/drawingml/2006/main" anchor="t">
+            <a:noAutofit/>
+          </a:bodyPr>
+          <a:lstStyle xmlns:a="http://schemas.openxmlformats.org/drawingml/2006/main"/>
+          <a:p xmlns:a="http://schemas.openxmlformats.org/drawingml/2006/main">
+            <a:pPr algn="l">
+              <a:defRPr sz="1725" b="1">
+                <a:solidFill>
+                  <a:srgbClr val="C4A1FF"/>
+                </a:solidFill>
+                <a:latin typeface="Helvetica Neue"/>
+                <a:ea typeface="Helvetica Neue"/>
+                <a:cs typeface="Helvetica Neue"/>
+              </a:defRPr>
+            </a:pPr>
+            <a:r>
+              <a:rPr sz="1725" b="1">
+                <a:solidFill>
+                  <a:srgbClr val="C4A1FF"/>
+                </a:solidFill>
+                <a:latin typeface="Helvetica Neue"/>
+                <a:ea typeface="Helvetica Neue"/>
+                <a:cs typeface="Helvetica Neue"/>
+              </a:rPr>
+              <a:t>03</a:t>
+            </a:r>
+          </a:p>
+        </p:txBody>
+      </p:sp>
+      <p:sp>
+        <p:nvSpPr>
+          <p:cNvPr id="11" name="exam-question-3">
+            <a:extLst xmlns:a="http://schemas.openxmlformats.org/drawingml/2006/main">
+              <a:ext uri="{FF2B5EF4-FFF2-40B4-BE49-F238E27FC236}">
+                <a16:creationId xmlns:a16="http://schemas.microsoft.com/office/drawing/2014/main" id="{E16A1EF9-E09C-4DCC-81AD-DC57E9FE9656}"/>
+              </a:ext>
+            </a:extLst>
+          </p:cNvPr>
+          <p:cNvSpPr>
+            <a:spLocks xmlns:a="http://schemas.openxmlformats.org/drawingml/2006/main" noGrp="1"/>
+          </p:cNvSpPr>
+          <p:nvPr/>
+        </p:nvSpPr>
+        <p:spPr>
+          <a:xfrm xmlns:a="http://schemas.openxmlformats.org/drawingml/2006/main">
+            <a:off x="1076325" y="3495675"/>
+            <a:ext cx="4762500" cy="895350"/>
+          </a:xfrm>
+          <a:prstGeom xmlns:a="http://schemas.openxmlformats.org/drawingml/2006/main" prst="rect">
+            <a:avLst/>
+          </a:prstGeom>
+          <a:noFill xmlns:a="http://schemas.openxmlformats.org/drawingml/2006/main"/>
+          <a:ln xmlns:a="http://schemas.openxmlformats.org/drawingml/2006/main" w="0">
+            <a:noFill/>
+            <a:prstDash val="solid"/>
+          </a:ln>
+        </p:spPr>
+        <p:txBody>
+          <a:bodyPr xmlns:a="http://schemas.openxmlformats.org/drawingml/2006/main" anchor="t">
+            <a:normAutofit fontScale="100000"/>
+          </a:bodyPr>
+          <a:lstStyle xmlns:a="http://schemas.openxmlformats.org/drawingml/2006/main"/>
+          <a:p xmlns:a="http://schemas.openxmlformats.org/drawingml/2006/main">
+            <a:pPr algn="l">
+              <a:defRPr sz="1575" b="1">
+                <a:solidFill>
+                  <a:srgbClr val="111111"/>
+                </a:solidFill>
+                <a:latin typeface="Helvetica Neue"/>
+                <a:ea typeface="Helvetica Neue"/>
+                <a:cs typeface="Helvetica Neue"/>
+              </a:defRPr>
+            </a:pPr>
+            <a:r>
+              <a:rPr sz="1575" b="1">
+                <a:solidFill>
+                  <a:srgbClr val="111111"/>
+                </a:solidFill>
+                <a:latin typeface="Helvetica Neue"/>
+                <a:ea typeface="Helvetica Neue"/>
+                <a:cs typeface="Helvetica Neue"/>
+              </a:rPr>
+              <a:t>What artifacts must be versioned for reproducibility?</a:t>
+            </a:r>
+          </a:p>
+        </p:txBody>
+      </p:sp>
+      <p:sp>
+        <p:nvSpPr>
+          <p:cNvPr id="12" name="exam-number-4">
+            <a:extLst xmlns:a="http://schemas.openxmlformats.org/drawingml/2006/main">
+              <a:ext uri="{FF2B5EF4-FFF2-40B4-BE49-F238E27FC236}">
+                <a16:creationId xmlns:a16="http://schemas.microsoft.com/office/drawing/2014/main" id="{BB73782F-A389-4549-BFE5-150E832E9970}"/>
+              </a:ext>
+            </a:extLst>
+          </p:cNvPr>
+          <p:cNvSpPr>
+            <a:spLocks xmlns:a="http://schemas.openxmlformats.org/drawingml/2006/main" noGrp="1"/>
+          </p:cNvSpPr>
+          <p:nvPr/>
+        </p:nvSpPr>
+        <p:spPr>
+          <a:xfrm xmlns:a="http://schemas.openxmlformats.org/drawingml/2006/main">
+            <a:off x="6191250" y="3495675"/>
+            <a:ext cx="590550" cy="400050"/>
+          </a:xfrm>
+          <a:prstGeom xmlns:a="http://schemas.openxmlformats.org/drawingml/2006/main" prst="rect">
+            <a:avLst/>
+          </a:prstGeom>
+          <a:noFill xmlns:a="http://schemas.openxmlformats.org/drawingml/2006/main"/>
+          <a:ln xmlns:a="http://schemas.openxmlformats.org/drawingml/2006/main" w="0">
+            <a:noFill/>
+            <a:prstDash val="solid"/>
+          </a:ln>
+        </p:spPr>
+        <p:txBody>
+          <a:bodyPr xmlns:a="http://schemas.openxmlformats.org/drawingml/2006/main" anchor="t">
+            <a:noAutofit/>
+          </a:bodyPr>
+          <a:lstStyle xmlns:a="http://schemas.openxmlformats.org/drawingml/2006/main"/>
+          <a:p xmlns:a="http://schemas.openxmlformats.org/drawingml/2006/main">
+            <a:pPr algn="l">
+              <a:defRPr sz="1725" b="1">
+                <a:solidFill>
+                  <a:srgbClr val="C4A1FF"/>
+                </a:solidFill>
+                <a:latin typeface="Helvetica Neue"/>
+                <a:ea typeface="Helvetica Neue"/>
+                <a:cs typeface="Helvetica Neue"/>
+              </a:defRPr>
+            </a:pPr>
+            <a:r>
+              <a:rPr sz="1725" b="1">
+                <a:solidFill>
+                  <a:srgbClr val="C4A1FF"/>
+                </a:solidFill>
+                <a:latin typeface="Helvetica Neue"/>
+                <a:ea typeface="Helvetica Neue"/>
+                <a:cs typeface="Helvetica Neue"/>
+              </a:rPr>
+              <a:t>04</a:t>
+            </a:r>
+          </a:p>
+        </p:txBody>
+      </p:sp>
+      <p:sp>
+        <p:nvSpPr>
+          <p:cNvPr id="13" name="exam-question-4">
+            <a:extLst xmlns:a="http://schemas.openxmlformats.org/drawingml/2006/main">
+              <a:ext uri="{FF2B5EF4-FFF2-40B4-BE49-F238E27FC236}">
+                <a16:creationId xmlns:a16="http://schemas.microsoft.com/office/drawing/2014/main" id="{A2C19D64-A0D7-4137-B2C3-2DDFA3EDEE32}"/>
+              </a:ext>
+            </a:extLst>
+          </p:cNvPr>
+          <p:cNvSpPr>
+            <a:spLocks xmlns:a="http://schemas.openxmlformats.org/drawingml/2006/main" noGrp="1"/>
+          </p:cNvSpPr>
+          <p:nvPr/>
+        </p:nvSpPr>
+        <p:spPr>
+          <a:xfrm xmlns:a="http://schemas.openxmlformats.org/drawingml/2006/main">
+            <a:off x="6877050" y="3495675"/>
+            <a:ext cx="4762500" cy="895350"/>
+          </a:xfrm>
+          <a:prstGeom xmlns:a="http://schemas.openxmlformats.org/drawingml/2006/main" prst="rect">
+            <a:avLst/>
+          </a:prstGeom>
+          <a:noFill xmlns:a="http://schemas.openxmlformats.org/drawingml/2006/main"/>
+          <a:ln xmlns:a="http://schemas.openxmlformats.org/drawingml/2006/main" w="0">
+            <a:noFill/>
+            <a:prstDash val="solid"/>
+          </a:ln>
+        </p:spPr>
+        <p:txBody>
+          <a:bodyPr xmlns:a="http://schemas.openxmlformats.org/drawingml/2006/main" anchor="t">
+            <a:normAutofit fontScale="100000"/>
+          </a:bodyPr>
+          <a:lstStyle xmlns:a="http://schemas.openxmlformats.org/drawingml/2006/main"/>
+          <a:p xmlns:a="http://schemas.openxmlformats.org/drawingml/2006/main">
+            <a:pPr algn="l">
+              <a:defRPr sz="1575" b="1">
+                <a:solidFill>
+                  <a:srgbClr val="111111"/>
+                </a:solidFill>
+                <a:latin typeface="Helvetica Neue"/>
+                <a:ea typeface="Helvetica Neue"/>
+                <a:cs typeface="Helvetica Neue"/>
+              </a:defRPr>
+            </a:pPr>
+            <a:r>
+              <a:rPr sz="1575" b="1">
+                <a:solidFill>
+                  <a:srgbClr val="111111"/>
+                </a:solidFill>
+                <a:latin typeface="Helvetica Neue"/>
+                <a:ea typeface="Helvetica Neue"/>
+                <a:cs typeface="Helvetica Neue"/>
+              </a:rPr>
+              <a:t>What does AgentOps add to ordinary service operations?</a:t>
+            </a:r>
+          </a:p>
+        </p:txBody>
+      </p:sp>
+      <p:sp>
+        <p:nvSpPr>
+          <p:cNvPr id="14" name="exam-number-5">
+            <a:extLst xmlns:a="http://schemas.openxmlformats.org/drawingml/2006/main">
+              <a:ext uri="{FF2B5EF4-FFF2-40B4-BE49-F238E27FC236}">
+                <a16:creationId xmlns:a16="http://schemas.microsoft.com/office/drawing/2014/main" id="{9EC347DD-60B9-4AAA-901A-0F0FC54F094C}"/>
+              </a:ext>
+            </a:extLst>
+          </p:cNvPr>
+          <p:cNvSpPr>
+            <a:spLocks xmlns:a="http://schemas.openxmlformats.org/drawingml/2006/main" noGrp="1"/>
+          </p:cNvSpPr>
+          <p:nvPr/>
+        </p:nvSpPr>
+        <p:spPr>
+          <a:xfrm xmlns:a="http://schemas.openxmlformats.org/drawingml/2006/main">
+            <a:off x="390525" y="4752975"/>
+            <a:ext cx="590550" cy="400050"/>
+          </a:xfrm>
+          <a:prstGeom xmlns:a="http://schemas.openxmlformats.org/drawingml/2006/main" prst="rect">
+            <a:avLst/>
+          </a:prstGeom>
+          <a:noFill xmlns:a="http://schemas.openxmlformats.org/drawingml/2006/main"/>
+          <a:ln xmlns:a="http://schemas.openxmlformats.org/drawingml/2006/main" w="0">
+            <a:noFill/>
+            <a:prstDash val="solid"/>
+          </a:ln>
+        </p:spPr>
+        <p:txBody>
+          <a:bodyPr xmlns:a="http://schemas.openxmlformats.org/drawingml/2006/main" anchor="t">
+            <a:noAutofit/>
+          </a:bodyPr>
+          <a:lstStyle xmlns:a="http://schemas.openxmlformats.org/drawingml/2006/main"/>
+          <a:p xmlns:a="http://schemas.openxmlformats.org/drawingml/2006/main">
+            <a:pPr algn="l">
+              <a:defRPr sz="1725" b="1">
+                <a:solidFill>
+                  <a:srgbClr val="C4A1FF"/>
+                </a:solidFill>
+                <a:latin typeface="Helvetica Neue"/>
+                <a:ea typeface="Helvetica Neue"/>
+                <a:cs typeface="Helvetica Neue"/>
+              </a:defRPr>
+            </a:pPr>
+            <a:r>
+              <a:rPr sz="1725" b="1">
+                <a:solidFill>
+                  <a:srgbClr val="C4A1FF"/>
+                </a:solidFill>
+                <a:latin typeface="Helvetica Neue"/>
+                <a:ea typeface="Helvetica Neue"/>
+                <a:cs typeface="Helvetica Neue"/>
+              </a:rPr>
+              <a:t>05</a:t>
+            </a:r>
+          </a:p>
+        </p:txBody>
+      </p:sp>
+      <p:sp>
+        <p:nvSpPr>
+          <p:cNvPr id="15" name="exam-question-5">
+            <a:extLst xmlns:a="http://schemas.openxmlformats.org/drawingml/2006/main">
+              <a:ext uri="{FF2B5EF4-FFF2-40B4-BE49-F238E27FC236}">
+                <a16:creationId xmlns:a16="http://schemas.microsoft.com/office/drawing/2014/main" id="{B951DEFD-BD82-4E4B-A498-665012C444B9}"/>
+              </a:ext>
+            </a:extLst>
+          </p:cNvPr>
+          <p:cNvSpPr>
+            <a:spLocks xmlns:a="http://schemas.openxmlformats.org/drawingml/2006/main" noGrp="1"/>
+          </p:cNvSpPr>
+          <p:nvPr/>
+        </p:nvSpPr>
+        <p:spPr>
+          <a:xfrm xmlns:a="http://schemas.openxmlformats.org/drawingml/2006/main">
+            <a:off x="1076325" y="4752975"/>
+            <a:ext cx="4762500" cy="895350"/>
+          </a:xfrm>
+          <a:prstGeom xmlns:a="http://schemas.openxmlformats.org/drawingml/2006/main" prst="rect">
+            <a:avLst/>
+          </a:prstGeom>
+          <a:noFill xmlns:a="http://schemas.openxmlformats.org/drawingml/2006/main"/>
+          <a:ln xmlns:a="http://schemas.openxmlformats.org/drawingml/2006/main" w="0">
+            <a:noFill/>
+            <a:prstDash val="solid"/>
+          </a:ln>
+        </p:spPr>
+        <p:txBody>
+          <a:bodyPr xmlns:a="http://schemas.openxmlformats.org/drawingml/2006/main" anchor="t">
+            <a:normAutofit fontScale="100000"/>
+          </a:bodyPr>
+          <a:lstStyle xmlns:a="http://schemas.openxmlformats.org/drawingml/2006/main"/>
+          <a:p xmlns:a="http://schemas.openxmlformats.org/drawingml/2006/main">
+            <a:pPr algn="l">
+              <a:defRPr sz="1575" b="1">
+                <a:solidFill>
+                  <a:srgbClr val="111111"/>
+                </a:solidFill>
+                <a:latin typeface="Helvetica Neue"/>
+                <a:ea typeface="Helvetica Neue"/>
+                <a:cs typeface="Helvetica Neue"/>
+              </a:defRPr>
+            </a:pPr>
+            <a:r>
+              <a:rPr sz="1575" b="1">
+                <a:solidFill>
+                  <a:srgbClr val="111111"/>
+                </a:solidFill>
+                <a:latin typeface="Helvetica Neue"/>
+                <a:ea typeface="Helvetica Neue"/>
+                <a:cs typeface="Helvetica Neue"/>
+              </a:rPr>
+              <a:t>Why are coding agents comparatively successful?</a:t>
+            </a:r>
+          </a:p>
+        </p:txBody>
+      </p:sp>
+      <p:sp>
+        <p:nvSpPr>
+          <p:cNvPr id="16" name="exam-number-6">
+            <a:extLst xmlns:a="http://schemas.openxmlformats.org/drawingml/2006/main">
+              <a:ext uri="{FF2B5EF4-FFF2-40B4-BE49-F238E27FC236}">
+                <a16:creationId xmlns:a16="http://schemas.microsoft.com/office/drawing/2014/main" id="{AED5DCAC-7841-46E6-A1A4-CB67DF739581}"/>
+              </a:ext>
+            </a:extLst>
+          </p:cNvPr>
+          <p:cNvSpPr>
+            <a:spLocks xmlns:a="http://schemas.openxmlformats.org/drawingml/2006/main" noGrp="1"/>
+          </p:cNvSpPr>
+          <p:nvPr/>
+        </p:nvSpPr>
+        <p:spPr>
+          <a:xfrm xmlns:a="http://schemas.openxmlformats.org/drawingml/2006/main">
+            <a:off x="6191250" y="4752975"/>
+            <a:ext cx="590550" cy="400050"/>
+          </a:xfrm>
+          <a:prstGeom xmlns:a="http://schemas.openxmlformats.org/drawingml/2006/main" prst="rect">
+            <a:avLst/>
+          </a:prstGeom>
+          <a:noFill xmlns:a="http://schemas.openxmlformats.org/drawingml/2006/main"/>
+          <a:ln xmlns:a="http://schemas.openxmlformats.org/drawingml/2006/main" w="0">
+            <a:noFill/>
+            <a:prstDash val="solid"/>
+          </a:ln>
+        </p:spPr>
+        <p:txBody>
+          <a:bodyPr xmlns:a="http://schemas.openxmlformats.org/drawingml/2006/main" anchor="t">
+            <a:noAutofit/>
+          </a:bodyPr>
+          <a:lstStyle xmlns:a="http://schemas.openxmlformats.org/drawingml/2006/main"/>
+          <a:p xmlns:a="http://schemas.openxmlformats.org/drawingml/2006/main">
+            <a:pPr algn="l">
+              <a:defRPr sz="1725" b="1">
+                <a:solidFill>
+                  <a:srgbClr val="C4A1FF"/>
+                </a:solidFill>
+                <a:latin typeface="Helvetica Neue"/>
+                <a:ea typeface="Helvetica Neue"/>
+                <a:cs typeface="Helvetica Neue"/>
+              </a:defRPr>
+            </a:pPr>
+            <a:r>
+              <a:rPr sz="1725" b="1">
+                <a:solidFill>
+                  <a:srgbClr val="C4A1FF"/>
+                </a:solidFill>
+                <a:latin typeface="Helvetica Neue"/>
+                <a:ea typeface="Helvetica Neue"/>
+                <a:cs typeface="Helvetica Neue"/>
+              </a:rPr>
+              <a:t>06</a:t>
+            </a:r>
+          </a:p>
+        </p:txBody>
+      </p:sp>
+      <p:sp>
+        <p:nvSpPr>
+          <p:cNvPr id="17" name="exam-question-6">
+            <a:extLst xmlns:a="http://schemas.openxmlformats.org/drawingml/2006/main">
+              <a:ext uri="{FF2B5EF4-FFF2-40B4-BE49-F238E27FC236}">
+                <a16:creationId xmlns:a16="http://schemas.microsoft.com/office/drawing/2014/main" id="{E766B7CD-68B4-4A3E-8A81-FA4665D8596A}"/>
+              </a:ext>
+            </a:extLst>
+          </p:cNvPr>
+          <p:cNvSpPr>
+            <a:spLocks xmlns:a="http://schemas.openxmlformats.org/drawingml/2006/main" noGrp="1"/>
+          </p:cNvSpPr>
+          <p:nvPr/>
+        </p:nvSpPr>
+        <p:spPr>
+          <a:xfrm xmlns:a="http://schemas.openxmlformats.org/drawingml/2006/main">
+            <a:off x="6877050" y="4752975"/>
+            <a:ext cx="4762500" cy="895350"/>
+          </a:xfrm>
+          <a:prstGeom xmlns:a="http://schemas.openxmlformats.org/drawingml/2006/main" prst="rect">
+            <a:avLst/>
+          </a:prstGeom>
+          <a:noFill xmlns:a="http://schemas.openxmlformats.org/drawingml/2006/main"/>
+          <a:ln xmlns:a="http://schemas.openxmlformats.org/drawingml/2006/main" w="0">
+            <a:noFill/>
+            <a:prstDash val="solid"/>
+          </a:ln>
+        </p:spPr>
+        <p:txBody>
+          <a:bodyPr xmlns:a="http://schemas.openxmlformats.org/drawingml/2006/main" anchor="t">
+            <a:normAutofit fontScale="100000"/>
+          </a:bodyPr>
+          <a:lstStyle xmlns:a="http://schemas.openxmlformats.org/drawingml/2006/main"/>
+          <a:p xmlns:a="http://schemas.openxmlformats.org/drawingml/2006/main">
+            <a:pPr algn="l">
+              <a:defRPr sz="1575" b="1">
+                <a:solidFill>
+                  <a:srgbClr val="111111"/>
+                </a:solidFill>
+                <a:latin typeface="Helvetica Neue"/>
+                <a:ea typeface="Helvetica Neue"/>
+                <a:cs typeface="Helvetica Neue"/>
+              </a:defRPr>
+            </a:pPr>
+            <a:r>
+              <a:rPr sz="1575" b="1">
+                <a:solidFill>
+                  <a:srgbClr val="111111"/>
+                </a:solidFill>
+                <a:latin typeface="Helvetica Neue"/>
+                <a:ea typeface="Helvetica Neue"/>
+                <a:cs typeface="Helvetica Neue"/>
+              </a:rPr>
+              <a:t>What evidence and ownership must accompany a successful agent demonstration?</a:t>
+            </a:r>
+          </a:p>
+        </p:txBody>
+      </p:sp>
+    </p:spTree>
+    <p:extLst>
+      <p:ext uri="{BB962C8B-B14F-4D97-AF65-F5344CB8AC3E}">
+        <p14:creationId xmlns:p14="http://schemas.microsoft.com/office/powerpoint/2010/main" val="1246151464"/>
+      </p:ext>
+    </p:extLst>
+  </p:cSld>
+</p:sld>
+</file>
+
+<file path=ppt/slides/slide11.xml><?xml version="1.0" encoding="utf-8"?>
 <p:sld xmlns:p="http://schemas.openxmlformats.org/presentationml/2006/main">
   <p:cSld>
     <p:bg>
@@ -2258,7 +3960,7 @@
           <p:cNvPr id="14" name="accent-line">
             <a:extLst xmlns:a="http://schemas.openxmlformats.org/drawingml/2006/main">
               <a:ext uri="{FF2B5EF4-FFF2-40B4-BE49-F238E27FC236}">
-                <a16:creationId xmlns:a16="http://schemas.microsoft.com/office/drawing/2014/main" id="{1EDF691B-7702-4384-BEDC-6910AA650EA6}"/>
+                <a16:creationId xmlns:a16="http://schemas.microsoft.com/office/drawing/2014/main" id="{720BABF5-6BE9-45B0-B5CA-03E2040F6F14}"/>
               </a:ext>
             </a:extLst>
           </p:cNvPr>
@@ -2291,7 +3993,7 @@
           <p:cNvPr id="2" name="chapter-label">
             <a:extLst xmlns:a="http://schemas.openxmlformats.org/drawingml/2006/main">
               <a:ext uri="{FF2B5EF4-FFF2-40B4-BE49-F238E27FC236}">
-                <a16:creationId xmlns:a16="http://schemas.microsoft.com/office/drawing/2014/main" id="{F1F5D9E5-1297-4015-BDC6-F2E4CD7791D3}"/>
+                <a16:creationId xmlns:a16="http://schemas.microsoft.com/office/drawing/2014/main" id="{12973177-69F2-4918-B8B7-BA825F9C73A6}"/>
               </a:ext>
             </a:extLst>
           </p:cNvPr>
@@ -2349,7 +4051,7 @@
           <p:cNvPr id="3" name="slide-number">
             <a:extLst xmlns:a="http://schemas.openxmlformats.org/drawingml/2006/main">
               <a:ext uri="{FF2B5EF4-FFF2-40B4-BE49-F238E27FC236}">
-                <a16:creationId xmlns:a16="http://schemas.microsoft.com/office/drawing/2014/main" id="{C11932E7-B011-403D-B419-DBC4CBAD57A1}"/>
+                <a16:creationId xmlns:a16="http://schemas.microsoft.com/office/drawing/2014/main" id="{6CF2CE71-AFDA-4639-A4CE-2522794E0773}"/>
               </a:ext>
             </a:extLst>
           </p:cNvPr>
@@ -2397,7 +4099,7 @@
                 <a:ea typeface="Helvetica Neue"/>
                 <a:cs typeface="Helvetica Neue"/>
               </a:rPr>
-              <a:t>10</a:t>
+              <a:t>11</a:t>
             </a:r>
           </a:p>
         </p:txBody>
@@ -2407,7 +4109,7 @@
           <p:cNvPr id="4" name="chapter-footer">
             <a:extLst xmlns:a="http://schemas.openxmlformats.org/drawingml/2006/main">
               <a:ext uri="{FF2B5EF4-FFF2-40B4-BE49-F238E27FC236}">
-                <a16:creationId xmlns:a16="http://schemas.microsoft.com/office/drawing/2014/main" id="{989FC0C7-7A0F-450B-9721-1B26E3B5625A}"/>
+                <a16:creationId xmlns:a16="http://schemas.microsoft.com/office/drawing/2014/main" id="{71183488-666D-4E88-B24F-18915BC4568A}"/>
               </a:ext>
             </a:extLst>
           </p:cNvPr>
@@ -2465,7 +4167,7 @@
           <p:cNvPr id="5" name="closing-title">
             <a:extLst xmlns:a="http://schemas.openxmlformats.org/drawingml/2006/main">
               <a:ext uri="{FF2B5EF4-FFF2-40B4-BE49-F238E27FC236}">
-                <a16:creationId xmlns:a16="http://schemas.microsoft.com/office/drawing/2014/main" id="{401F7BAA-25C0-46BA-892B-3CDDE5069131}"/>
+                <a16:creationId xmlns:a16="http://schemas.microsoft.com/office/drawing/2014/main" id="{EF9CAB6A-E524-4FD2-8534-4B87E495C8D6}"/>
               </a:ext>
             </a:extLst>
           </p:cNvPr>
@@ -2523,7 +4225,7 @@
           <p:cNvPr id="6" name="takeaway-number-1">
             <a:extLst xmlns:a="http://schemas.openxmlformats.org/drawingml/2006/main">
               <a:ext uri="{FF2B5EF4-FFF2-40B4-BE49-F238E27FC236}">
-                <a16:creationId xmlns:a16="http://schemas.microsoft.com/office/drawing/2014/main" id="{F9B00309-1E08-4EE1-80B4-3F2954EB0440}"/>
+                <a16:creationId xmlns:a16="http://schemas.microsoft.com/office/drawing/2014/main" id="{7686C343-24E2-4995-B6E7-5AEB4E97DC48}"/>
               </a:ext>
             </a:extLst>
           </p:cNvPr>
@@ -2581,7 +4283,7 @@
           <p:cNvPr id="7" name="takeaway-1">
             <a:extLst xmlns:a="http://schemas.openxmlformats.org/drawingml/2006/main">
               <a:ext uri="{FF2B5EF4-FFF2-40B4-BE49-F238E27FC236}">
-                <a16:creationId xmlns:a16="http://schemas.microsoft.com/office/drawing/2014/main" id="{B231C8DB-B27C-495F-B326-A50B4829EFC7}"/>
+                <a16:creationId xmlns:a16="http://schemas.microsoft.com/office/drawing/2014/main" id="{6600AF1C-8863-4972-8BFE-47EBF3548874}"/>
               </a:ext>
             </a:extLst>
           </p:cNvPr>
@@ -2639,7 +4341,7 @@
           <p:cNvPr id="8" name="takeaway-number-2">
             <a:extLst xmlns:a="http://schemas.openxmlformats.org/drawingml/2006/main">
               <a:ext uri="{FF2B5EF4-FFF2-40B4-BE49-F238E27FC236}">
-                <a16:creationId xmlns:a16="http://schemas.microsoft.com/office/drawing/2014/main" id="{BEDA92A3-7C40-44DA-86A3-FB2C542BD0BD}"/>
+                <a16:creationId xmlns:a16="http://schemas.microsoft.com/office/drawing/2014/main" id="{668DE000-DC9A-4BF0-8406-54E09F3A163D}"/>
               </a:ext>
             </a:extLst>
           </p:cNvPr>
@@ -2697,7 +4399,7 @@
           <p:cNvPr id="9" name="takeaway-2">
             <a:extLst xmlns:a="http://schemas.openxmlformats.org/drawingml/2006/main">
               <a:ext uri="{FF2B5EF4-FFF2-40B4-BE49-F238E27FC236}">
-                <a16:creationId xmlns:a16="http://schemas.microsoft.com/office/drawing/2014/main" id="{BCBAC5D9-5072-4E5F-B89B-9969DA3457A3}"/>
+                <a16:creationId xmlns:a16="http://schemas.microsoft.com/office/drawing/2014/main" id="{574C45B2-0C83-4C34-8FE2-38157A0ECC8C}"/>
               </a:ext>
             </a:extLst>
           </p:cNvPr>
@@ -2755,7 +4457,7 @@
           <p:cNvPr id="10" name="takeaway-number-3">
             <a:extLst xmlns:a="http://schemas.openxmlformats.org/drawingml/2006/main">
               <a:ext uri="{FF2B5EF4-FFF2-40B4-BE49-F238E27FC236}">
-                <a16:creationId xmlns:a16="http://schemas.microsoft.com/office/drawing/2014/main" id="{EA9F7862-6F2D-4A1F-B6E3-871B388D7578}"/>
+                <a16:creationId xmlns:a16="http://schemas.microsoft.com/office/drawing/2014/main" id="{FC939589-011C-4536-8B6C-7B840918BB20}"/>
               </a:ext>
             </a:extLst>
           </p:cNvPr>
@@ -2813,7 +4515,7 @@
           <p:cNvPr id="11" name="takeaway-3">
             <a:extLst xmlns:a="http://schemas.openxmlformats.org/drawingml/2006/main">
               <a:ext uri="{FF2B5EF4-FFF2-40B4-BE49-F238E27FC236}">
-                <a16:creationId xmlns:a16="http://schemas.microsoft.com/office/drawing/2014/main" id="{5227F864-E905-49A9-B6CD-C7F2D200FBA5}"/>
+                <a16:creationId xmlns:a16="http://schemas.microsoft.com/office/drawing/2014/main" id="{5F272B83-899C-4BD2-91AF-E41EFE9A90CB}"/>
               </a:ext>
             </a:extLst>
           </p:cNvPr>
@@ -2871,7 +4573,7 @@
           <p:cNvPr id="12" name="takeaway-number-4">
             <a:extLst xmlns:a="http://schemas.openxmlformats.org/drawingml/2006/main">
               <a:ext uri="{FF2B5EF4-FFF2-40B4-BE49-F238E27FC236}">
-                <a16:creationId xmlns:a16="http://schemas.microsoft.com/office/drawing/2014/main" id="{247B9455-B661-4E23-9604-6B0A1AE6FCD3}"/>
+                <a16:creationId xmlns:a16="http://schemas.microsoft.com/office/drawing/2014/main" id="{C9B4CF31-38AB-4E4C-B897-0470BCB04C5D}"/>
               </a:ext>
             </a:extLst>
           </p:cNvPr>
@@ -2929,7 +4631,7 @@
           <p:cNvPr id="13" name="takeaway-4">
             <a:extLst xmlns:a="http://schemas.openxmlformats.org/drawingml/2006/main">
               <a:ext uri="{FF2B5EF4-FFF2-40B4-BE49-F238E27FC236}">
-                <a16:creationId xmlns:a16="http://schemas.microsoft.com/office/drawing/2014/main" id="{6218E25B-904D-46DE-A180-19C1FBCFB5D7}"/>
+                <a16:creationId xmlns:a16="http://schemas.microsoft.com/office/drawing/2014/main" id="{78F46F96-1C07-4A49-8E21-5985BD6D0F4E}"/>
               </a:ext>
             </a:extLst>
           </p:cNvPr>
@@ -2985,7 +4687,556 @@
     </p:spTree>
     <p:extLst>
       <p:ext uri="{BB962C8B-B14F-4D97-AF65-F5344CB8AC3E}">
-        <p14:creationId xmlns:p14="http://schemas.microsoft.com/office/powerpoint/2010/main" val="1998293906"/>
+        <p14:creationId xmlns:p14="http://schemas.microsoft.com/office/powerpoint/2010/main" val="901856232"/>
+      </p:ext>
+    </p:extLst>
+  </p:cSld>
+</p:sld>
+</file>
+
+<file path=ppt/slides/slide12.xml><?xml version="1.0" encoding="utf-8"?>
+<p:sld xmlns:p="http://schemas.openxmlformats.org/presentationml/2006/main">
+  <p:cSld>
+    <p:bg>
+      <p:bgPr>
+        <a:solidFill xmlns:a="http://schemas.openxmlformats.org/drawingml/2006/main">
+          <a:srgbClr val="FFFFFF"/>
+        </a:solidFill>
+      </p:bgPr>
+    </p:bg>
+    <p:spTree>
+      <p:nvGrpSpPr>
+        <p:cNvPr id="1" name=""/>
+        <p:cNvGrpSpPr/>
+        <p:nvPr/>
+      </p:nvGrpSpPr>
+      <p:grpSpPr>
+        <a:xfrm xmlns:a="http://schemas.openxmlformats.org/drawingml/2006/main"/>
+      </p:grpSpPr>
+      <p:sp>
+        <p:nvSpPr>
+          <p:cNvPr id="10" name="accent-line">
+            <a:extLst xmlns:a="http://schemas.openxmlformats.org/drawingml/2006/main">
+              <a:ext uri="{FF2B5EF4-FFF2-40B4-BE49-F238E27FC236}">
+                <a16:creationId xmlns:a16="http://schemas.microsoft.com/office/drawing/2014/main" id="{CCFB010C-02D4-4550-B233-FB81C5993298}"/>
+              </a:ext>
+            </a:extLst>
+          </p:cNvPr>
+          <p:cNvSpPr>
+            <a:spLocks xmlns:a="http://schemas.openxmlformats.org/drawingml/2006/main" noGrp="1"/>
+          </p:cNvSpPr>
+          <p:nvPr/>
+        </p:nvSpPr>
+        <p:spPr>
+          <a:xfrm xmlns:a="http://schemas.openxmlformats.org/drawingml/2006/main">
+            <a:off x="390525" y="304800"/>
+            <a:ext cx="11410950" cy="66675"/>
+          </a:xfrm>
+          <a:prstGeom xmlns:a="http://schemas.openxmlformats.org/drawingml/2006/main" prst="rect">
+            <a:avLst/>
+          </a:prstGeom>
+          <a:solidFill xmlns:a="http://schemas.openxmlformats.org/drawingml/2006/main">
+            <a:srgbClr val="C4A1FF"/>
+          </a:solidFill>
+          <a:ln xmlns:a="http://schemas.openxmlformats.org/drawingml/2006/main" w="0">
+            <a:solidFill>
+              <a:srgbClr val="C4A1FF"/>
+            </a:solidFill>
+            <a:prstDash val="solid"/>
+          </a:ln>
+        </p:spPr>
+      </p:sp>
+      <p:sp>
+        <p:nvSpPr>
+          <p:cNvPr id="2" name="chapter-label">
+            <a:extLst xmlns:a="http://schemas.openxmlformats.org/drawingml/2006/main">
+              <a:ext uri="{FF2B5EF4-FFF2-40B4-BE49-F238E27FC236}">
+                <a16:creationId xmlns:a16="http://schemas.microsoft.com/office/drawing/2014/main" id="{2C31A9C1-7FBB-4B55-951E-35A4A006BDEB}"/>
+              </a:ext>
+            </a:extLst>
+          </p:cNvPr>
+          <p:cNvSpPr>
+            <a:spLocks xmlns:a="http://schemas.openxmlformats.org/drawingml/2006/main" noGrp="1"/>
+          </p:cNvSpPr>
+          <p:nvPr/>
+        </p:nvSpPr>
+        <p:spPr>
+          <a:xfrm xmlns:a="http://schemas.openxmlformats.org/drawingml/2006/main">
+            <a:off x="390525" y="466725"/>
+            <a:ext cx="4953000" cy="323850"/>
+          </a:xfrm>
+          <a:prstGeom xmlns:a="http://schemas.openxmlformats.org/drawingml/2006/main" prst="rect">
+            <a:avLst/>
+          </a:prstGeom>
+          <a:noFill xmlns:a="http://schemas.openxmlformats.org/drawingml/2006/main"/>
+          <a:ln xmlns:a="http://schemas.openxmlformats.org/drawingml/2006/main" w="0">
+            <a:noFill/>
+            <a:prstDash val="solid"/>
+          </a:ln>
+        </p:spPr>
+        <p:txBody>
+          <a:bodyPr xmlns:a="http://schemas.openxmlformats.org/drawingml/2006/main" anchor="t">
+            <a:noAutofit/>
+          </a:bodyPr>
+          <a:lstStyle xmlns:a="http://schemas.openxmlformats.org/drawingml/2006/main"/>
+          <a:p xmlns:a="http://schemas.openxmlformats.org/drawingml/2006/main">
+            <a:pPr algn="l">
+              <a:defRPr sz="1275" b="1">
+                <a:solidFill>
+                  <a:srgbClr val="5B5B57"/>
+                </a:solidFill>
+                <a:latin typeface="Helvetica Neue"/>
+                <a:ea typeface="Helvetica Neue"/>
+                <a:cs typeface="Helvetica Neue"/>
+              </a:defRPr>
+            </a:pPr>
+            <a:r>
+              <a:rPr sz="1275" b="1">
+                <a:solidFill>
+                  <a:srgbClr val="5B5B57"/>
+                </a:solidFill>
+                <a:latin typeface="Helvetica Neue"/>
+                <a:ea typeface="Helvetica Neue"/>
+                <a:cs typeface="Helvetica Neue"/>
+              </a:rPr>
+              <a:t>PRACTICE AND READING  /  13</a:t>
+            </a:r>
+          </a:p>
+        </p:txBody>
+      </p:sp>
+      <p:sp>
+        <p:nvSpPr>
+          <p:cNvPr id="3" name="slide-number">
+            <a:extLst xmlns:a="http://schemas.openxmlformats.org/drawingml/2006/main">
+              <a:ext uri="{FF2B5EF4-FFF2-40B4-BE49-F238E27FC236}">
+                <a16:creationId xmlns:a16="http://schemas.microsoft.com/office/drawing/2014/main" id="{B7000EAE-2B96-4F0E-8EB5-5748DD3BFE65}"/>
+              </a:ext>
+            </a:extLst>
+          </p:cNvPr>
+          <p:cNvSpPr>
+            <a:spLocks xmlns:a="http://schemas.openxmlformats.org/drawingml/2006/main" noGrp="1"/>
+          </p:cNvSpPr>
+          <p:nvPr/>
+        </p:nvSpPr>
+        <p:spPr>
+          <a:xfrm xmlns:a="http://schemas.openxmlformats.org/drawingml/2006/main">
+            <a:off x="11049000" y="6286500"/>
+            <a:ext cx="742950" cy="266700"/>
+          </a:xfrm>
+          <a:prstGeom xmlns:a="http://schemas.openxmlformats.org/drawingml/2006/main" prst="rect">
+            <a:avLst/>
+          </a:prstGeom>
+          <a:noFill xmlns:a="http://schemas.openxmlformats.org/drawingml/2006/main"/>
+          <a:ln xmlns:a="http://schemas.openxmlformats.org/drawingml/2006/main" w="0">
+            <a:noFill/>
+            <a:prstDash val="solid"/>
+          </a:ln>
+        </p:spPr>
+        <p:txBody>
+          <a:bodyPr xmlns:a="http://schemas.openxmlformats.org/drawingml/2006/main" anchor="t">
+            <a:noAutofit/>
+          </a:bodyPr>
+          <a:lstStyle xmlns:a="http://schemas.openxmlformats.org/drawingml/2006/main"/>
+          <a:p xmlns:a="http://schemas.openxmlformats.org/drawingml/2006/main">
+            <a:pPr algn="r">
+              <a:defRPr sz="1200" b="0">
+                <a:solidFill>
+                  <a:srgbClr val="5B5B57"/>
+                </a:solidFill>
+                <a:latin typeface="Helvetica Neue"/>
+                <a:ea typeface="Helvetica Neue"/>
+                <a:cs typeface="Helvetica Neue"/>
+              </a:defRPr>
+            </a:pPr>
+            <a:r>
+              <a:rPr sz="1200" b="0">
+                <a:solidFill>
+                  <a:srgbClr val="5B5B57"/>
+                </a:solidFill>
+                <a:latin typeface="Helvetica Neue"/>
+                <a:ea typeface="Helvetica Neue"/>
+                <a:cs typeface="Helvetica Neue"/>
+              </a:rPr>
+              <a:t>12</a:t>
+            </a:r>
+          </a:p>
+        </p:txBody>
+      </p:sp>
+      <p:sp>
+        <p:nvSpPr>
+          <p:cNvPr id="4" name="chapter-footer">
+            <a:extLst xmlns:a="http://schemas.openxmlformats.org/drawingml/2006/main">
+              <a:ext uri="{FF2B5EF4-FFF2-40B4-BE49-F238E27FC236}">
+                <a16:creationId xmlns:a16="http://schemas.microsoft.com/office/drawing/2014/main" id="{3EA448F6-CB8E-49DB-A7D0-B8121572DBDB}"/>
+              </a:ext>
+            </a:extLst>
+          </p:cNvPr>
+          <p:cNvSpPr>
+            <a:spLocks xmlns:a="http://schemas.openxmlformats.org/drawingml/2006/main" noGrp="1"/>
+          </p:cNvSpPr>
+          <p:nvPr/>
+        </p:nvSpPr>
+        <p:spPr>
+          <a:xfrm xmlns:a="http://schemas.openxmlformats.org/drawingml/2006/main">
+            <a:off x="390525" y="6286500"/>
+            <a:ext cx="8191500" cy="266700"/>
+          </a:xfrm>
+          <a:prstGeom xmlns:a="http://schemas.openxmlformats.org/drawingml/2006/main" prst="rect">
+            <a:avLst/>
+          </a:prstGeom>
+          <a:noFill xmlns:a="http://schemas.openxmlformats.org/drawingml/2006/main"/>
+          <a:ln xmlns:a="http://schemas.openxmlformats.org/drawingml/2006/main" w="0">
+            <a:noFill/>
+            <a:prstDash val="solid"/>
+          </a:ln>
+        </p:spPr>
+        <p:txBody>
+          <a:bodyPr xmlns:a="http://schemas.openxmlformats.org/drawingml/2006/main" anchor="t">
+            <a:noAutofit/>
+          </a:bodyPr>
+          <a:lstStyle xmlns:a="http://schemas.openxmlformats.org/drawingml/2006/main"/>
+          <a:p xmlns:a="http://schemas.openxmlformats.org/drawingml/2006/main">
+            <a:pPr algn="l">
+              <a:defRPr sz="1125" b="0">
+                <a:solidFill>
+                  <a:srgbClr val="5B5B57"/>
+                </a:solidFill>
+                <a:latin typeface="Helvetica Neue"/>
+                <a:ea typeface="Helvetica Neue"/>
+                <a:cs typeface="Helvetica Neue"/>
+              </a:defRPr>
+            </a:pPr>
+            <a:r>
+              <a:rPr sz="1125" b="0">
+                <a:solidFill>
+                  <a:srgbClr val="5B5B57"/>
+                </a:solidFill>
+                <a:latin typeface="Helvetica Neue"/>
+                <a:ea typeface="Helvetica Neue"/>
+                <a:cs typeface="Helvetica Neue"/>
+              </a:rPr>
+              <a:t>Production, Economics, and the Frontier</a:t>
+            </a:r>
+          </a:p>
+        </p:txBody>
+      </p:sp>
+      <p:sp>
+        <p:nvSpPr>
+          <p:cNvPr id="5" name="practice-title">
+            <a:extLst xmlns:a="http://schemas.openxmlformats.org/drawingml/2006/main">
+              <a:ext uri="{FF2B5EF4-FFF2-40B4-BE49-F238E27FC236}">
+                <a16:creationId xmlns:a16="http://schemas.microsoft.com/office/drawing/2014/main" id="{6C4D9359-1CDB-4093-9ACE-3DA4E237C24A}"/>
+              </a:ext>
+            </a:extLst>
+          </p:cNvPr>
+          <p:cNvSpPr>
+            <a:spLocks xmlns:a="http://schemas.openxmlformats.org/drawingml/2006/main" noGrp="1"/>
+          </p:cNvSpPr>
+          <p:nvPr/>
+        </p:nvSpPr>
+        <p:spPr>
+          <a:xfrm xmlns:a="http://schemas.openxmlformats.org/drawingml/2006/main">
+            <a:off x="390525" y="1000125"/>
+            <a:ext cx="11144250" cy="666750"/>
+          </a:xfrm>
+          <a:prstGeom xmlns:a="http://schemas.openxmlformats.org/drawingml/2006/main" prst="rect">
+            <a:avLst/>
+          </a:prstGeom>
+          <a:noFill xmlns:a="http://schemas.openxmlformats.org/drawingml/2006/main"/>
+          <a:ln xmlns:a="http://schemas.openxmlformats.org/drawingml/2006/main" w="0">
+            <a:noFill/>
+            <a:prstDash val="solid"/>
+          </a:ln>
+        </p:spPr>
+        <p:txBody>
+          <a:bodyPr xmlns:a="http://schemas.openxmlformats.org/drawingml/2006/main" anchor="t">
+            <a:normAutofit fontScale="100000"/>
+          </a:bodyPr>
+          <a:lstStyle xmlns:a="http://schemas.openxmlformats.org/drawingml/2006/main"/>
+          <a:p xmlns:a="http://schemas.openxmlformats.org/drawingml/2006/main">
+            <a:pPr algn="l">
+              <a:defRPr sz="3000" b="1">
+                <a:solidFill>
+                  <a:srgbClr val="111111"/>
+                </a:solidFill>
+                <a:latin typeface="Helvetica Neue"/>
+                <a:ea typeface="Helvetica Neue"/>
+                <a:cs typeface="Helvetica Neue"/>
+              </a:defRPr>
+            </a:pPr>
+            <a:r>
+              <a:rPr sz="3000" b="1">
+                <a:solidFill>
+                  <a:srgbClr val="111111"/>
+                </a:solidFill>
+                <a:latin typeface="Helvetica Neue"/>
+                <a:ea typeface="Helvetica Neue"/>
+                <a:cs typeface="Helvetica Neue"/>
+              </a:rPr>
+              <a:t>Evidence to submit</a:t>
+            </a:r>
+          </a:p>
+        </p:txBody>
+      </p:sp>
+      <p:sp>
+        <p:nvSpPr>
+          <p:cNvPr id="6" name="practice-task">
+            <a:extLst xmlns:a="http://schemas.openxmlformats.org/drawingml/2006/main">
+              <a:ext uri="{FF2B5EF4-FFF2-40B4-BE49-F238E27FC236}">
+                <a16:creationId xmlns:a16="http://schemas.microsoft.com/office/drawing/2014/main" id="{7E518C78-4751-4DC7-B880-FEBDC4C5C5C5}"/>
+              </a:ext>
+            </a:extLst>
+          </p:cNvPr>
+          <p:cNvSpPr>
+            <a:spLocks xmlns:a="http://schemas.openxmlformats.org/drawingml/2006/main" noGrp="1"/>
+          </p:cNvSpPr>
+          <p:nvPr/>
+        </p:nvSpPr>
+        <p:spPr>
+          <a:xfrm xmlns:a="http://schemas.openxmlformats.org/drawingml/2006/main">
+            <a:off x="390525" y="2000250"/>
+            <a:ext cx="10953750" cy="1238250"/>
+          </a:xfrm>
+          <a:prstGeom xmlns:a="http://schemas.openxmlformats.org/drawingml/2006/main" prst="rect">
+            <a:avLst/>
+          </a:prstGeom>
+          <a:noFill xmlns:a="http://schemas.openxmlformats.org/drawingml/2006/main"/>
+          <a:ln xmlns:a="http://schemas.openxmlformats.org/drawingml/2006/main" w="0">
+            <a:noFill/>
+            <a:prstDash val="solid"/>
+          </a:ln>
+        </p:spPr>
+        <p:txBody>
+          <a:bodyPr xmlns:a="http://schemas.openxmlformats.org/drawingml/2006/main" anchor="t">
+            <a:normAutofit fontScale="100000"/>
+          </a:bodyPr>
+          <a:lstStyle xmlns:a="http://schemas.openxmlformats.org/drawingml/2006/main"/>
+          <a:p xmlns:a="http://schemas.openxmlformats.org/drawingml/2006/main">
+            <a:pPr algn="l">
+              <a:defRPr sz="1950" b="0">
+                <a:solidFill>
+                  <a:srgbClr val="111111"/>
+                </a:solidFill>
+                <a:latin typeface="Helvetica Neue"/>
+                <a:ea typeface="Helvetica Neue"/>
+                <a:cs typeface="Helvetica Neue"/>
+              </a:defRPr>
+            </a:pPr>
+            <a:r>
+              <a:rPr sz="1950" b="0">
+                <a:solidFill>
+                  <a:srgbClr val="111111"/>
+                </a:solidFill>
+                <a:latin typeface="Helvetica Neue"/>
+                <a:ea typeface="Helvetica Neue"/>
+                <a:cs typeface="Helvetica Neue"/>
+              </a:rPr>
+              <a:t>Submit the capstone bundle: baseline, bounded agent, held-out evaluation, negative tests, and an operating note. Include a reproducible command and a maintenance owner.</a:t>
+            </a:r>
+          </a:p>
+        </p:txBody>
+      </p:sp>
+      <p:sp>
+        <p:nvSpPr>
+          <p:cNvPr id="7" name="practice-check">
+            <a:extLst xmlns:a="http://schemas.openxmlformats.org/drawingml/2006/main">
+              <a:ext uri="{FF2B5EF4-FFF2-40B4-BE49-F238E27FC236}">
+                <a16:creationId xmlns:a16="http://schemas.microsoft.com/office/drawing/2014/main" id="{753406A9-8392-4B83-9F32-87EE22A82F56}"/>
+              </a:ext>
+            </a:extLst>
+          </p:cNvPr>
+          <p:cNvSpPr>
+            <a:spLocks xmlns:a="http://schemas.openxmlformats.org/drawingml/2006/main" noGrp="1"/>
+          </p:cNvSpPr>
+          <p:nvPr/>
+        </p:nvSpPr>
+        <p:spPr>
+          <a:xfrm xmlns:a="http://schemas.openxmlformats.org/drawingml/2006/main">
+            <a:off x="390525" y="3381375"/>
+            <a:ext cx="10953750" cy="1095375"/>
+          </a:xfrm>
+          <a:prstGeom xmlns:a="http://schemas.openxmlformats.org/drawingml/2006/main" prst="rect">
+            <a:avLst/>
+          </a:prstGeom>
+          <a:noFill xmlns:a="http://schemas.openxmlformats.org/drawingml/2006/main"/>
+          <a:ln xmlns:a="http://schemas.openxmlformats.org/drawingml/2006/main" w="0">
+            <a:noFill/>
+            <a:prstDash val="solid"/>
+          </a:ln>
+        </p:spPr>
+        <p:txBody>
+          <a:bodyPr xmlns:a="http://schemas.openxmlformats.org/drawingml/2006/main" anchor="t">
+            <a:normAutofit fontScale="100000"/>
+          </a:bodyPr>
+          <a:lstStyle xmlns:a="http://schemas.openxmlformats.org/drawingml/2006/main"/>
+          <a:p xmlns:a="http://schemas.openxmlformats.org/drawingml/2006/main">
+            <a:pPr algn="l">
+              <a:defRPr sz="1800" b="0">
+                <a:solidFill>
+                  <a:srgbClr val="5B5B57"/>
+                </a:solidFill>
+                <a:latin typeface="Helvetica Neue"/>
+                <a:ea typeface="Helvetica Neue"/>
+                <a:cs typeface="Helvetica Neue"/>
+              </a:defRPr>
+            </a:pPr>
+            <a:r>
+              <a:rPr sz="1800" b="0">
+                <a:solidFill>
+                  <a:srgbClr val="5B5B57"/>
+                </a:solidFill>
+                <a:latin typeface="Helvetica Neue"/>
+                <a:ea typeface="Helvetica Neue"/>
+                <a:cs typeface="Helvetica Neue"/>
+              </a:rPr>
+              <a:t>The reviewer can rerun the bundle in a fresh environment and trace each conclusion to saved evidence. Follow teaching/CAPSTONE.md for the rubric.</a:t>
+            </a:r>
+          </a:p>
+        </p:txBody>
+      </p:sp>
+      <p:sp>
+        <p:nvSpPr>
+          <p:cNvPr id="8" name="practice-readings">
+            <a:extLst xmlns:a="http://schemas.openxmlformats.org/drawingml/2006/main">
+              <a:ext uri="{FF2B5EF4-FFF2-40B4-BE49-F238E27FC236}">
+                <a16:creationId xmlns:a16="http://schemas.microsoft.com/office/drawing/2014/main" id="{0E63EB62-03A2-4D7A-9712-E00C13227199}"/>
+              </a:ext>
+            </a:extLst>
+          </p:cNvPr>
+          <p:cNvSpPr>
+            <a:spLocks xmlns:a="http://schemas.openxmlformats.org/drawingml/2006/main" noGrp="1"/>
+          </p:cNvSpPr>
+          <p:nvPr/>
+        </p:nvSpPr>
+        <p:spPr>
+          <a:xfrm xmlns:a="http://schemas.openxmlformats.org/drawingml/2006/main">
+            <a:off x="390525" y="4667250"/>
+            <a:ext cx="10953750" cy="1000125"/>
+          </a:xfrm>
+          <a:prstGeom xmlns:a="http://schemas.openxmlformats.org/drawingml/2006/main" prst="rect">
+            <a:avLst/>
+          </a:prstGeom>
+          <a:noFill xmlns:a="http://schemas.openxmlformats.org/drawingml/2006/main"/>
+          <a:ln xmlns:a="http://schemas.openxmlformats.org/drawingml/2006/main" w="0">
+            <a:noFill/>
+            <a:prstDash val="solid"/>
+          </a:ln>
+        </p:spPr>
+        <p:txBody>
+          <a:bodyPr xmlns:a="http://schemas.openxmlformats.org/drawingml/2006/main" anchor="t">
+            <a:normAutofit fontScale="100000"/>
+          </a:bodyPr>
+          <a:lstStyle xmlns:a="http://schemas.openxmlformats.org/drawingml/2006/main"/>
+          <a:p xmlns:a="http://schemas.openxmlformats.org/drawingml/2006/main">
+            <a:pPr algn="l">
+              <a:defRPr sz="1425" b="0">
+                <a:solidFill>
+                  <a:srgbClr val="111111"/>
+                </a:solidFill>
+                <a:latin typeface="Helvetica Neue"/>
+                <a:ea typeface="Helvetica Neue"/>
+                <a:cs typeface="Helvetica Neue"/>
+              </a:defRPr>
+            </a:pPr>
+            <a:r>
+              <a:rPr sz="1425" b="0">
+                <a:solidFill>
+                  <a:srgbClr val="111111"/>
+                </a:solidFill>
+                <a:latin typeface="Helvetica Neue"/>
+                <a:ea typeface="Helvetica Neue"/>
+                <a:cs typeface="Helvetica Neue"/>
+              </a:rPr>
+              <a:t>P2  Scientific computing in the age of agentic AI</a:t>
+            </a:r>
+          </a:p>
+          <a:p xmlns:a="http://schemas.openxmlformats.org/drawingml/2006/main">
+            <a:pPr algn="l">
+              <a:defRPr sz="1425" b="0">
+                <a:solidFill>
+                  <a:srgbClr val="111111"/>
+                </a:solidFill>
+                <a:latin typeface="Helvetica Neue"/>
+                <a:ea typeface="Helvetica Neue"/>
+                <a:cs typeface="Helvetica Neue"/>
+              </a:defRPr>
+            </a:pPr>
+            <a:r>
+              <a:rPr sz="1425" b="0">
+                <a:solidFill>
+                  <a:srgbClr val="111111"/>
+                </a:solidFill>
+                <a:latin typeface="Helvetica Neue"/>
+                <a:ea typeface="Helvetica Neue"/>
+                <a:cs typeface="Helvetica Neue"/>
+              </a:rPr>
+              <a:t>R3  Research acceleration: The view inside OpenAI</a:t>
+            </a:r>
+          </a:p>
+        </p:txBody>
+      </p:sp>
+      <p:sp>
+        <p:nvSpPr>
+          <p:cNvPr id="9" name="practice-lab">
+            <a:extLst xmlns:a="http://schemas.openxmlformats.org/drawingml/2006/main">
+              <a:ext uri="{FF2B5EF4-FFF2-40B4-BE49-F238E27FC236}">
+                <a16:creationId xmlns:a16="http://schemas.microsoft.com/office/drawing/2014/main" id="{863D780F-97AC-4BA4-B914-9AA9BA384960}"/>
+              </a:ext>
+            </a:extLst>
+          </p:cNvPr>
+          <p:cNvSpPr>
+            <a:spLocks xmlns:a="http://schemas.openxmlformats.org/drawingml/2006/main" noGrp="1"/>
+          </p:cNvSpPr>
+          <p:nvPr/>
+        </p:nvSpPr>
+        <p:spPr>
+          <a:xfrm xmlns:a="http://schemas.openxmlformats.org/drawingml/2006/main">
+            <a:off x="390525" y="5857875"/>
+            <a:ext cx="10953750" cy="266700"/>
+          </a:xfrm>
+          <a:prstGeom xmlns:a="http://schemas.openxmlformats.org/drawingml/2006/main" prst="rect">
+            <a:avLst/>
+          </a:prstGeom>
+          <a:noFill xmlns:a="http://schemas.openxmlformats.org/drawingml/2006/main"/>
+          <a:ln xmlns:a="http://schemas.openxmlformats.org/drawingml/2006/main" w="0">
+            <a:noFill/>
+            <a:prstDash val="solid"/>
+          </a:ln>
+        </p:spPr>
+        <p:txBody>
+          <a:bodyPr xmlns:a="http://schemas.openxmlformats.org/drawingml/2006/main" anchor="t">
+            <a:normAutofit fontScale="90196"/>
+          </a:bodyPr>
+          <a:lstStyle xmlns:a="http://schemas.openxmlformats.org/drawingml/2006/main"/>
+          <a:p xmlns:a="http://schemas.openxmlformats.org/drawingml/2006/main">
+            <a:pPr algn="l">
+              <a:defRPr sz="1275" b="0">
+                <a:solidFill>
+                  <a:srgbClr val="5B5B57"/>
+                </a:solidFill>
+                <a:latin typeface="Helvetica Neue"/>
+                <a:ea typeface="Helvetica Neue"/>
+                <a:cs typeface="Helvetica Neue"/>
+              </a:defRPr>
+            </a:pPr>
+            <a:r>
+              <a:rPr sz="1275" b="0">
+                <a:solidFill>
+                  <a:srgbClr val="5B5B57"/>
+                </a:solidFill>
+                <a:latin typeface="Helvetica Neue"/>
+                <a:ea typeface="Helvetica Neue"/>
+                <a:cs typeface="Helvetica Neue"/>
+              </a:rPr>
+              <a:t>labs/08_langgraph_approval_security.ipynb</a:t>
+            </a:r>
+          </a:p>
+        </p:txBody>
+      </p:sp>
+    </p:spTree>
+    <p:extLst>
+      <p:ext uri="{BB962C8B-B14F-4D97-AF65-F5344CB8AC3E}">
+        <p14:creationId xmlns:p14="http://schemas.microsoft.com/office/powerpoint/2010/main" val="1874698527"/>
       </p:ext>
     </p:extLst>
   </p:cSld>
@@ -3016,7 +5267,7 @@
           <p:cNvPr id="14" name="accent-line">
             <a:extLst xmlns:a="http://schemas.openxmlformats.org/drawingml/2006/main">
               <a:ext uri="{FF2B5EF4-FFF2-40B4-BE49-F238E27FC236}">
-                <a16:creationId xmlns:a16="http://schemas.microsoft.com/office/drawing/2014/main" id="{300CC607-3D2C-4641-AB00-D177C8A9A0B6}"/>
+                <a16:creationId xmlns:a16="http://schemas.microsoft.com/office/drawing/2014/main" id="{ABA3DC2C-DF3E-41FB-ADD9-151C5315E360}"/>
               </a:ext>
             </a:extLst>
           </p:cNvPr>
@@ -3049,7 +5300,7 @@
           <p:cNvPr id="2" name="chapter-label">
             <a:extLst xmlns:a="http://schemas.openxmlformats.org/drawingml/2006/main">
               <a:ext uri="{FF2B5EF4-FFF2-40B4-BE49-F238E27FC236}">
-                <a16:creationId xmlns:a16="http://schemas.microsoft.com/office/drawing/2014/main" id="{49B7AE29-8DFA-49CF-A8CB-8B7BB70127A4}"/>
+                <a16:creationId xmlns:a16="http://schemas.microsoft.com/office/drawing/2014/main" id="{4913370C-1633-40F0-B674-28775E0CC705}"/>
               </a:ext>
             </a:extLst>
           </p:cNvPr>
@@ -3107,7 +5358,7 @@
           <p:cNvPr id="3" name="slide-number">
             <a:extLst xmlns:a="http://schemas.openxmlformats.org/drawingml/2006/main">
               <a:ext uri="{FF2B5EF4-FFF2-40B4-BE49-F238E27FC236}">
-                <a16:creationId xmlns:a16="http://schemas.microsoft.com/office/drawing/2014/main" id="{651B2DE0-83D7-48D7-8866-6AF0CD3CFDE7}"/>
+                <a16:creationId xmlns:a16="http://schemas.microsoft.com/office/drawing/2014/main" id="{4E54BF3B-F70B-4450-BE32-A75DB76C8E65}"/>
               </a:ext>
             </a:extLst>
           </p:cNvPr>
@@ -3165,7 +5416,7 @@
           <p:cNvPr id="4" name="chapter-footer">
             <a:extLst xmlns:a="http://schemas.openxmlformats.org/drawingml/2006/main">
               <a:ext uri="{FF2B5EF4-FFF2-40B4-BE49-F238E27FC236}">
-                <a16:creationId xmlns:a16="http://schemas.microsoft.com/office/drawing/2014/main" id="{5EF75657-C716-4A4B-957C-C790F16B3F11}"/>
+                <a16:creationId xmlns:a16="http://schemas.microsoft.com/office/drawing/2014/main" id="{79987DEF-19AE-4270-9C51-B29D66F67861}"/>
               </a:ext>
             </a:extLst>
           </p:cNvPr>
@@ -3223,7 +5474,7 @@
           <p:cNvPr id="5" name="objectives-title">
             <a:extLst xmlns:a="http://schemas.openxmlformats.org/drawingml/2006/main">
               <a:ext uri="{FF2B5EF4-FFF2-40B4-BE49-F238E27FC236}">
-                <a16:creationId xmlns:a16="http://schemas.microsoft.com/office/drawing/2014/main" id="{5602E511-23F0-47F5-96D5-498092858B51}"/>
+                <a16:creationId xmlns:a16="http://schemas.microsoft.com/office/drawing/2014/main" id="{C1330A31-5055-4F36-8E27-D54E1F292F3F}"/>
               </a:ext>
             </a:extLst>
           </p:cNvPr>
@@ -3281,7 +5532,7 @@
           <p:cNvPr id="6" name="objective-number-1">
             <a:extLst xmlns:a="http://schemas.openxmlformats.org/drawingml/2006/main">
               <a:ext uri="{FF2B5EF4-FFF2-40B4-BE49-F238E27FC236}">
-                <a16:creationId xmlns:a16="http://schemas.microsoft.com/office/drawing/2014/main" id="{443A0FB5-D9AE-4FFD-8EC5-EA9BDD263D97}"/>
+                <a16:creationId xmlns:a16="http://schemas.microsoft.com/office/drawing/2014/main" id="{BA18754B-1042-45AE-9970-8ABEB005A53C}"/>
               </a:ext>
             </a:extLst>
           </p:cNvPr>
@@ -3339,7 +5590,7 @@
           <p:cNvPr id="7" name="objective-1">
             <a:extLst xmlns:a="http://schemas.openxmlformats.org/drawingml/2006/main">
               <a:ext uri="{FF2B5EF4-FFF2-40B4-BE49-F238E27FC236}">
-                <a16:creationId xmlns:a16="http://schemas.microsoft.com/office/drawing/2014/main" id="{810C63FA-9DB9-4B81-A5D3-31A31C15767F}"/>
+                <a16:creationId xmlns:a16="http://schemas.microsoft.com/office/drawing/2014/main" id="{B5D4118D-985A-4A9D-B8A7-87B70EDC52BD}"/>
               </a:ext>
             </a:extLst>
           </p:cNvPr>
@@ -3397,7 +5648,7 @@
           <p:cNvPr id="8" name="objective-number-2">
             <a:extLst xmlns:a="http://schemas.openxmlformats.org/drawingml/2006/main">
               <a:ext uri="{FF2B5EF4-FFF2-40B4-BE49-F238E27FC236}">
-                <a16:creationId xmlns:a16="http://schemas.microsoft.com/office/drawing/2014/main" id="{B2EADD71-EB08-4324-98AF-DDEA958BF8AA}"/>
+                <a16:creationId xmlns:a16="http://schemas.microsoft.com/office/drawing/2014/main" id="{62DC1BE1-F2B7-46AF-86EA-D707BB9FBE65}"/>
               </a:ext>
             </a:extLst>
           </p:cNvPr>
@@ -3455,7 +5706,7 @@
           <p:cNvPr id="9" name="objective-2">
             <a:extLst xmlns:a="http://schemas.openxmlformats.org/drawingml/2006/main">
               <a:ext uri="{FF2B5EF4-FFF2-40B4-BE49-F238E27FC236}">
-                <a16:creationId xmlns:a16="http://schemas.microsoft.com/office/drawing/2014/main" id="{632F81A3-0540-412A-9632-1EA337A349E4}"/>
+                <a16:creationId xmlns:a16="http://schemas.microsoft.com/office/drawing/2014/main" id="{1A92A5E3-7E6F-4312-950A-EF127A8F5F96}"/>
               </a:ext>
             </a:extLst>
           </p:cNvPr>
@@ -3513,7 +5764,7 @@
           <p:cNvPr id="10" name="objective-number-3">
             <a:extLst xmlns:a="http://schemas.openxmlformats.org/drawingml/2006/main">
               <a:ext uri="{FF2B5EF4-FFF2-40B4-BE49-F238E27FC236}">
-                <a16:creationId xmlns:a16="http://schemas.microsoft.com/office/drawing/2014/main" id="{AFA9E0B9-55FE-4F51-9FF6-1DB7BC124710}"/>
+                <a16:creationId xmlns:a16="http://schemas.microsoft.com/office/drawing/2014/main" id="{E3AEC8CD-E4A0-40AA-9D67-77F043C96871}"/>
               </a:ext>
             </a:extLst>
           </p:cNvPr>
@@ -3571,7 +5822,7 @@
           <p:cNvPr id="11" name="objective-3">
             <a:extLst xmlns:a="http://schemas.openxmlformats.org/drawingml/2006/main">
               <a:ext uri="{FF2B5EF4-FFF2-40B4-BE49-F238E27FC236}">
-                <a16:creationId xmlns:a16="http://schemas.microsoft.com/office/drawing/2014/main" id="{BB45F344-7515-428C-BC9F-4FA766C040C8}"/>
+                <a16:creationId xmlns:a16="http://schemas.microsoft.com/office/drawing/2014/main" id="{085D5C43-3AD6-4FAE-B2E3-35061752CB2A}"/>
               </a:ext>
             </a:extLst>
           </p:cNvPr>
@@ -3629,7 +5880,7 @@
           <p:cNvPr id="12" name="objective-number-4">
             <a:extLst xmlns:a="http://schemas.openxmlformats.org/drawingml/2006/main">
               <a:ext uri="{FF2B5EF4-FFF2-40B4-BE49-F238E27FC236}">
-                <a16:creationId xmlns:a16="http://schemas.microsoft.com/office/drawing/2014/main" id="{D64DF381-F2E5-4CE0-91CD-575C23A20F79}"/>
+                <a16:creationId xmlns:a16="http://schemas.microsoft.com/office/drawing/2014/main" id="{143C1D77-BA00-4D8D-82DC-41F4DF4D3309}"/>
               </a:ext>
             </a:extLst>
           </p:cNvPr>
@@ -3687,7 +5938,7 @@
           <p:cNvPr id="13" name="objective-4">
             <a:extLst xmlns:a="http://schemas.openxmlformats.org/drawingml/2006/main">
               <a:ext uri="{FF2B5EF4-FFF2-40B4-BE49-F238E27FC236}">
-                <a16:creationId xmlns:a16="http://schemas.microsoft.com/office/drawing/2014/main" id="{1777CF9D-B751-4044-8955-1A36F5198C4E}"/>
+                <a16:creationId xmlns:a16="http://schemas.microsoft.com/office/drawing/2014/main" id="{6F69B83E-A82E-40EC-A397-380B799BA3E6}"/>
               </a:ext>
             </a:extLst>
           </p:cNvPr>
@@ -3743,7 +5994,7 @@
     </p:spTree>
     <p:extLst>
       <p:ext uri="{BB962C8B-B14F-4D97-AF65-F5344CB8AC3E}">
-        <p14:creationId xmlns:p14="http://schemas.microsoft.com/office/powerpoint/2010/main" val="2047273187"/>
+        <p14:creationId xmlns:p14="http://schemas.microsoft.com/office/powerpoint/2010/main" val="2088178574"/>
       </p:ext>
     </p:extLst>
   </p:cSld>
@@ -3774,7 +6025,7 @@
           <p:cNvPr id="9" name="accent-line">
             <a:extLst xmlns:a="http://schemas.openxmlformats.org/drawingml/2006/main">
               <a:ext uri="{FF2B5EF4-FFF2-40B4-BE49-F238E27FC236}">
-                <a16:creationId xmlns:a16="http://schemas.microsoft.com/office/drawing/2014/main" id="{2CF635F3-9173-4128-8001-D80FFEC24705}"/>
+                <a16:creationId xmlns:a16="http://schemas.microsoft.com/office/drawing/2014/main" id="{9CA2BE56-78EF-4E1D-BCCB-ED4365D34777}"/>
               </a:ext>
             </a:extLst>
           </p:cNvPr>
@@ -3807,7 +6058,7 @@
           <p:cNvPr id="2" name="chapter-label">
             <a:extLst xmlns:a="http://schemas.openxmlformats.org/drawingml/2006/main">
               <a:ext uri="{FF2B5EF4-FFF2-40B4-BE49-F238E27FC236}">
-                <a16:creationId xmlns:a16="http://schemas.microsoft.com/office/drawing/2014/main" id="{443FDA8D-A7A2-4BF4-9759-F73D3CE9358D}"/>
+                <a16:creationId xmlns:a16="http://schemas.microsoft.com/office/drawing/2014/main" id="{7A583A5E-315D-4228-9C02-4BC851599287}"/>
               </a:ext>
             </a:extLst>
           </p:cNvPr>
@@ -3865,7 +6116,7 @@
           <p:cNvPr id="3" name="slide-number">
             <a:extLst xmlns:a="http://schemas.openxmlformats.org/drawingml/2006/main">
               <a:ext uri="{FF2B5EF4-FFF2-40B4-BE49-F238E27FC236}">
-                <a16:creationId xmlns:a16="http://schemas.microsoft.com/office/drawing/2014/main" id="{CACA28BA-80B9-4377-B1D0-5BDB99D237F1}"/>
+                <a16:creationId xmlns:a16="http://schemas.microsoft.com/office/drawing/2014/main" id="{8999FEAC-FB22-447C-9A1A-43A422BE4C29}"/>
               </a:ext>
             </a:extLst>
           </p:cNvPr>
@@ -3923,7 +6174,7 @@
           <p:cNvPr id="4" name="chapter-footer">
             <a:extLst xmlns:a="http://schemas.openxmlformats.org/drawingml/2006/main">
               <a:ext uri="{FF2B5EF4-FFF2-40B4-BE49-F238E27FC236}">
-                <a16:creationId xmlns:a16="http://schemas.microsoft.com/office/drawing/2014/main" id="{686729E9-B1B7-45D7-90E6-E564C6150DD3}"/>
+                <a16:creationId xmlns:a16="http://schemas.microsoft.com/office/drawing/2014/main" id="{B0017B25-03F2-41CC-969E-B57CE160680C}"/>
               </a:ext>
             </a:extLst>
           </p:cNvPr>
@@ -3981,7 +6232,7 @@
           <p:cNvPr id="5" name="section-title">
             <a:extLst xmlns:a="http://schemas.openxmlformats.org/drawingml/2006/main">
               <a:ext uri="{FF2B5EF4-FFF2-40B4-BE49-F238E27FC236}">
-                <a16:creationId xmlns:a16="http://schemas.microsoft.com/office/drawing/2014/main" id="{44642307-5858-454D-ADAA-6C07E319F609}"/>
+                <a16:creationId xmlns:a16="http://schemas.microsoft.com/office/drawing/2014/main" id="{CD3E6542-02AC-4948-9303-5950485D03DC}"/>
               </a:ext>
             </a:extLst>
           </p:cNvPr>
@@ -4039,7 +6290,7 @@
           <p:cNvPr id="6" name="section-explanation">
             <a:extLst xmlns:a="http://schemas.openxmlformats.org/drawingml/2006/main">
               <a:ext uri="{FF2B5EF4-FFF2-40B4-BE49-F238E27FC236}">
-                <a16:creationId xmlns:a16="http://schemas.microsoft.com/office/drawing/2014/main" id="{8020AAB2-B78C-458C-8992-07BB862D1E46}"/>
+                <a16:creationId xmlns:a16="http://schemas.microsoft.com/office/drawing/2014/main" id="{3A91B609-F824-4F2B-9D00-FDBA3998B78D}"/>
               </a:ext>
             </a:extLst>
           </p:cNvPr>
@@ -4097,7 +6348,7 @@
           <p:cNvPr id="7" name="column-rule">
             <a:extLst xmlns:a="http://schemas.openxmlformats.org/drawingml/2006/main">
               <a:ext uri="{FF2B5EF4-FFF2-40B4-BE49-F238E27FC236}">
-                <a16:creationId xmlns:a16="http://schemas.microsoft.com/office/drawing/2014/main" id="{17037E36-F7B2-4FCD-A044-8A0CC6DC6614}"/>
+                <a16:creationId xmlns:a16="http://schemas.microsoft.com/office/drawing/2014/main" id="{0495CDAA-8174-462B-A428-8E06011C2EEF}"/>
               </a:ext>
             </a:extLst>
           </p:cNvPr>
@@ -4130,7 +6381,7 @@
           <p:cNvPr id="8" name="section-points">
             <a:extLst xmlns:a="http://schemas.openxmlformats.org/drawingml/2006/main">
               <a:ext uri="{FF2B5EF4-FFF2-40B4-BE49-F238E27FC236}">
-                <a16:creationId xmlns:a16="http://schemas.microsoft.com/office/drawing/2014/main" id="{B069E51B-00C4-43DF-8C24-6B3C34C0D710}"/>
+                <a16:creationId xmlns:a16="http://schemas.microsoft.com/office/drawing/2014/main" id="{03E97D4B-77CB-4D57-8C9B-D449006A6EA8}"/>
               </a:ext>
             </a:extLst>
           </p:cNvPr>
@@ -4234,7 +6485,7 @@
                 <a:ea typeface="Helvetica Neue"/>
                 <a:cs typeface="Helvetica Neue"/>
               </a:rPr>
-              <a:t>03  Most engineering effort surrounds the model.</a:t>
+              <a:t>03  The runtime, tools, and operating process need their own tests.</a:t>
             </a:r>
           </a:p>
         </p:txBody>
@@ -4242,7 +6493,7 @@
     </p:spTree>
     <p:extLst>
       <p:ext uri="{BB962C8B-B14F-4D97-AF65-F5344CB8AC3E}">
-        <p14:creationId xmlns:p14="http://schemas.microsoft.com/office/powerpoint/2010/main" val="1698518085"/>
+        <p14:creationId xmlns:p14="http://schemas.microsoft.com/office/powerpoint/2010/main" val="2037536940"/>
       </p:ext>
     </p:extLst>
   </p:cSld>
@@ -4273,7 +6524,7 @@
           <p:cNvPr id="15" name="accent-line">
             <a:extLst xmlns:a="http://schemas.openxmlformats.org/drawingml/2006/main">
               <a:ext uri="{FF2B5EF4-FFF2-40B4-BE49-F238E27FC236}">
-                <a16:creationId xmlns:a16="http://schemas.microsoft.com/office/drawing/2014/main" id="{4125708B-EFA3-4637-9A28-51DBFE4EDB5E}"/>
+                <a16:creationId xmlns:a16="http://schemas.microsoft.com/office/drawing/2014/main" id="{9C7227E3-54FE-4AAB-9C78-1B78ECF9CA01}"/>
               </a:ext>
             </a:extLst>
           </p:cNvPr>
@@ -4306,7 +6557,7 @@
           <p:cNvPr id="2" name="chapter-label">
             <a:extLst xmlns:a="http://schemas.openxmlformats.org/drawingml/2006/main">
               <a:ext uri="{FF2B5EF4-FFF2-40B4-BE49-F238E27FC236}">
-                <a16:creationId xmlns:a16="http://schemas.microsoft.com/office/drawing/2014/main" id="{2300D288-F6FE-4144-AF97-D9C791D213ED}"/>
+                <a16:creationId xmlns:a16="http://schemas.microsoft.com/office/drawing/2014/main" id="{3B75ACA8-E942-401D-9675-B1B6B5AE31F2}"/>
               </a:ext>
             </a:extLst>
           </p:cNvPr>
@@ -4364,7 +6615,7 @@
           <p:cNvPr id="3" name="slide-number">
             <a:extLst xmlns:a="http://schemas.openxmlformats.org/drawingml/2006/main">
               <a:ext uri="{FF2B5EF4-FFF2-40B4-BE49-F238E27FC236}">
-                <a16:creationId xmlns:a16="http://schemas.microsoft.com/office/drawing/2014/main" id="{5BF50E8E-1759-4C92-B3FC-3F55AA764BEC}"/>
+                <a16:creationId xmlns:a16="http://schemas.microsoft.com/office/drawing/2014/main" id="{49C8CA23-E9F8-4B75-80F9-E430814F707E}"/>
               </a:ext>
             </a:extLst>
           </p:cNvPr>
@@ -4422,7 +6673,7 @@
           <p:cNvPr id="4" name="chapter-footer">
             <a:extLst xmlns:a="http://schemas.openxmlformats.org/drawingml/2006/main">
               <a:ext uri="{FF2B5EF4-FFF2-40B4-BE49-F238E27FC236}">
-                <a16:creationId xmlns:a16="http://schemas.microsoft.com/office/drawing/2014/main" id="{2E606FAA-5FB3-4B13-BEFA-1BED999A8E0E}"/>
+                <a16:creationId xmlns:a16="http://schemas.microsoft.com/office/drawing/2014/main" id="{70B39274-471E-49EF-B004-679168B8E7B2}"/>
               </a:ext>
             </a:extLst>
           </p:cNvPr>
@@ -4480,7 +6731,7 @@
           <p:cNvPr id="5" name="section-title">
             <a:extLst xmlns:a="http://schemas.openxmlformats.org/drawingml/2006/main">
               <a:ext uri="{FF2B5EF4-FFF2-40B4-BE49-F238E27FC236}">
-                <a16:creationId xmlns:a16="http://schemas.microsoft.com/office/drawing/2014/main" id="{67FC9D14-7B95-46E6-B4AC-B1399309FC69}"/>
+                <a16:creationId xmlns:a16="http://schemas.microsoft.com/office/drawing/2014/main" id="{C146B593-248E-4DEC-AB48-D7BCF89971C3}"/>
               </a:ext>
             </a:extLst>
           </p:cNvPr>
@@ -4538,7 +6789,7 @@
           <p:cNvPr id="6" name="section-explanation">
             <a:extLst xmlns:a="http://schemas.openxmlformats.org/drawingml/2006/main">
               <a:ext uri="{FF2B5EF4-FFF2-40B4-BE49-F238E27FC236}">
-                <a16:creationId xmlns:a16="http://schemas.microsoft.com/office/drawing/2014/main" id="{72EC1C1B-0E9B-4E09-8D49-EB4F2030F46E}"/>
+                <a16:creationId xmlns:a16="http://schemas.microsoft.com/office/drawing/2014/main" id="{C518C5FD-AA53-4B56-B492-4B3F5563BF37}"/>
               </a:ext>
             </a:extLst>
           </p:cNvPr>
@@ -4596,7 +6847,7 @@
           <p:cNvPr id="7" name="point-band-1">
             <a:extLst xmlns:a="http://schemas.openxmlformats.org/drawingml/2006/main">
               <a:ext uri="{FF2B5EF4-FFF2-40B4-BE49-F238E27FC236}">
-                <a16:creationId xmlns:a16="http://schemas.microsoft.com/office/drawing/2014/main" id="{AA3EE2F6-A005-4AE7-80C3-C9203CDC5256}"/>
+                <a16:creationId xmlns:a16="http://schemas.microsoft.com/office/drawing/2014/main" id="{6FD23A95-1E64-45CB-8E8A-77D082FBC3F6}"/>
               </a:ext>
             </a:extLst>
           </p:cNvPr>
@@ -4629,7 +6880,7 @@
           <p:cNvPr id="8" name="point-1">
             <a:extLst xmlns:a="http://schemas.openxmlformats.org/drawingml/2006/main">
               <a:ext uri="{FF2B5EF4-FFF2-40B4-BE49-F238E27FC236}">
-                <a16:creationId xmlns:a16="http://schemas.microsoft.com/office/drawing/2014/main" id="{C00FE844-B5D7-4A5D-B02F-2BA768CFC222}"/>
+                <a16:creationId xmlns:a16="http://schemas.microsoft.com/office/drawing/2014/main" id="{10036453-E265-482D-82EF-5C92234F2224}"/>
               </a:ext>
             </a:extLst>
           </p:cNvPr>
@@ -4687,7 +6938,7 @@
           <p:cNvPr id="9" name="point-band-2">
             <a:extLst xmlns:a="http://schemas.openxmlformats.org/drawingml/2006/main">
               <a:ext uri="{FF2B5EF4-FFF2-40B4-BE49-F238E27FC236}">
-                <a16:creationId xmlns:a16="http://schemas.microsoft.com/office/drawing/2014/main" id="{19FB87C3-2DA9-4EAA-B8EB-44F1810BF2A3}"/>
+                <a16:creationId xmlns:a16="http://schemas.microsoft.com/office/drawing/2014/main" id="{A3B55172-ABF9-49F3-91DE-E6F9934C3AE4}"/>
               </a:ext>
             </a:extLst>
           </p:cNvPr>
@@ -4720,7 +6971,7 @@
           <p:cNvPr id="10" name="point-2">
             <a:extLst xmlns:a="http://schemas.openxmlformats.org/drawingml/2006/main">
               <a:ext uri="{FF2B5EF4-FFF2-40B4-BE49-F238E27FC236}">
-                <a16:creationId xmlns:a16="http://schemas.microsoft.com/office/drawing/2014/main" id="{6D57EAB7-8FFD-4F7E-8FDD-5F3FB42C3255}"/>
+                <a16:creationId xmlns:a16="http://schemas.microsoft.com/office/drawing/2014/main" id="{939C83E6-C2F5-4C83-9249-6219D78D14C9}"/>
               </a:ext>
             </a:extLst>
           </p:cNvPr>
@@ -4778,7 +7029,7 @@
           <p:cNvPr id="11" name="point-band-3">
             <a:extLst xmlns:a="http://schemas.openxmlformats.org/drawingml/2006/main">
               <a:ext uri="{FF2B5EF4-FFF2-40B4-BE49-F238E27FC236}">
-                <a16:creationId xmlns:a16="http://schemas.microsoft.com/office/drawing/2014/main" id="{6AA6CFA8-739A-481D-ACAE-4E65B9F53248}"/>
+                <a16:creationId xmlns:a16="http://schemas.microsoft.com/office/drawing/2014/main" id="{F3990590-60B5-4928-B11A-B5E58E9B5D9E}"/>
               </a:ext>
             </a:extLst>
           </p:cNvPr>
@@ -4811,7 +7062,7 @@
           <p:cNvPr id="12" name="point-3">
             <a:extLst xmlns:a="http://schemas.openxmlformats.org/drawingml/2006/main">
               <a:ext uri="{FF2B5EF4-FFF2-40B4-BE49-F238E27FC236}">
-                <a16:creationId xmlns:a16="http://schemas.microsoft.com/office/drawing/2014/main" id="{3E4D2427-503C-4CD8-8D4E-7F0220BC0BDE}"/>
+                <a16:creationId xmlns:a16="http://schemas.microsoft.com/office/drawing/2014/main" id="{83ED0F2A-B106-47C1-806C-431D2A67643E}"/>
               </a:ext>
             </a:extLst>
           </p:cNvPr>
@@ -4869,7 +7120,7 @@
           <p:cNvPr id="13" name="point-band-4">
             <a:extLst xmlns:a="http://schemas.openxmlformats.org/drawingml/2006/main">
               <a:ext uri="{FF2B5EF4-FFF2-40B4-BE49-F238E27FC236}">
-                <a16:creationId xmlns:a16="http://schemas.microsoft.com/office/drawing/2014/main" id="{BEE8163C-47A4-4749-9EE4-6FC7FD20B89F}"/>
+                <a16:creationId xmlns:a16="http://schemas.microsoft.com/office/drawing/2014/main" id="{7A0D1813-2071-4A1A-95A6-F9409268A792}"/>
               </a:ext>
             </a:extLst>
           </p:cNvPr>
@@ -4902,7 +7153,7 @@
           <p:cNvPr id="14" name="point-4">
             <a:extLst xmlns:a="http://schemas.openxmlformats.org/drawingml/2006/main">
               <a:ext uri="{FF2B5EF4-FFF2-40B4-BE49-F238E27FC236}">
-                <a16:creationId xmlns:a16="http://schemas.microsoft.com/office/drawing/2014/main" id="{247C8390-247F-4719-8778-FB48D6B21D57}"/>
+                <a16:creationId xmlns:a16="http://schemas.microsoft.com/office/drawing/2014/main" id="{62CB9F1B-5123-4327-8DEB-BD3ABD6E7F24}"/>
               </a:ext>
             </a:extLst>
           </p:cNvPr>
@@ -4958,7 +7209,7 @@
     </p:spTree>
     <p:extLst>
       <p:ext uri="{BB962C8B-B14F-4D97-AF65-F5344CB8AC3E}">
-        <p14:creationId xmlns:p14="http://schemas.microsoft.com/office/powerpoint/2010/main" val="1361200283"/>
+        <p14:creationId xmlns:p14="http://schemas.microsoft.com/office/powerpoint/2010/main" val="2089005042"/>
       </p:ext>
     </p:extLst>
   </p:cSld>
@@ -4989,7 +7240,7 @@
           <p:cNvPr id="9" name="accent-line">
             <a:extLst xmlns:a="http://schemas.openxmlformats.org/drawingml/2006/main">
               <a:ext uri="{FF2B5EF4-FFF2-40B4-BE49-F238E27FC236}">
-                <a16:creationId xmlns:a16="http://schemas.microsoft.com/office/drawing/2014/main" id="{91401530-FF31-4C1A-B8BC-A9329D275831}"/>
+                <a16:creationId xmlns:a16="http://schemas.microsoft.com/office/drawing/2014/main" id="{6314C43E-926F-4094-BEF4-ECBC9AFF784A}"/>
               </a:ext>
             </a:extLst>
           </p:cNvPr>
@@ -5022,7 +7273,7 @@
           <p:cNvPr id="2" name="chapter-label">
             <a:extLst xmlns:a="http://schemas.openxmlformats.org/drawingml/2006/main">
               <a:ext uri="{FF2B5EF4-FFF2-40B4-BE49-F238E27FC236}">
-                <a16:creationId xmlns:a16="http://schemas.microsoft.com/office/drawing/2014/main" id="{848E28A5-7F71-4255-9231-DCB9FE7BBFA6}"/>
+                <a16:creationId xmlns:a16="http://schemas.microsoft.com/office/drawing/2014/main" id="{1EB72A7E-FFBE-4135-B290-EF84AA6F3E0A}"/>
               </a:ext>
             </a:extLst>
           </p:cNvPr>
@@ -5080,7 +7331,7 @@
           <p:cNvPr id="3" name="slide-number">
             <a:extLst xmlns:a="http://schemas.openxmlformats.org/drawingml/2006/main">
               <a:ext uri="{FF2B5EF4-FFF2-40B4-BE49-F238E27FC236}">
-                <a16:creationId xmlns:a16="http://schemas.microsoft.com/office/drawing/2014/main" id="{09CEF13D-AD6C-43A3-B2AC-B2362B39A3F3}"/>
+                <a16:creationId xmlns:a16="http://schemas.microsoft.com/office/drawing/2014/main" id="{519C59B7-3DA8-4CF9-96CD-FA9D5F429F88}"/>
               </a:ext>
             </a:extLst>
           </p:cNvPr>
@@ -5138,7 +7389,7 @@
           <p:cNvPr id="4" name="chapter-footer">
             <a:extLst xmlns:a="http://schemas.openxmlformats.org/drawingml/2006/main">
               <a:ext uri="{FF2B5EF4-FFF2-40B4-BE49-F238E27FC236}">
-                <a16:creationId xmlns:a16="http://schemas.microsoft.com/office/drawing/2014/main" id="{685492DD-F157-4B1D-B082-7774EDE3075E}"/>
+                <a16:creationId xmlns:a16="http://schemas.microsoft.com/office/drawing/2014/main" id="{141FC1E4-B1D0-4136-9F16-E62C9AFDF134}"/>
               </a:ext>
             </a:extLst>
           </p:cNvPr>
@@ -5196,7 +7447,7 @@
           <p:cNvPr id="5" name="section-title">
             <a:extLst xmlns:a="http://schemas.openxmlformats.org/drawingml/2006/main">
               <a:ext uri="{FF2B5EF4-FFF2-40B4-BE49-F238E27FC236}">
-                <a16:creationId xmlns:a16="http://schemas.microsoft.com/office/drawing/2014/main" id="{BBE76347-887C-4A97-A631-E8A3B1B380FC}"/>
+                <a16:creationId xmlns:a16="http://schemas.microsoft.com/office/drawing/2014/main" id="{AB624A00-89C9-4470-89E3-8C89C0B234B4}"/>
               </a:ext>
             </a:extLst>
           </p:cNvPr>
@@ -5254,7 +7505,7 @@
           <p:cNvPr id="6" name="section-explanation">
             <a:extLst xmlns:a="http://schemas.openxmlformats.org/drawingml/2006/main">
               <a:ext uri="{FF2B5EF4-FFF2-40B4-BE49-F238E27FC236}">
-                <a16:creationId xmlns:a16="http://schemas.microsoft.com/office/drawing/2014/main" id="{B6D5CEB2-5D1E-42FE-8006-23442E72E2E1}"/>
+                <a16:creationId xmlns:a16="http://schemas.microsoft.com/office/drawing/2014/main" id="{1E3556F5-DF53-4F5A-A479-73442FDD55AE}"/>
               </a:ext>
             </a:extLst>
           </p:cNvPr>
@@ -5312,7 +7563,7 @@
           <p:cNvPr id="7" name="column-rule">
             <a:extLst xmlns:a="http://schemas.openxmlformats.org/drawingml/2006/main">
               <a:ext uri="{FF2B5EF4-FFF2-40B4-BE49-F238E27FC236}">
-                <a16:creationId xmlns:a16="http://schemas.microsoft.com/office/drawing/2014/main" id="{713F807C-8A01-442F-9E14-283EC1ACD792}"/>
+                <a16:creationId xmlns:a16="http://schemas.microsoft.com/office/drawing/2014/main" id="{F57FABFD-3716-41EA-8892-D7572D52396A}"/>
               </a:ext>
             </a:extLst>
           </p:cNvPr>
@@ -5345,7 +7596,7 @@
           <p:cNvPr id="8" name="section-points">
             <a:extLst xmlns:a="http://schemas.openxmlformats.org/drawingml/2006/main">
               <a:ext uri="{FF2B5EF4-FFF2-40B4-BE49-F238E27FC236}">
-                <a16:creationId xmlns:a16="http://schemas.microsoft.com/office/drawing/2014/main" id="{06240BEC-3C0F-44EF-B8A0-1CBE293746E9}"/>
+                <a16:creationId xmlns:a16="http://schemas.microsoft.com/office/drawing/2014/main" id="{B8625311-82E0-4548-9F3B-E6254B6AE3EC}"/>
               </a:ext>
             </a:extLst>
           </p:cNvPr>
@@ -5485,7 +7736,7 @@
     </p:spTree>
     <p:extLst>
       <p:ext uri="{BB962C8B-B14F-4D97-AF65-F5344CB8AC3E}">
-        <p14:creationId xmlns:p14="http://schemas.microsoft.com/office/powerpoint/2010/main" val="904718083"/>
+        <p14:creationId xmlns:p14="http://schemas.microsoft.com/office/powerpoint/2010/main" val="1155658369"/>
       </p:ext>
     </p:extLst>
   </p:cSld>
@@ -5516,7 +7767,7 @@
           <p:cNvPr id="15" name="accent-line">
             <a:extLst xmlns:a="http://schemas.openxmlformats.org/drawingml/2006/main">
               <a:ext uri="{FF2B5EF4-FFF2-40B4-BE49-F238E27FC236}">
-                <a16:creationId xmlns:a16="http://schemas.microsoft.com/office/drawing/2014/main" id="{F7E15265-FD72-428D-894F-774DAB2E7995}"/>
+                <a16:creationId xmlns:a16="http://schemas.microsoft.com/office/drawing/2014/main" id="{C043AF0C-147D-405D-A375-1DC9B25BA95D}"/>
               </a:ext>
             </a:extLst>
           </p:cNvPr>
@@ -5549,7 +7800,7 @@
           <p:cNvPr id="2" name="chapter-label">
             <a:extLst xmlns:a="http://schemas.openxmlformats.org/drawingml/2006/main">
               <a:ext uri="{FF2B5EF4-FFF2-40B4-BE49-F238E27FC236}">
-                <a16:creationId xmlns:a16="http://schemas.microsoft.com/office/drawing/2014/main" id="{D299889A-DEDD-4CCF-998B-3E96B0CF05D2}"/>
+                <a16:creationId xmlns:a16="http://schemas.microsoft.com/office/drawing/2014/main" id="{AF7EDAC8-88BA-47C0-88D0-7725B82A996F}"/>
               </a:ext>
             </a:extLst>
           </p:cNvPr>
@@ -5607,7 +7858,7 @@
           <p:cNvPr id="3" name="slide-number">
             <a:extLst xmlns:a="http://schemas.openxmlformats.org/drawingml/2006/main">
               <a:ext uri="{FF2B5EF4-FFF2-40B4-BE49-F238E27FC236}">
-                <a16:creationId xmlns:a16="http://schemas.microsoft.com/office/drawing/2014/main" id="{6610EB0F-83BF-4765-A81B-3461C17EF234}"/>
+                <a16:creationId xmlns:a16="http://schemas.microsoft.com/office/drawing/2014/main" id="{ED702EF4-4D1A-4E05-873C-2F151B7979C3}"/>
               </a:ext>
             </a:extLst>
           </p:cNvPr>
@@ -5665,7 +7916,7 @@
           <p:cNvPr id="4" name="chapter-footer">
             <a:extLst xmlns:a="http://schemas.openxmlformats.org/drawingml/2006/main">
               <a:ext uri="{FF2B5EF4-FFF2-40B4-BE49-F238E27FC236}">
-                <a16:creationId xmlns:a16="http://schemas.microsoft.com/office/drawing/2014/main" id="{7082C0B4-0234-4D5B-9BBF-6205DE0FE9DF}"/>
+                <a16:creationId xmlns:a16="http://schemas.microsoft.com/office/drawing/2014/main" id="{5AAFEE0A-DD58-4A8C-A17D-A29BDEDFADE4}"/>
               </a:ext>
             </a:extLst>
           </p:cNvPr>
@@ -5723,7 +7974,7 @@
           <p:cNvPr id="5" name="section-title">
             <a:extLst xmlns:a="http://schemas.openxmlformats.org/drawingml/2006/main">
               <a:ext uri="{FF2B5EF4-FFF2-40B4-BE49-F238E27FC236}">
-                <a16:creationId xmlns:a16="http://schemas.microsoft.com/office/drawing/2014/main" id="{06CAF8B4-38A7-45A4-88CC-1160654BF439}"/>
+                <a16:creationId xmlns:a16="http://schemas.microsoft.com/office/drawing/2014/main" id="{06CC89C2-F791-4B63-A361-A8FBBE269CDA}"/>
               </a:ext>
             </a:extLst>
           </p:cNvPr>
@@ -5781,7 +8032,7 @@
           <p:cNvPr id="6" name="section-explanation">
             <a:extLst xmlns:a="http://schemas.openxmlformats.org/drawingml/2006/main">
               <a:ext uri="{FF2B5EF4-FFF2-40B4-BE49-F238E27FC236}">
-                <a16:creationId xmlns:a16="http://schemas.microsoft.com/office/drawing/2014/main" id="{0EDC3BD2-6183-480A-ABD8-18DBE46200E6}"/>
+                <a16:creationId xmlns:a16="http://schemas.microsoft.com/office/drawing/2014/main" id="{D1A7AF36-223D-48D5-BCBD-7496A674D07B}"/>
               </a:ext>
             </a:extLst>
           </p:cNvPr>
@@ -5839,7 +8090,7 @@
           <p:cNvPr id="7" name="point-band-1">
             <a:extLst xmlns:a="http://schemas.openxmlformats.org/drawingml/2006/main">
               <a:ext uri="{FF2B5EF4-FFF2-40B4-BE49-F238E27FC236}">
-                <a16:creationId xmlns:a16="http://schemas.microsoft.com/office/drawing/2014/main" id="{61B14FDC-713F-42C6-9E89-01EFF714F947}"/>
+                <a16:creationId xmlns:a16="http://schemas.microsoft.com/office/drawing/2014/main" id="{AE1BECB8-887A-409B-87CF-DE0EBA908D1F}"/>
               </a:ext>
             </a:extLst>
           </p:cNvPr>
@@ -5872,7 +8123,7 @@
           <p:cNvPr id="8" name="point-1">
             <a:extLst xmlns:a="http://schemas.openxmlformats.org/drawingml/2006/main">
               <a:ext uri="{FF2B5EF4-FFF2-40B4-BE49-F238E27FC236}">
-                <a16:creationId xmlns:a16="http://schemas.microsoft.com/office/drawing/2014/main" id="{F1BF3DA0-369E-4177-A669-DEE71C992FD8}"/>
+                <a16:creationId xmlns:a16="http://schemas.microsoft.com/office/drawing/2014/main" id="{CD24B62E-A814-41EC-AD42-EE600E0007CE}"/>
               </a:ext>
             </a:extLst>
           </p:cNvPr>
@@ -5930,7 +8181,7 @@
           <p:cNvPr id="9" name="point-band-2">
             <a:extLst xmlns:a="http://schemas.openxmlformats.org/drawingml/2006/main">
               <a:ext uri="{FF2B5EF4-FFF2-40B4-BE49-F238E27FC236}">
-                <a16:creationId xmlns:a16="http://schemas.microsoft.com/office/drawing/2014/main" id="{369722EE-DC8D-47FA-9AC8-B9769B9F53EB}"/>
+                <a16:creationId xmlns:a16="http://schemas.microsoft.com/office/drawing/2014/main" id="{CEAB1778-8359-4BEE-AE90-3B8F88BC0C47}"/>
               </a:ext>
             </a:extLst>
           </p:cNvPr>
@@ -5963,7 +8214,7 @@
           <p:cNvPr id="10" name="point-2">
             <a:extLst xmlns:a="http://schemas.openxmlformats.org/drawingml/2006/main">
               <a:ext uri="{FF2B5EF4-FFF2-40B4-BE49-F238E27FC236}">
-                <a16:creationId xmlns:a16="http://schemas.microsoft.com/office/drawing/2014/main" id="{F0736C8B-308D-4804-8679-454E9B767AF1}"/>
+                <a16:creationId xmlns:a16="http://schemas.microsoft.com/office/drawing/2014/main" id="{80AEC5C2-152B-4105-8201-18AB95DD756A}"/>
               </a:ext>
             </a:extLst>
           </p:cNvPr>
@@ -6021,7 +8272,7 @@
           <p:cNvPr id="11" name="point-band-3">
             <a:extLst xmlns:a="http://schemas.openxmlformats.org/drawingml/2006/main">
               <a:ext uri="{FF2B5EF4-FFF2-40B4-BE49-F238E27FC236}">
-                <a16:creationId xmlns:a16="http://schemas.microsoft.com/office/drawing/2014/main" id="{D04E5E3D-7E76-4C29-B88C-587BE2501030}"/>
+                <a16:creationId xmlns:a16="http://schemas.microsoft.com/office/drawing/2014/main" id="{C557AE63-102D-4D74-BE82-E2324F6B87F5}"/>
               </a:ext>
             </a:extLst>
           </p:cNvPr>
@@ -6054,7 +8305,7 @@
           <p:cNvPr id="12" name="point-3">
             <a:extLst xmlns:a="http://schemas.openxmlformats.org/drawingml/2006/main">
               <a:ext uri="{FF2B5EF4-FFF2-40B4-BE49-F238E27FC236}">
-                <a16:creationId xmlns:a16="http://schemas.microsoft.com/office/drawing/2014/main" id="{785630EC-6A29-4E88-B9D2-9B73B2B4A56C}"/>
+                <a16:creationId xmlns:a16="http://schemas.microsoft.com/office/drawing/2014/main" id="{08E45A6A-DEC1-4D96-B2F0-AE382B0C598B}"/>
               </a:ext>
             </a:extLst>
           </p:cNvPr>
@@ -6112,7 +8363,7 @@
           <p:cNvPr id="13" name="point-band-4">
             <a:extLst xmlns:a="http://schemas.openxmlformats.org/drawingml/2006/main">
               <a:ext uri="{FF2B5EF4-FFF2-40B4-BE49-F238E27FC236}">
-                <a16:creationId xmlns:a16="http://schemas.microsoft.com/office/drawing/2014/main" id="{869F24F9-AF43-4FED-BB61-596B2E868DD8}"/>
+                <a16:creationId xmlns:a16="http://schemas.microsoft.com/office/drawing/2014/main" id="{40515626-F014-48D9-9D50-44CFA4826B04}"/>
               </a:ext>
             </a:extLst>
           </p:cNvPr>
@@ -6145,7 +8396,7 @@
           <p:cNvPr id="14" name="point-4">
             <a:extLst xmlns:a="http://schemas.openxmlformats.org/drawingml/2006/main">
               <a:ext uri="{FF2B5EF4-FFF2-40B4-BE49-F238E27FC236}">
-                <a16:creationId xmlns:a16="http://schemas.microsoft.com/office/drawing/2014/main" id="{20C6C2C7-8246-44A8-AFCA-B72C31DE200A}"/>
+                <a16:creationId xmlns:a16="http://schemas.microsoft.com/office/drawing/2014/main" id="{33913D62-0F12-48AE-BC84-A40FB4D7B06A}"/>
               </a:ext>
             </a:extLst>
           </p:cNvPr>
@@ -6201,7 +8452,7 @@
     </p:spTree>
     <p:extLst>
       <p:ext uri="{BB962C8B-B14F-4D97-AF65-F5344CB8AC3E}">
-        <p14:creationId xmlns:p14="http://schemas.microsoft.com/office/powerpoint/2010/main" val="1859373587"/>
+        <p14:creationId xmlns:p14="http://schemas.microsoft.com/office/powerpoint/2010/main" val="629606971"/>
       </p:ext>
     </p:extLst>
   </p:cSld>
@@ -6232,7 +8483,7 @@
           <p:cNvPr id="9" name="accent-line">
             <a:extLst xmlns:a="http://schemas.openxmlformats.org/drawingml/2006/main">
               <a:ext uri="{FF2B5EF4-FFF2-40B4-BE49-F238E27FC236}">
-                <a16:creationId xmlns:a16="http://schemas.microsoft.com/office/drawing/2014/main" id="{11E3EB94-5B8D-4C98-ACCD-BDA25E1B0AA0}"/>
+                <a16:creationId xmlns:a16="http://schemas.microsoft.com/office/drawing/2014/main" id="{C662019C-D4CE-4346-9DFF-61B92AE60D99}"/>
               </a:ext>
             </a:extLst>
           </p:cNvPr>
@@ -6265,7 +8516,7 @@
           <p:cNvPr id="2" name="chapter-label">
             <a:extLst xmlns:a="http://schemas.openxmlformats.org/drawingml/2006/main">
               <a:ext uri="{FF2B5EF4-FFF2-40B4-BE49-F238E27FC236}">
-                <a16:creationId xmlns:a16="http://schemas.microsoft.com/office/drawing/2014/main" id="{AE65615C-B80C-440D-903F-43C4AD64506B}"/>
+                <a16:creationId xmlns:a16="http://schemas.microsoft.com/office/drawing/2014/main" id="{16B493AC-C097-49D6-AA84-2FC960612767}"/>
               </a:ext>
             </a:extLst>
           </p:cNvPr>
@@ -6323,7 +8574,7 @@
           <p:cNvPr id="3" name="slide-number">
             <a:extLst xmlns:a="http://schemas.openxmlformats.org/drawingml/2006/main">
               <a:ext uri="{FF2B5EF4-FFF2-40B4-BE49-F238E27FC236}">
-                <a16:creationId xmlns:a16="http://schemas.microsoft.com/office/drawing/2014/main" id="{AD914DC7-A3CE-41F2-BCDB-D6DE11335BF6}"/>
+                <a16:creationId xmlns:a16="http://schemas.microsoft.com/office/drawing/2014/main" id="{B9C14A4D-F4EF-42DA-A965-AC0B85BF89DA}"/>
               </a:ext>
             </a:extLst>
           </p:cNvPr>
@@ -6381,7 +8632,7 @@
           <p:cNvPr id="4" name="chapter-footer">
             <a:extLst xmlns:a="http://schemas.openxmlformats.org/drawingml/2006/main">
               <a:ext uri="{FF2B5EF4-FFF2-40B4-BE49-F238E27FC236}">
-                <a16:creationId xmlns:a16="http://schemas.microsoft.com/office/drawing/2014/main" id="{536D0298-A684-43A3-8208-28A6F5FCDB31}"/>
+                <a16:creationId xmlns:a16="http://schemas.microsoft.com/office/drawing/2014/main" id="{1B3E1165-B68E-4227-B176-6E15D85D27C4}"/>
               </a:ext>
             </a:extLst>
           </p:cNvPr>
@@ -6439,7 +8690,7 @@
           <p:cNvPr id="5" name="section-title">
             <a:extLst xmlns:a="http://schemas.openxmlformats.org/drawingml/2006/main">
               <a:ext uri="{FF2B5EF4-FFF2-40B4-BE49-F238E27FC236}">
-                <a16:creationId xmlns:a16="http://schemas.microsoft.com/office/drawing/2014/main" id="{E9FEC4AC-A5DB-4E1B-9393-6D6806971D74}"/>
+                <a16:creationId xmlns:a16="http://schemas.microsoft.com/office/drawing/2014/main" id="{8AF8D091-C894-42C2-BAF5-E8A648185FFA}"/>
               </a:ext>
             </a:extLst>
           </p:cNvPr>
@@ -6497,7 +8748,7 @@
           <p:cNvPr id="6" name="section-explanation">
             <a:extLst xmlns:a="http://schemas.openxmlformats.org/drawingml/2006/main">
               <a:ext uri="{FF2B5EF4-FFF2-40B4-BE49-F238E27FC236}">
-                <a16:creationId xmlns:a16="http://schemas.microsoft.com/office/drawing/2014/main" id="{255D720B-5E5B-47E6-BC79-87DFE5BBCCC4}"/>
+                <a16:creationId xmlns:a16="http://schemas.microsoft.com/office/drawing/2014/main" id="{396BF2D6-9D3A-4ABA-8F89-C8CD4E2BEB96}"/>
               </a:ext>
             </a:extLst>
           </p:cNvPr>
@@ -6555,7 +8806,7 @@
           <p:cNvPr id="7" name="column-rule">
             <a:extLst xmlns:a="http://schemas.openxmlformats.org/drawingml/2006/main">
               <a:ext uri="{FF2B5EF4-FFF2-40B4-BE49-F238E27FC236}">
-                <a16:creationId xmlns:a16="http://schemas.microsoft.com/office/drawing/2014/main" id="{56557C30-AA01-4204-97C5-A1F80749695F}"/>
+                <a16:creationId xmlns:a16="http://schemas.microsoft.com/office/drawing/2014/main" id="{4E43EC09-0B9D-4BFD-9E50-3C95DA1849D4}"/>
               </a:ext>
             </a:extLst>
           </p:cNvPr>
@@ -6588,7 +8839,7 @@
           <p:cNvPr id="8" name="section-points">
             <a:extLst xmlns:a="http://schemas.openxmlformats.org/drawingml/2006/main">
               <a:ext uri="{FF2B5EF4-FFF2-40B4-BE49-F238E27FC236}">
-                <a16:creationId xmlns:a16="http://schemas.microsoft.com/office/drawing/2014/main" id="{7E0CAD4F-9ECB-4BE2-BA78-BDFF7E83C065}"/>
+                <a16:creationId xmlns:a16="http://schemas.microsoft.com/office/drawing/2014/main" id="{A3E8F78D-4473-42F1-81A5-68FDB4F24336}"/>
               </a:ext>
             </a:extLst>
           </p:cNvPr>
@@ -6728,7 +8979,7 @@
     </p:spTree>
     <p:extLst>
       <p:ext uri="{BB962C8B-B14F-4D97-AF65-F5344CB8AC3E}">
-        <p14:creationId xmlns:p14="http://schemas.microsoft.com/office/powerpoint/2010/main" val="1594706695"/>
+        <p14:creationId xmlns:p14="http://schemas.microsoft.com/office/powerpoint/2010/main" val="372319726"/>
       </p:ext>
     </p:extLst>
   </p:cSld>
@@ -6759,7 +9010,7 @@
           <p:cNvPr id="15" name="accent-line">
             <a:extLst xmlns:a="http://schemas.openxmlformats.org/drawingml/2006/main">
               <a:ext uri="{FF2B5EF4-FFF2-40B4-BE49-F238E27FC236}">
-                <a16:creationId xmlns:a16="http://schemas.microsoft.com/office/drawing/2014/main" id="{9F259142-5AD9-4801-9A39-C67914B81C5F}"/>
+                <a16:creationId xmlns:a16="http://schemas.microsoft.com/office/drawing/2014/main" id="{58BBBE9E-6A99-4342-9139-6612F601F79A}"/>
               </a:ext>
             </a:extLst>
           </p:cNvPr>
@@ -6792,7 +9043,7 @@
           <p:cNvPr id="2" name="chapter-label">
             <a:extLst xmlns:a="http://schemas.openxmlformats.org/drawingml/2006/main">
               <a:ext uri="{FF2B5EF4-FFF2-40B4-BE49-F238E27FC236}">
-                <a16:creationId xmlns:a16="http://schemas.microsoft.com/office/drawing/2014/main" id="{BBA6405E-285C-4CB6-B1ED-2272733A1206}"/>
+                <a16:creationId xmlns:a16="http://schemas.microsoft.com/office/drawing/2014/main" id="{458C899C-4823-48BB-9195-E5BD673FB70F}"/>
               </a:ext>
             </a:extLst>
           </p:cNvPr>
@@ -6850,7 +9101,7 @@
           <p:cNvPr id="3" name="slide-number">
             <a:extLst xmlns:a="http://schemas.openxmlformats.org/drawingml/2006/main">
               <a:ext uri="{FF2B5EF4-FFF2-40B4-BE49-F238E27FC236}">
-                <a16:creationId xmlns:a16="http://schemas.microsoft.com/office/drawing/2014/main" id="{B4AAB727-E678-4B14-8519-18B5803FA82C}"/>
+                <a16:creationId xmlns:a16="http://schemas.microsoft.com/office/drawing/2014/main" id="{AF07C0B7-DA28-4C6D-898E-1C96731B0780}"/>
               </a:ext>
             </a:extLst>
           </p:cNvPr>
@@ -6908,7 +9159,7 @@
           <p:cNvPr id="4" name="chapter-footer">
             <a:extLst xmlns:a="http://schemas.openxmlformats.org/drawingml/2006/main">
               <a:ext uri="{FF2B5EF4-FFF2-40B4-BE49-F238E27FC236}">
-                <a16:creationId xmlns:a16="http://schemas.microsoft.com/office/drawing/2014/main" id="{2A55EC7F-6A08-444E-996C-13384FBFF996}"/>
+                <a16:creationId xmlns:a16="http://schemas.microsoft.com/office/drawing/2014/main" id="{3F875FA1-015D-4A5D-B6C8-FA480CDD3B92}"/>
               </a:ext>
             </a:extLst>
           </p:cNvPr>
@@ -6966,7 +9217,7 @@
           <p:cNvPr id="5" name="section-title">
             <a:extLst xmlns:a="http://schemas.openxmlformats.org/drawingml/2006/main">
               <a:ext uri="{FF2B5EF4-FFF2-40B4-BE49-F238E27FC236}">
-                <a16:creationId xmlns:a16="http://schemas.microsoft.com/office/drawing/2014/main" id="{B4D01CF3-2275-4B70-9490-FF9ED9C01962}"/>
+                <a16:creationId xmlns:a16="http://schemas.microsoft.com/office/drawing/2014/main" id="{18FCB687-BBFB-4A0E-9423-AF3A2D7FCF5D}"/>
               </a:ext>
             </a:extLst>
           </p:cNvPr>
@@ -7024,7 +9275,7 @@
           <p:cNvPr id="6" name="section-explanation">
             <a:extLst xmlns:a="http://schemas.openxmlformats.org/drawingml/2006/main">
               <a:ext uri="{FF2B5EF4-FFF2-40B4-BE49-F238E27FC236}">
-                <a16:creationId xmlns:a16="http://schemas.microsoft.com/office/drawing/2014/main" id="{1879D61A-542E-4D2C-888C-5F4FEFEABA45}"/>
+                <a16:creationId xmlns:a16="http://schemas.microsoft.com/office/drawing/2014/main" id="{C030C0EA-E409-4FEA-AB1F-02972691C85A}"/>
               </a:ext>
             </a:extLst>
           </p:cNvPr>
@@ -7082,7 +9333,7 @@
           <p:cNvPr id="7" name="point-band-1">
             <a:extLst xmlns:a="http://schemas.openxmlformats.org/drawingml/2006/main">
               <a:ext uri="{FF2B5EF4-FFF2-40B4-BE49-F238E27FC236}">
-                <a16:creationId xmlns:a16="http://schemas.microsoft.com/office/drawing/2014/main" id="{E49DAD07-15F7-44CF-975C-841DD798096F}"/>
+                <a16:creationId xmlns:a16="http://schemas.microsoft.com/office/drawing/2014/main" id="{98E459B9-6D54-4EA8-A398-CEBC9A10AF02}"/>
               </a:ext>
             </a:extLst>
           </p:cNvPr>
@@ -7115,7 +9366,7 @@
           <p:cNvPr id="8" name="point-1">
             <a:extLst xmlns:a="http://schemas.openxmlformats.org/drawingml/2006/main">
               <a:ext uri="{FF2B5EF4-FFF2-40B4-BE49-F238E27FC236}">
-                <a16:creationId xmlns:a16="http://schemas.microsoft.com/office/drawing/2014/main" id="{22766953-4CD3-47AB-918A-9F2F2379AC90}"/>
+                <a16:creationId xmlns:a16="http://schemas.microsoft.com/office/drawing/2014/main" id="{ED55DF81-4BBE-47C6-BF42-85FE41EE1BDF}"/>
               </a:ext>
             </a:extLst>
           </p:cNvPr>
@@ -7173,7 +9424,7 @@
           <p:cNvPr id="9" name="point-band-2">
             <a:extLst xmlns:a="http://schemas.openxmlformats.org/drawingml/2006/main">
               <a:ext uri="{FF2B5EF4-FFF2-40B4-BE49-F238E27FC236}">
-                <a16:creationId xmlns:a16="http://schemas.microsoft.com/office/drawing/2014/main" id="{8A49D234-8F3A-4444-8A7A-1F87D2BC0594}"/>
+                <a16:creationId xmlns:a16="http://schemas.microsoft.com/office/drawing/2014/main" id="{B8BAE4DE-DEB0-4F79-B8EF-CF01CDF8003D}"/>
               </a:ext>
             </a:extLst>
           </p:cNvPr>
@@ -7206,7 +9457,7 @@
           <p:cNvPr id="10" name="point-2">
             <a:extLst xmlns:a="http://schemas.openxmlformats.org/drawingml/2006/main">
               <a:ext uri="{FF2B5EF4-FFF2-40B4-BE49-F238E27FC236}">
-                <a16:creationId xmlns:a16="http://schemas.microsoft.com/office/drawing/2014/main" id="{75B9C6CE-BE76-4BFD-9B9B-D95C92D5D365}"/>
+                <a16:creationId xmlns:a16="http://schemas.microsoft.com/office/drawing/2014/main" id="{CB778A1B-9897-42D4-B39B-1F0D3DFA7FA1}"/>
               </a:ext>
             </a:extLst>
           </p:cNvPr>
@@ -7264,7 +9515,7 @@
           <p:cNvPr id="11" name="point-band-3">
             <a:extLst xmlns:a="http://schemas.openxmlformats.org/drawingml/2006/main">
               <a:ext uri="{FF2B5EF4-FFF2-40B4-BE49-F238E27FC236}">
-                <a16:creationId xmlns:a16="http://schemas.microsoft.com/office/drawing/2014/main" id="{3E3ED332-0716-4DCD-B0B3-CAB927B84607}"/>
+                <a16:creationId xmlns:a16="http://schemas.microsoft.com/office/drawing/2014/main" id="{E30593E3-3E9F-4805-A56C-4F9B300E447C}"/>
               </a:ext>
             </a:extLst>
           </p:cNvPr>
@@ -7297,7 +9548,7 @@
           <p:cNvPr id="12" name="point-3">
             <a:extLst xmlns:a="http://schemas.openxmlformats.org/drawingml/2006/main">
               <a:ext uri="{FF2B5EF4-FFF2-40B4-BE49-F238E27FC236}">
-                <a16:creationId xmlns:a16="http://schemas.microsoft.com/office/drawing/2014/main" id="{B851FB69-78CB-45AB-A410-C09D29310002}"/>
+                <a16:creationId xmlns:a16="http://schemas.microsoft.com/office/drawing/2014/main" id="{C3446ADA-E14E-4CF2-BD3D-D5B75CC731BB}"/>
               </a:ext>
             </a:extLst>
           </p:cNvPr>
@@ -7355,7 +9606,7 @@
           <p:cNvPr id="13" name="point-band-4">
             <a:extLst xmlns:a="http://schemas.openxmlformats.org/drawingml/2006/main">
               <a:ext uri="{FF2B5EF4-FFF2-40B4-BE49-F238E27FC236}">
-                <a16:creationId xmlns:a16="http://schemas.microsoft.com/office/drawing/2014/main" id="{FA6EE1DD-6234-468C-9F07-62D33148A68C}"/>
+                <a16:creationId xmlns:a16="http://schemas.microsoft.com/office/drawing/2014/main" id="{0B9952F4-C220-490E-A773-1A3AFB4FEBC6}"/>
               </a:ext>
             </a:extLst>
           </p:cNvPr>
@@ -7388,7 +9639,7 @@
           <p:cNvPr id="14" name="point-4">
             <a:extLst xmlns:a="http://schemas.openxmlformats.org/drawingml/2006/main">
               <a:ext uri="{FF2B5EF4-FFF2-40B4-BE49-F238E27FC236}">
-                <a16:creationId xmlns:a16="http://schemas.microsoft.com/office/drawing/2014/main" id="{A05D1AD9-68B4-4B35-8F96-6F517D8EB808}"/>
+                <a16:creationId xmlns:a16="http://schemas.microsoft.com/office/drawing/2014/main" id="{6EFA2827-0CFC-4B39-8648-99C68CC9E4BC}"/>
               </a:ext>
             </a:extLst>
           </p:cNvPr>
@@ -7444,7 +9695,7 @@
     </p:spTree>
     <p:extLst>
       <p:ext uri="{BB962C8B-B14F-4D97-AF65-F5344CB8AC3E}">
-        <p14:creationId xmlns:p14="http://schemas.microsoft.com/office/powerpoint/2010/main" val="1411914187"/>
+        <p14:creationId xmlns:p14="http://schemas.microsoft.com/office/powerpoint/2010/main" val="1429894860"/>
       </p:ext>
     </p:extLst>
   </p:cSld>
@@ -7472,10 +9723,10 @@
       </p:grpSpPr>
       <p:sp>
         <p:nvSpPr>
-          <p:cNvPr id="18" name="accent-line">
-            <a:extLst xmlns:a="http://schemas.openxmlformats.org/drawingml/2006/main">
-              <a:ext uri="{FF2B5EF4-FFF2-40B4-BE49-F238E27FC236}">
-                <a16:creationId xmlns:a16="http://schemas.microsoft.com/office/drawing/2014/main" id="{D624D9E9-F69E-4D0F-B50B-3A31A038149F}"/>
+          <p:cNvPr id="9" name="accent-line">
+            <a:extLst xmlns:a="http://schemas.openxmlformats.org/drawingml/2006/main">
+              <a:ext uri="{FF2B5EF4-FFF2-40B4-BE49-F238E27FC236}">
+                <a16:creationId xmlns:a16="http://schemas.microsoft.com/office/drawing/2014/main" id="{AE75EAF6-EECD-41E9-ACEF-42BA50289188}"/>
               </a:ext>
             </a:extLst>
           </p:cNvPr>
@@ -7508,7 +9759,7 @@
           <p:cNvPr id="2" name="chapter-label">
             <a:extLst xmlns:a="http://schemas.openxmlformats.org/drawingml/2006/main">
               <a:ext uri="{FF2B5EF4-FFF2-40B4-BE49-F238E27FC236}">
-                <a16:creationId xmlns:a16="http://schemas.microsoft.com/office/drawing/2014/main" id="{D8B24992-66CD-472B-91B6-9B61E88AB622}"/>
+                <a16:creationId xmlns:a16="http://schemas.microsoft.com/office/drawing/2014/main" id="{6AAEDFF0-DC89-4CF0-A103-A5CE1E824567}"/>
               </a:ext>
             </a:extLst>
           </p:cNvPr>
@@ -7556,7 +9807,7 @@
                 <a:ea typeface="Helvetica Neue"/>
                 <a:cs typeface="Helvetica Neue"/>
               </a:rPr>
-              <a:t>EXAM CHECK  /  13</a:t>
+              <a:t>CORE IDEA 07  /  13</a:t>
             </a:r>
           </a:p>
         </p:txBody>
@@ -7566,7 +9817,7 @@
           <p:cNvPr id="3" name="slide-number">
             <a:extLst xmlns:a="http://schemas.openxmlformats.org/drawingml/2006/main">
               <a:ext uri="{FF2B5EF4-FFF2-40B4-BE49-F238E27FC236}">
-                <a16:creationId xmlns:a16="http://schemas.microsoft.com/office/drawing/2014/main" id="{94354626-3A8F-43ED-B65D-A7CD0DA4DDFA}"/>
+                <a16:creationId xmlns:a16="http://schemas.microsoft.com/office/drawing/2014/main" id="{8C0D76D4-3E0E-42FC-82C8-49A65E26543A}"/>
               </a:ext>
             </a:extLst>
           </p:cNvPr>
@@ -7624,7 +9875,7 @@
           <p:cNvPr id="4" name="chapter-footer">
             <a:extLst xmlns:a="http://schemas.openxmlformats.org/drawingml/2006/main">
               <a:ext uri="{FF2B5EF4-FFF2-40B4-BE49-F238E27FC236}">
-                <a16:creationId xmlns:a16="http://schemas.microsoft.com/office/drawing/2014/main" id="{1A142990-2594-4571-9326-91FA3710D5DF}"/>
+                <a16:creationId xmlns:a16="http://schemas.microsoft.com/office/drawing/2014/main" id="{0777A1C8-2527-4028-B4DA-342C0DC795D5}"/>
               </a:ext>
             </a:extLst>
           </p:cNvPr>
@@ -7679,138 +9930,22 @@
       </p:sp>
       <p:sp>
         <p:nvSpPr>
-          <p:cNvPr id="5" name="exam-title">
-            <a:extLst xmlns:a="http://schemas.openxmlformats.org/drawingml/2006/main">
-              <a:ext uri="{FF2B5EF4-FFF2-40B4-BE49-F238E27FC236}">
-                <a16:creationId xmlns:a16="http://schemas.microsoft.com/office/drawing/2014/main" id="{04B8C320-A276-48CC-8473-AC6AB3AC213C}"/>
-              </a:ext>
-            </a:extLst>
-          </p:cNvPr>
-          <p:cNvSpPr>
-            <a:spLocks xmlns:a="http://schemas.openxmlformats.org/drawingml/2006/main" noGrp="1"/>
-          </p:cNvSpPr>
-          <p:nvPr/>
-        </p:nvSpPr>
-        <p:spPr>
-          <a:xfrm xmlns:a="http://schemas.openxmlformats.org/drawingml/2006/main">
-            <a:off x="390525" y="981075"/>
-            <a:ext cx="10668000" cy="781050"/>
-          </a:xfrm>
-          <a:prstGeom xmlns:a="http://schemas.openxmlformats.org/drawingml/2006/main" prst="rect">
-            <a:avLst/>
-          </a:prstGeom>
-          <a:noFill xmlns:a="http://schemas.openxmlformats.org/drawingml/2006/main"/>
-          <a:ln xmlns:a="http://schemas.openxmlformats.org/drawingml/2006/main" w="0">
-            <a:noFill/>
-            <a:prstDash val="solid"/>
-          </a:ln>
-        </p:spPr>
-        <p:txBody>
-          <a:bodyPr xmlns:a="http://schemas.openxmlformats.org/drawingml/2006/main" anchor="t">
-            <a:noAutofit/>
-          </a:bodyPr>
-          <a:lstStyle xmlns:a="http://schemas.openxmlformats.org/drawingml/2006/main"/>
-          <a:p xmlns:a="http://schemas.openxmlformats.org/drawingml/2006/main">
-            <a:pPr algn="l">
-              <a:defRPr sz="3150" b="1">
-                <a:solidFill>
-                  <a:srgbClr val="111111"/>
-                </a:solidFill>
-                <a:latin typeface="Helvetica Neue"/>
-                <a:ea typeface="Helvetica Neue"/>
-                <a:cs typeface="Helvetica Neue"/>
-              </a:defRPr>
-            </a:pPr>
-            <a:r>
-              <a:rPr sz="3150" b="1">
-                <a:solidFill>
-                  <a:srgbClr val="111111"/>
-                </a:solidFill>
-                <a:latin typeface="Helvetica Neue"/>
-                <a:ea typeface="Helvetica Neue"/>
-                <a:cs typeface="Helvetica Neue"/>
-              </a:rPr>
-              <a:t>Can you answer these without notes?</a:t>
-            </a:r>
-          </a:p>
-        </p:txBody>
-      </p:sp>
-      <p:sp>
-        <p:nvSpPr>
-          <p:cNvPr id="6" name="exam-number-1">
-            <a:extLst xmlns:a="http://schemas.openxmlformats.org/drawingml/2006/main">
-              <a:ext uri="{FF2B5EF4-FFF2-40B4-BE49-F238E27FC236}">
-                <a16:creationId xmlns:a16="http://schemas.microsoft.com/office/drawing/2014/main" id="{6A7D3705-BFBC-458F-8850-6B28D90AC350}"/>
-              </a:ext>
-            </a:extLst>
-          </p:cNvPr>
-          <p:cNvSpPr>
-            <a:spLocks xmlns:a="http://schemas.openxmlformats.org/drawingml/2006/main" noGrp="1"/>
-          </p:cNvSpPr>
-          <p:nvPr/>
-        </p:nvSpPr>
-        <p:spPr>
-          <a:xfrm xmlns:a="http://schemas.openxmlformats.org/drawingml/2006/main">
-            <a:off x="390525" y="2238375"/>
-            <a:ext cx="590550" cy="400050"/>
-          </a:xfrm>
-          <a:prstGeom xmlns:a="http://schemas.openxmlformats.org/drawingml/2006/main" prst="rect">
-            <a:avLst/>
-          </a:prstGeom>
-          <a:noFill xmlns:a="http://schemas.openxmlformats.org/drawingml/2006/main"/>
-          <a:ln xmlns:a="http://schemas.openxmlformats.org/drawingml/2006/main" w="0">
-            <a:noFill/>
-            <a:prstDash val="solid"/>
-          </a:ln>
-        </p:spPr>
-        <p:txBody>
-          <a:bodyPr xmlns:a="http://schemas.openxmlformats.org/drawingml/2006/main" anchor="t">
-            <a:noAutofit/>
-          </a:bodyPr>
-          <a:lstStyle xmlns:a="http://schemas.openxmlformats.org/drawingml/2006/main"/>
-          <a:p xmlns:a="http://schemas.openxmlformats.org/drawingml/2006/main">
-            <a:pPr algn="l">
-              <a:defRPr sz="1725" b="1">
-                <a:solidFill>
-                  <a:srgbClr val="C4A1FF"/>
-                </a:solidFill>
-                <a:latin typeface="Helvetica Neue"/>
-                <a:ea typeface="Helvetica Neue"/>
-                <a:cs typeface="Helvetica Neue"/>
-              </a:defRPr>
-            </a:pPr>
-            <a:r>
-              <a:rPr sz="1725" b="1">
-                <a:solidFill>
-                  <a:srgbClr val="C4A1FF"/>
-                </a:solidFill>
-                <a:latin typeface="Helvetica Neue"/>
-                <a:ea typeface="Helvetica Neue"/>
-                <a:cs typeface="Helvetica Neue"/>
-              </a:rPr>
-              <a:t>01</a:t>
-            </a:r>
-          </a:p>
-        </p:txBody>
-      </p:sp>
-      <p:sp>
-        <p:nvSpPr>
-          <p:cNvPr id="7" name="exam-question-1">
-            <a:extLst xmlns:a="http://schemas.openxmlformats.org/drawingml/2006/main">
-              <a:ext uri="{FF2B5EF4-FFF2-40B4-BE49-F238E27FC236}">
-                <a16:creationId xmlns:a16="http://schemas.microsoft.com/office/drawing/2014/main" id="{B88BB786-FEF9-4F9E-B0EA-C9A3920C309F}"/>
-              </a:ext>
-            </a:extLst>
-          </p:cNvPr>
-          <p:cNvSpPr>
-            <a:spLocks xmlns:a="http://schemas.openxmlformats.org/drawingml/2006/main" noGrp="1"/>
-          </p:cNvSpPr>
-          <p:nvPr/>
-        </p:nvSpPr>
-        <p:spPr>
-          <a:xfrm xmlns:a="http://schemas.openxmlformats.org/drawingml/2006/main">
-            <a:off x="1076325" y="2238375"/>
-            <a:ext cx="4762500" cy="895350"/>
+          <p:cNvPr id="5" name="section-title">
+            <a:extLst xmlns:a="http://schemas.openxmlformats.org/drawingml/2006/main">
+              <a:ext uri="{FF2B5EF4-FFF2-40B4-BE49-F238E27FC236}">
+                <a16:creationId xmlns:a16="http://schemas.microsoft.com/office/drawing/2014/main" id="{52A6C4BD-CE23-4ADC-BC10-0A004CE52F60}"/>
+              </a:ext>
+            </a:extLst>
+          </p:cNvPr>
+          <p:cNvSpPr>
+            <a:spLocks xmlns:a="http://schemas.openxmlformats.org/drawingml/2006/main" noGrp="1"/>
+          </p:cNvSpPr>
+          <p:nvPr/>
+        </p:nvSpPr>
+        <p:spPr>
+          <a:xfrm xmlns:a="http://schemas.openxmlformats.org/drawingml/2006/main">
+            <a:off x="390525" y="971550"/>
+            <a:ext cx="11144250" cy="971550"/>
           </a:xfrm>
           <a:prstGeom xmlns:a="http://schemas.openxmlformats.org/drawingml/2006/main" prst="rect">
             <a:avLst/>
@@ -7828,105 +9963,47 @@
           <a:lstStyle xmlns:a="http://schemas.openxmlformats.org/drawingml/2006/main"/>
           <a:p xmlns:a="http://schemas.openxmlformats.org/drawingml/2006/main">
             <a:pPr algn="l">
-              <a:defRPr sz="1575" b="1">
-                <a:solidFill>
-                  <a:srgbClr val="111111"/>
-                </a:solidFill>
-                <a:latin typeface="Helvetica Neue"/>
-                <a:ea typeface="Helvetica Neue"/>
-                <a:cs typeface="Helvetica Neue"/>
-              </a:defRPr>
-            </a:pPr>
-            <a:r>
-              <a:rPr sz="1575" b="1">
-                <a:solidFill>
-                  <a:srgbClr val="111111"/>
-                </a:solidFill>
-                <a:latin typeface="Helvetica Neue"/>
-                <a:ea typeface="Helvetica Neue"/>
-                <a:cs typeface="Helvetica Neue"/>
-              </a:rPr>
-              <a:t>What distinguishes an agent demo from a production product?</a:t>
-            </a:r>
-          </a:p>
-        </p:txBody>
-      </p:sp>
-      <p:sp>
-        <p:nvSpPr>
-          <p:cNvPr id="8" name="exam-number-2">
-            <a:extLst xmlns:a="http://schemas.openxmlformats.org/drawingml/2006/main">
-              <a:ext uri="{FF2B5EF4-FFF2-40B4-BE49-F238E27FC236}">
-                <a16:creationId xmlns:a16="http://schemas.microsoft.com/office/drawing/2014/main" id="{E5A25FA3-BE85-445C-AC7B-5606536C07A1}"/>
-              </a:ext>
-            </a:extLst>
-          </p:cNvPr>
-          <p:cNvSpPr>
-            <a:spLocks xmlns:a="http://schemas.openxmlformats.org/drawingml/2006/main" noGrp="1"/>
-          </p:cNvSpPr>
-          <p:nvPr/>
-        </p:nvSpPr>
-        <p:spPr>
-          <a:xfrm xmlns:a="http://schemas.openxmlformats.org/drawingml/2006/main">
-            <a:off x="6191250" y="2238375"/>
-            <a:ext cx="590550" cy="400050"/>
-          </a:xfrm>
-          <a:prstGeom xmlns:a="http://schemas.openxmlformats.org/drawingml/2006/main" prst="rect">
-            <a:avLst/>
-          </a:prstGeom>
-          <a:noFill xmlns:a="http://schemas.openxmlformats.org/drawingml/2006/main"/>
-          <a:ln xmlns:a="http://schemas.openxmlformats.org/drawingml/2006/main" w="0">
-            <a:noFill/>
-            <a:prstDash val="solid"/>
-          </a:ln>
-        </p:spPr>
-        <p:txBody>
-          <a:bodyPr xmlns:a="http://schemas.openxmlformats.org/drawingml/2006/main" anchor="t">
-            <a:noAutofit/>
-          </a:bodyPr>
-          <a:lstStyle xmlns:a="http://schemas.openxmlformats.org/drawingml/2006/main"/>
-          <a:p xmlns:a="http://schemas.openxmlformats.org/drawingml/2006/main">
-            <a:pPr algn="l">
-              <a:defRPr sz="1725" b="1">
-                <a:solidFill>
-                  <a:srgbClr val="C4A1FF"/>
-                </a:solidFill>
-                <a:latin typeface="Helvetica Neue"/>
-                <a:ea typeface="Helvetica Neue"/>
-                <a:cs typeface="Helvetica Neue"/>
-              </a:defRPr>
-            </a:pPr>
-            <a:r>
-              <a:rPr sz="1725" b="1">
-                <a:solidFill>
-                  <a:srgbClr val="C4A1FF"/>
-                </a:solidFill>
-                <a:latin typeface="Helvetica Neue"/>
-                <a:ea typeface="Helvetica Neue"/>
-                <a:cs typeface="Helvetica Neue"/>
-              </a:rPr>
-              <a:t>02</a:t>
-            </a:r>
-          </a:p>
-        </p:txBody>
-      </p:sp>
-      <p:sp>
-        <p:nvSpPr>
-          <p:cNvPr id="9" name="exam-question-2">
-            <a:extLst xmlns:a="http://schemas.openxmlformats.org/drawingml/2006/main">
-              <a:ext uri="{FF2B5EF4-FFF2-40B4-BE49-F238E27FC236}">
-                <a16:creationId xmlns:a16="http://schemas.microsoft.com/office/drawing/2014/main" id="{CB3E00F8-67DD-4947-9760-49DD8F1593B4}"/>
-              </a:ext>
-            </a:extLst>
-          </p:cNvPr>
-          <p:cNvSpPr>
-            <a:spLocks xmlns:a="http://schemas.openxmlformats.org/drawingml/2006/main" noGrp="1"/>
-          </p:cNvSpPr>
-          <p:nvPr/>
-        </p:nvSpPr>
-        <p:spPr>
-          <a:xfrm xmlns:a="http://schemas.openxmlformats.org/drawingml/2006/main">
-            <a:off x="6877050" y="2238375"/>
-            <a:ext cx="4762500" cy="895350"/>
+              <a:defRPr sz="3000" b="1">
+                <a:solidFill>
+                  <a:srgbClr val="111111"/>
+                </a:solidFill>
+                <a:latin typeface="Helvetica Neue"/>
+                <a:ea typeface="Helvetica Neue"/>
+                <a:cs typeface="Helvetica Neue"/>
+              </a:defRPr>
+            </a:pPr>
+            <a:r>
+              <a:rPr sz="3000" b="1">
+                <a:solidFill>
+                  <a:srgbClr val="111111"/>
+                </a:solidFill>
+                <a:latin typeface="Helvetica Neue"/>
+                <a:ea typeface="Helvetica Neue"/>
+                <a:cs typeface="Helvetica Neue"/>
+              </a:rPr>
+              <a:t>A maintained system needs evidence and an owner</a:t>
+            </a:r>
+          </a:p>
+        </p:txBody>
+      </p:sp>
+      <p:sp>
+        <p:nvSpPr>
+          <p:cNvPr id="6" name="section-explanation">
+            <a:extLst xmlns:a="http://schemas.openxmlformats.org/drawingml/2006/main">
+              <a:ext uri="{FF2B5EF4-FFF2-40B4-BE49-F238E27FC236}">
+                <a16:creationId xmlns:a16="http://schemas.microsoft.com/office/drawing/2014/main" id="{DD4D10F0-5970-403B-A7D1-432926CF3542}"/>
+              </a:ext>
+            </a:extLst>
+          </p:cNvPr>
+          <p:cNvSpPr>
+            <a:spLocks xmlns:a="http://schemas.openxmlformats.org/drawingml/2006/main" noGrp="1"/>
+          </p:cNvSpPr>
+          <p:nvPr/>
+        </p:nvSpPr>
+        <p:spPr>
+          <a:xfrm xmlns:a="http://schemas.openxmlformats.org/drawingml/2006/main">
+            <a:off x="390525" y="2381250"/>
+            <a:ext cx="4524375" cy="2905125"/>
           </a:xfrm>
           <a:prstGeom xmlns:a="http://schemas.openxmlformats.org/drawingml/2006/main" prst="rect">
             <a:avLst/>
@@ -7944,105 +10021,80 @@
           <a:lstStyle xmlns:a="http://schemas.openxmlformats.org/drawingml/2006/main"/>
           <a:p xmlns:a="http://schemas.openxmlformats.org/drawingml/2006/main">
             <a:pPr algn="l">
-              <a:defRPr sz="1575" b="1">
-                <a:solidFill>
-                  <a:srgbClr val="111111"/>
-                </a:solidFill>
-                <a:latin typeface="Helvetica Neue"/>
-                <a:ea typeface="Helvetica Neue"/>
-                <a:cs typeface="Helvetica Neue"/>
-              </a:defRPr>
-            </a:pPr>
-            <a:r>
-              <a:rPr sz="1575" b="1">
-                <a:solidFill>
-                  <a:srgbClr val="111111"/>
-                </a:solidFill>
-                <a:latin typeface="Helvetica Neue"/>
-                <a:ea typeface="Helvetica Neue"/>
-                <a:cs typeface="Helvetica Neue"/>
-              </a:rPr>
-              <a:t>Give four methods for reducing cost and four for reducing latency.</a:t>
-            </a:r>
-          </a:p>
-        </p:txBody>
-      </p:sp>
-      <p:sp>
-        <p:nvSpPr>
-          <p:cNvPr id="10" name="exam-number-3">
-            <a:extLst xmlns:a="http://schemas.openxmlformats.org/drawingml/2006/main">
-              <a:ext uri="{FF2B5EF4-FFF2-40B4-BE49-F238E27FC236}">
-                <a16:creationId xmlns:a16="http://schemas.microsoft.com/office/drawing/2014/main" id="{48B8BD90-787C-494C-AA67-9286B5B32B96}"/>
-              </a:ext>
-            </a:extLst>
-          </p:cNvPr>
-          <p:cNvSpPr>
-            <a:spLocks xmlns:a="http://schemas.openxmlformats.org/drawingml/2006/main" noGrp="1"/>
-          </p:cNvSpPr>
-          <p:nvPr/>
-        </p:nvSpPr>
-        <p:spPr>
-          <a:xfrm xmlns:a="http://schemas.openxmlformats.org/drawingml/2006/main">
-            <a:off x="390525" y="3495675"/>
-            <a:ext cx="590550" cy="400050"/>
-          </a:xfrm>
-          <a:prstGeom xmlns:a="http://schemas.openxmlformats.org/drawingml/2006/main" prst="rect">
-            <a:avLst/>
-          </a:prstGeom>
-          <a:noFill xmlns:a="http://schemas.openxmlformats.org/drawingml/2006/main"/>
-          <a:ln xmlns:a="http://schemas.openxmlformats.org/drawingml/2006/main" w="0">
-            <a:noFill/>
-            <a:prstDash val="solid"/>
-          </a:ln>
-        </p:spPr>
-        <p:txBody>
-          <a:bodyPr xmlns:a="http://schemas.openxmlformats.org/drawingml/2006/main" anchor="t">
-            <a:noAutofit/>
-          </a:bodyPr>
-          <a:lstStyle xmlns:a="http://schemas.openxmlformats.org/drawingml/2006/main"/>
-          <a:p xmlns:a="http://schemas.openxmlformats.org/drawingml/2006/main">
-            <a:pPr algn="l">
-              <a:defRPr sz="1725" b="1">
-                <a:solidFill>
-                  <a:srgbClr val="C4A1FF"/>
-                </a:solidFill>
-                <a:latin typeface="Helvetica Neue"/>
-                <a:ea typeface="Helvetica Neue"/>
-                <a:cs typeface="Helvetica Neue"/>
-              </a:defRPr>
-            </a:pPr>
-            <a:r>
-              <a:rPr sz="1725" b="1">
-                <a:solidFill>
-                  <a:srgbClr val="C4A1FF"/>
-                </a:solidFill>
-                <a:latin typeface="Helvetica Neue"/>
-                <a:ea typeface="Helvetica Neue"/>
-                <a:cs typeface="Helvetica Neue"/>
-              </a:rPr>
-              <a:t>03</a:t>
-            </a:r>
-          </a:p>
-        </p:txBody>
-      </p:sp>
-      <p:sp>
-        <p:nvSpPr>
-          <p:cNvPr id="11" name="exam-question-3">
-            <a:extLst xmlns:a="http://schemas.openxmlformats.org/drawingml/2006/main">
-              <a:ext uri="{FF2B5EF4-FFF2-40B4-BE49-F238E27FC236}">
-                <a16:creationId xmlns:a16="http://schemas.microsoft.com/office/drawing/2014/main" id="{8BA36E84-A6FD-4AB2-A687-E1E268272BD4}"/>
-              </a:ext>
-            </a:extLst>
-          </p:cNvPr>
-          <p:cNvSpPr>
-            <a:spLocks xmlns:a="http://schemas.openxmlformats.org/drawingml/2006/main" noGrp="1"/>
-          </p:cNvSpPr>
-          <p:nvPr/>
-        </p:nvSpPr>
-        <p:spPr>
-          <a:xfrm xmlns:a="http://schemas.openxmlformats.org/drawingml/2006/main">
-            <a:off x="1076325" y="3495675"/>
-            <a:ext cx="4762500" cy="895350"/>
+              <a:defRPr sz="1875" b="0">
+                <a:solidFill>
+                  <a:srgbClr val="5B5B57"/>
+                </a:solidFill>
+                <a:latin typeface="Helvetica Neue"/>
+                <a:ea typeface="Helvetica Neue"/>
+                <a:cs typeface="Helvetica Neue"/>
+              </a:defRPr>
+            </a:pPr>
+            <a:r>
+              <a:rPr sz="1875" b="0">
+                <a:solidFill>
+                  <a:srgbClr val="5B5B57"/>
+                </a:solidFill>
+                <a:latin typeface="Helvetica Neue"/>
+                <a:ea typeface="Helvetica Neue"/>
+                <a:cs typeface="Helvetica Neue"/>
+              </a:rPr>
+              <a:t>The scientific-computing field report motivates reference tests and stewardship. OpenAI's observational research post also warns that activity metrics need careful interpretation. The capstone therefore assesses validated outcomes and reproducibility.</a:t>
+            </a:r>
+          </a:p>
+        </p:txBody>
+      </p:sp>
+      <p:sp>
+        <p:nvSpPr>
+          <p:cNvPr id="7" name="column-rule">
+            <a:extLst xmlns:a="http://schemas.openxmlformats.org/drawingml/2006/main">
+              <a:ext uri="{FF2B5EF4-FFF2-40B4-BE49-F238E27FC236}">
+                <a16:creationId xmlns:a16="http://schemas.microsoft.com/office/drawing/2014/main" id="{9E717341-B0D7-4B4C-9166-6060B12905A9}"/>
+              </a:ext>
+            </a:extLst>
+          </p:cNvPr>
+          <p:cNvSpPr>
+            <a:spLocks xmlns:a="http://schemas.openxmlformats.org/drawingml/2006/main" noGrp="1"/>
+          </p:cNvSpPr>
+          <p:nvPr/>
+        </p:nvSpPr>
+        <p:spPr>
+          <a:xfrm xmlns:a="http://schemas.openxmlformats.org/drawingml/2006/main">
+            <a:off x="5334000" y="2343150"/>
+            <a:ext cx="47625" cy="3257550"/>
+          </a:xfrm>
+          <a:prstGeom xmlns:a="http://schemas.openxmlformats.org/drawingml/2006/main" prst="rect">
+            <a:avLst/>
+          </a:prstGeom>
+          <a:solidFill xmlns:a="http://schemas.openxmlformats.org/drawingml/2006/main">
+            <a:srgbClr val="C4A1FF"/>
+          </a:solidFill>
+          <a:ln xmlns:a="http://schemas.openxmlformats.org/drawingml/2006/main" w="0">
+            <a:solidFill>
+              <a:srgbClr val="C4A1FF"/>
+            </a:solidFill>
+            <a:prstDash val="solid"/>
+          </a:ln>
+        </p:spPr>
+      </p:sp>
+      <p:sp>
+        <p:nvSpPr>
+          <p:cNvPr id="8" name="section-points">
+            <a:extLst xmlns:a="http://schemas.openxmlformats.org/drawingml/2006/main">
+              <a:ext uri="{FF2B5EF4-FFF2-40B4-BE49-F238E27FC236}">
+                <a16:creationId xmlns:a16="http://schemas.microsoft.com/office/drawing/2014/main" id="{5BD625BD-C641-438E-B8E3-9CF9B1FA2176}"/>
+              </a:ext>
+            </a:extLst>
+          </p:cNvPr>
+          <p:cNvSpPr>
+            <a:spLocks xmlns:a="http://schemas.openxmlformats.org/drawingml/2006/main" noGrp="1"/>
+          </p:cNvSpPr>
+          <p:nvPr/>
+        </p:nvSpPr>
+        <p:spPr>
+          <a:xfrm xmlns:a="http://schemas.openxmlformats.org/drawingml/2006/main">
+            <a:off x="5857875" y="2343150"/>
+            <a:ext cx="5572125" cy="3429000"/>
           </a:xfrm>
           <a:prstGeom xmlns:a="http://schemas.openxmlformats.org/drawingml/2006/main" prst="rect">
             <a:avLst/>
@@ -8060,67 +10112,37 @@
           <a:lstStyle xmlns:a="http://schemas.openxmlformats.org/drawingml/2006/main"/>
           <a:p xmlns:a="http://schemas.openxmlformats.org/drawingml/2006/main">
             <a:pPr algn="l">
-              <a:defRPr sz="1575" b="1">
-                <a:solidFill>
-                  <a:srgbClr val="111111"/>
-                </a:solidFill>
-                <a:latin typeface="Helvetica Neue"/>
-                <a:ea typeface="Helvetica Neue"/>
-                <a:cs typeface="Helvetica Neue"/>
-              </a:defRPr>
-            </a:pPr>
-            <a:r>
-              <a:rPr sz="1575" b="1">
-                <a:solidFill>
-                  <a:srgbClr val="111111"/>
-                </a:solidFill>
-                <a:latin typeface="Helvetica Neue"/>
-                <a:ea typeface="Helvetica Neue"/>
-                <a:cs typeface="Helvetica Neue"/>
-              </a:rPr>
-              <a:t>What artifacts must be versioned for reproducibility?</a:t>
-            </a:r>
-          </a:p>
-        </p:txBody>
-      </p:sp>
-      <p:sp>
-        <p:nvSpPr>
-          <p:cNvPr id="12" name="exam-number-4">
-            <a:extLst xmlns:a="http://schemas.openxmlformats.org/drawingml/2006/main">
-              <a:ext uri="{FF2B5EF4-FFF2-40B4-BE49-F238E27FC236}">
-                <a16:creationId xmlns:a16="http://schemas.microsoft.com/office/drawing/2014/main" id="{4F48CAF1-E516-47AF-89B4-F6F2117E2BE7}"/>
-              </a:ext>
-            </a:extLst>
-          </p:cNvPr>
-          <p:cNvSpPr>
-            <a:spLocks xmlns:a="http://schemas.openxmlformats.org/drawingml/2006/main" noGrp="1"/>
-          </p:cNvSpPr>
-          <p:nvPr/>
-        </p:nvSpPr>
-        <p:spPr>
-          <a:xfrm xmlns:a="http://schemas.openxmlformats.org/drawingml/2006/main">
-            <a:off x="6191250" y="3495675"/>
-            <a:ext cx="590550" cy="400050"/>
-          </a:xfrm>
-          <a:prstGeom xmlns:a="http://schemas.openxmlformats.org/drawingml/2006/main" prst="rect">
-            <a:avLst/>
-          </a:prstGeom>
-          <a:noFill xmlns:a="http://schemas.openxmlformats.org/drawingml/2006/main"/>
-          <a:ln xmlns:a="http://schemas.openxmlformats.org/drawingml/2006/main" w="0">
-            <a:noFill/>
-            <a:prstDash val="solid"/>
-          </a:ln>
-        </p:spPr>
-        <p:txBody>
-          <a:bodyPr xmlns:a="http://schemas.openxmlformats.org/drawingml/2006/main" anchor="t">
-            <a:noAutofit/>
-          </a:bodyPr>
-          <a:lstStyle xmlns:a="http://schemas.openxmlformats.org/drawingml/2006/main"/>
+              <a:defRPr sz="1725" b="1">
+                <a:solidFill>
+                  <a:srgbClr val="111111"/>
+                </a:solidFill>
+                <a:latin typeface="Helvetica Neue"/>
+                <a:ea typeface="Helvetica Neue"/>
+                <a:cs typeface="Helvetica Neue"/>
+              </a:defRPr>
+            </a:pPr>
+            <a:r>
+              <a:rPr sz="1725" b="1">
+                <a:solidFill>
+                  <a:srgbClr val="111111"/>
+                </a:solidFill>
+                <a:latin typeface="Helvetica Neue"/>
+                <a:ea typeface="Helvetica Neue"/>
+                <a:cs typeface="Helvetica Neue"/>
+              </a:rPr>
+              <a:t>01  Test recovery and unexpected inputs.</a:t>
+            </a:r>
+          </a:p>
+          <a:p xmlns:a="http://schemas.openxmlformats.org/drawingml/2006/main">
+            <a:r>
+              <a:t/>
+            </a:r>
+          </a:p>
           <a:p xmlns:a="http://schemas.openxmlformats.org/drawingml/2006/main">
             <a:pPr algn="l">
               <a:defRPr sz="1725" b="1">
                 <a:solidFill>
-                  <a:srgbClr val="C4A1FF"/>
+                  <a:srgbClr val="111111"/>
                 </a:solidFill>
                 <a:latin typeface="Helvetica Neue"/>
                 <a:ea typeface="Helvetica Neue"/>
@@ -8130,113 +10152,25 @@
             <a:r>
               <a:rPr sz="1725" b="1">
                 <a:solidFill>
-                  <a:srgbClr val="C4A1FF"/>
-                </a:solidFill>
-                <a:latin typeface="Helvetica Neue"/>
-                <a:ea typeface="Helvetica Neue"/>
-                <a:cs typeface="Helvetica Neue"/>
-              </a:rPr>
-              <a:t>04</a:t>
-            </a:r>
-          </a:p>
-        </p:txBody>
-      </p:sp>
-      <p:sp>
-        <p:nvSpPr>
-          <p:cNvPr id="13" name="exam-question-4">
-            <a:extLst xmlns:a="http://schemas.openxmlformats.org/drawingml/2006/main">
-              <a:ext uri="{FF2B5EF4-FFF2-40B4-BE49-F238E27FC236}">
-                <a16:creationId xmlns:a16="http://schemas.microsoft.com/office/drawing/2014/main" id="{11B7E96E-BDBA-4DFE-9B52-7EB3735B2C7C}"/>
-              </a:ext>
-            </a:extLst>
-          </p:cNvPr>
-          <p:cNvSpPr>
-            <a:spLocks xmlns:a="http://schemas.openxmlformats.org/drawingml/2006/main" noGrp="1"/>
-          </p:cNvSpPr>
-          <p:nvPr/>
-        </p:nvSpPr>
-        <p:spPr>
-          <a:xfrm xmlns:a="http://schemas.openxmlformats.org/drawingml/2006/main">
-            <a:off x="6877050" y="3495675"/>
-            <a:ext cx="4762500" cy="895350"/>
-          </a:xfrm>
-          <a:prstGeom xmlns:a="http://schemas.openxmlformats.org/drawingml/2006/main" prst="rect">
-            <a:avLst/>
-          </a:prstGeom>
-          <a:noFill xmlns:a="http://schemas.openxmlformats.org/drawingml/2006/main"/>
-          <a:ln xmlns:a="http://schemas.openxmlformats.org/drawingml/2006/main" w="0">
-            <a:noFill/>
-            <a:prstDash val="solid"/>
-          </a:ln>
-        </p:spPr>
-        <p:txBody>
-          <a:bodyPr xmlns:a="http://schemas.openxmlformats.org/drawingml/2006/main" anchor="t">
-            <a:normAutofit fontScale="100000"/>
-          </a:bodyPr>
-          <a:lstStyle xmlns:a="http://schemas.openxmlformats.org/drawingml/2006/main"/>
-          <a:p xmlns:a="http://schemas.openxmlformats.org/drawingml/2006/main">
-            <a:pPr algn="l">
-              <a:defRPr sz="1575" b="1">
-                <a:solidFill>
-                  <a:srgbClr val="111111"/>
-                </a:solidFill>
-                <a:latin typeface="Helvetica Neue"/>
-                <a:ea typeface="Helvetica Neue"/>
-                <a:cs typeface="Helvetica Neue"/>
-              </a:defRPr>
-            </a:pPr>
-            <a:r>
-              <a:rPr sz="1575" b="1">
-                <a:solidFill>
-                  <a:srgbClr val="111111"/>
-                </a:solidFill>
-                <a:latin typeface="Helvetica Neue"/>
-                <a:ea typeface="Helvetica Neue"/>
-                <a:cs typeface="Helvetica Neue"/>
-              </a:rPr>
-              <a:t>What does AgentOps add to ordinary service operations?</a:t>
-            </a:r>
-          </a:p>
-        </p:txBody>
-      </p:sp>
-      <p:sp>
-        <p:nvSpPr>
-          <p:cNvPr id="14" name="exam-number-5">
-            <a:extLst xmlns:a="http://schemas.openxmlformats.org/drawingml/2006/main">
-              <a:ext uri="{FF2B5EF4-FFF2-40B4-BE49-F238E27FC236}">
-                <a16:creationId xmlns:a16="http://schemas.microsoft.com/office/drawing/2014/main" id="{D585ECE3-9A59-49F6-BC1B-F83365068FCB}"/>
-              </a:ext>
-            </a:extLst>
-          </p:cNvPr>
-          <p:cNvSpPr>
-            <a:spLocks xmlns:a="http://schemas.openxmlformats.org/drawingml/2006/main" noGrp="1"/>
-          </p:cNvSpPr>
-          <p:nvPr/>
-        </p:nvSpPr>
-        <p:spPr>
-          <a:xfrm xmlns:a="http://schemas.openxmlformats.org/drawingml/2006/main">
-            <a:off x="390525" y="4752975"/>
-            <a:ext cx="590550" cy="400050"/>
-          </a:xfrm>
-          <a:prstGeom xmlns:a="http://schemas.openxmlformats.org/drawingml/2006/main" prst="rect">
-            <a:avLst/>
-          </a:prstGeom>
-          <a:noFill xmlns:a="http://schemas.openxmlformats.org/drawingml/2006/main"/>
-          <a:ln xmlns:a="http://schemas.openxmlformats.org/drawingml/2006/main" w="0">
-            <a:noFill/>
-            <a:prstDash val="solid"/>
-          </a:ln>
-        </p:spPr>
-        <p:txBody>
-          <a:bodyPr xmlns:a="http://schemas.openxmlformats.org/drawingml/2006/main" anchor="t">
-            <a:noAutofit/>
-          </a:bodyPr>
-          <a:lstStyle xmlns:a="http://schemas.openxmlformats.org/drawingml/2006/main"/>
+                  <a:srgbClr val="111111"/>
+                </a:solidFill>
+                <a:latin typeface="Helvetica Neue"/>
+                <a:ea typeface="Helvetica Neue"/>
+                <a:cs typeface="Helvetica Neue"/>
+              </a:rPr>
+              <a:t>02  Name the maintainer and escalation path.</a:t>
+            </a:r>
+          </a:p>
+          <a:p xmlns:a="http://schemas.openxmlformats.org/drawingml/2006/main">
+            <a:r>
+              <a:t/>
+            </a:r>
+          </a:p>
           <a:p xmlns:a="http://schemas.openxmlformats.org/drawingml/2006/main">
             <a:pPr algn="l">
               <a:defRPr sz="1725" b="1">
                 <a:solidFill>
-                  <a:srgbClr val="C4A1FF"/>
+                  <a:srgbClr val="111111"/>
                 </a:solidFill>
                 <a:latin typeface="Helvetica Neue"/>
                 <a:ea typeface="Helvetica Neue"/>
@@ -8246,187 +10180,13 @@
             <a:r>
               <a:rPr sz="1725" b="1">
                 <a:solidFill>
-                  <a:srgbClr val="C4A1FF"/>
-                </a:solidFill>
-                <a:latin typeface="Helvetica Neue"/>
-                <a:ea typeface="Helvetica Neue"/>
-                <a:cs typeface="Helvetica Neue"/>
-              </a:rPr>
-              <a:t>05</a:t>
-            </a:r>
-          </a:p>
-        </p:txBody>
-      </p:sp>
-      <p:sp>
-        <p:nvSpPr>
-          <p:cNvPr id="15" name="exam-question-5">
-            <a:extLst xmlns:a="http://schemas.openxmlformats.org/drawingml/2006/main">
-              <a:ext uri="{FF2B5EF4-FFF2-40B4-BE49-F238E27FC236}">
-                <a16:creationId xmlns:a16="http://schemas.microsoft.com/office/drawing/2014/main" id="{66165C10-0E5A-40AA-B7D5-417038204D29}"/>
-              </a:ext>
-            </a:extLst>
-          </p:cNvPr>
-          <p:cNvSpPr>
-            <a:spLocks xmlns:a="http://schemas.openxmlformats.org/drawingml/2006/main" noGrp="1"/>
-          </p:cNvSpPr>
-          <p:nvPr/>
-        </p:nvSpPr>
-        <p:spPr>
-          <a:xfrm xmlns:a="http://schemas.openxmlformats.org/drawingml/2006/main">
-            <a:off x="1076325" y="4752975"/>
-            <a:ext cx="4762500" cy="895350"/>
-          </a:xfrm>
-          <a:prstGeom xmlns:a="http://schemas.openxmlformats.org/drawingml/2006/main" prst="rect">
-            <a:avLst/>
-          </a:prstGeom>
-          <a:noFill xmlns:a="http://schemas.openxmlformats.org/drawingml/2006/main"/>
-          <a:ln xmlns:a="http://schemas.openxmlformats.org/drawingml/2006/main" w="0">
-            <a:noFill/>
-            <a:prstDash val="solid"/>
-          </a:ln>
-        </p:spPr>
-        <p:txBody>
-          <a:bodyPr xmlns:a="http://schemas.openxmlformats.org/drawingml/2006/main" anchor="t">
-            <a:normAutofit fontScale="100000"/>
-          </a:bodyPr>
-          <a:lstStyle xmlns:a="http://schemas.openxmlformats.org/drawingml/2006/main"/>
-          <a:p xmlns:a="http://schemas.openxmlformats.org/drawingml/2006/main">
-            <a:pPr algn="l">
-              <a:defRPr sz="1575" b="1">
-                <a:solidFill>
-                  <a:srgbClr val="111111"/>
-                </a:solidFill>
-                <a:latin typeface="Helvetica Neue"/>
-                <a:ea typeface="Helvetica Neue"/>
-                <a:cs typeface="Helvetica Neue"/>
-              </a:defRPr>
-            </a:pPr>
-            <a:r>
-              <a:rPr sz="1575" b="1">
-                <a:solidFill>
-                  <a:srgbClr val="111111"/>
-                </a:solidFill>
-                <a:latin typeface="Helvetica Neue"/>
-                <a:ea typeface="Helvetica Neue"/>
-                <a:cs typeface="Helvetica Neue"/>
-              </a:rPr>
-              <a:t>Why are coding agents comparatively successful?</a:t>
-            </a:r>
-          </a:p>
-        </p:txBody>
-      </p:sp>
-      <p:sp>
-        <p:nvSpPr>
-          <p:cNvPr id="16" name="exam-number-6">
-            <a:extLst xmlns:a="http://schemas.openxmlformats.org/drawingml/2006/main">
-              <a:ext uri="{FF2B5EF4-FFF2-40B4-BE49-F238E27FC236}">
-                <a16:creationId xmlns:a16="http://schemas.microsoft.com/office/drawing/2014/main" id="{0EE22BB0-B394-4E68-8066-353511F011E4}"/>
-              </a:ext>
-            </a:extLst>
-          </p:cNvPr>
-          <p:cNvSpPr>
-            <a:spLocks xmlns:a="http://schemas.openxmlformats.org/drawingml/2006/main" noGrp="1"/>
-          </p:cNvSpPr>
-          <p:nvPr/>
-        </p:nvSpPr>
-        <p:spPr>
-          <a:xfrm xmlns:a="http://schemas.openxmlformats.org/drawingml/2006/main">
-            <a:off x="6191250" y="4752975"/>
-            <a:ext cx="590550" cy="400050"/>
-          </a:xfrm>
-          <a:prstGeom xmlns:a="http://schemas.openxmlformats.org/drawingml/2006/main" prst="rect">
-            <a:avLst/>
-          </a:prstGeom>
-          <a:noFill xmlns:a="http://schemas.openxmlformats.org/drawingml/2006/main"/>
-          <a:ln xmlns:a="http://schemas.openxmlformats.org/drawingml/2006/main" w="0">
-            <a:noFill/>
-            <a:prstDash val="solid"/>
-          </a:ln>
-        </p:spPr>
-        <p:txBody>
-          <a:bodyPr xmlns:a="http://schemas.openxmlformats.org/drawingml/2006/main" anchor="t">
-            <a:noAutofit/>
-          </a:bodyPr>
-          <a:lstStyle xmlns:a="http://schemas.openxmlformats.org/drawingml/2006/main"/>
-          <a:p xmlns:a="http://schemas.openxmlformats.org/drawingml/2006/main">
-            <a:pPr algn="l">
-              <a:defRPr sz="1725" b="1">
-                <a:solidFill>
-                  <a:srgbClr val="C4A1FF"/>
-                </a:solidFill>
-                <a:latin typeface="Helvetica Neue"/>
-                <a:ea typeface="Helvetica Neue"/>
-                <a:cs typeface="Helvetica Neue"/>
-              </a:defRPr>
-            </a:pPr>
-            <a:r>
-              <a:rPr sz="1725" b="1">
-                <a:solidFill>
-                  <a:srgbClr val="C4A1FF"/>
-                </a:solidFill>
-                <a:latin typeface="Helvetica Neue"/>
-                <a:ea typeface="Helvetica Neue"/>
-                <a:cs typeface="Helvetica Neue"/>
-              </a:rPr>
-              <a:t>06</a:t>
-            </a:r>
-          </a:p>
-        </p:txBody>
-      </p:sp>
-      <p:sp>
-        <p:nvSpPr>
-          <p:cNvPr id="17" name="exam-question-6">
-            <a:extLst xmlns:a="http://schemas.openxmlformats.org/drawingml/2006/main">
-              <a:ext uri="{FF2B5EF4-FFF2-40B4-BE49-F238E27FC236}">
-                <a16:creationId xmlns:a16="http://schemas.microsoft.com/office/drawing/2014/main" id="{51888762-10BC-46B1-B26C-235478BCED01}"/>
-              </a:ext>
-            </a:extLst>
-          </p:cNvPr>
-          <p:cNvSpPr>
-            <a:spLocks xmlns:a="http://schemas.openxmlformats.org/drawingml/2006/main" noGrp="1"/>
-          </p:cNvSpPr>
-          <p:nvPr/>
-        </p:nvSpPr>
-        <p:spPr>
-          <a:xfrm xmlns:a="http://schemas.openxmlformats.org/drawingml/2006/main">
-            <a:off x="6877050" y="4752975"/>
-            <a:ext cx="4762500" cy="895350"/>
-          </a:xfrm>
-          <a:prstGeom xmlns:a="http://schemas.openxmlformats.org/drawingml/2006/main" prst="rect">
-            <a:avLst/>
-          </a:prstGeom>
-          <a:noFill xmlns:a="http://schemas.openxmlformats.org/drawingml/2006/main"/>
-          <a:ln xmlns:a="http://schemas.openxmlformats.org/drawingml/2006/main" w="0">
-            <a:noFill/>
-            <a:prstDash val="solid"/>
-          </a:ln>
-        </p:spPr>
-        <p:txBody>
-          <a:bodyPr xmlns:a="http://schemas.openxmlformats.org/drawingml/2006/main" anchor="t">
-            <a:normAutofit fontScale="100000"/>
-          </a:bodyPr>
-          <a:lstStyle xmlns:a="http://schemas.openxmlformats.org/drawingml/2006/main"/>
-          <a:p xmlns:a="http://schemas.openxmlformats.org/drawingml/2006/main">
-            <a:pPr algn="l">
-              <a:defRPr sz="1575" b="1">
-                <a:solidFill>
-                  <a:srgbClr val="111111"/>
-                </a:solidFill>
-                <a:latin typeface="Helvetica Neue"/>
-                <a:ea typeface="Helvetica Neue"/>
-                <a:cs typeface="Helvetica Neue"/>
-              </a:defRPr>
-            </a:pPr>
-            <a:r>
-              <a:rPr sz="1575" b="1">
-                <a:solidFill>
-                  <a:srgbClr val="111111"/>
-                </a:solidFill>
-                <a:latin typeface="Helvetica Neue"/>
-                <a:ea typeface="Helvetica Neue"/>
-                <a:cs typeface="Helvetica Neue"/>
-              </a:rPr>
-              <a:t>Create a production launch checklist for an autonomous agent.</a:t>
+                  <a:srgbClr val="111111"/>
+                </a:solidFill>
+                <a:latin typeface="Helvetica Neue"/>
+                <a:ea typeface="Helvetica Neue"/>
+                <a:cs typeface="Helvetica Neue"/>
+              </a:rPr>
+              <a:t>03  Separate activity counts from demonstrated task success.</a:t>
             </a:r>
           </a:p>
         </p:txBody>
@@ -8434,7 +10194,7 @@
     </p:spTree>
     <p:extLst>
       <p:ext uri="{BB962C8B-B14F-4D97-AF65-F5344CB8AC3E}">
-        <p14:creationId xmlns:p14="http://schemas.microsoft.com/office/powerpoint/2010/main" val="1792085699"/>
+        <p14:creationId xmlns:p14="http://schemas.microsoft.com/office/powerpoint/2010/main" val="196902289"/>
       </p:ext>
     </p:extLst>
   </p:cSld>
@@ -8442,9 +10202,9 @@
 </file>
 
 <file path=ppt/theme/theme1.xml><?xml version="1.0" encoding="utf-8"?>
-<a:theme xmlns:a="http://schemas.openxmlformats.org/drawingml/2006/main" name="ChatGPT">
+<a:theme xmlns:a="http://schemas.openxmlformats.org/drawingml/2006/main" name="Course">
   <a:themeElements>
-    <a:clrScheme name="ChatGPT">
+    <a:clrScheme name="Course">
       <a:dk1>
         <a:srgbClr val="000000"/>
       </a:dk1>
@@ -8494,7 +10254,7 @@
         <a:cs typeface="Calibri"/>
       </a:minorFont>
     </a:fontScheme>
-    <a:fmtScheme name="ChatGPT">
+    <a:fmtScheme name="Course">
       <a:fillStyleLst>
         <a:solidFill>
           <a:schemeClr val="phClr"/>
